--- a/Projects/OpenCanpas01/TrialClass/UE_アクションゲーム制作体験.pptx
+++ b/Projects/OpenCanpas01/TrialClass/UE_アクションゲーム制作体験.pptx
@@ -280,7 +280,7 @@
           <a:p>
             <a:fld id="{E9CC885B-4903-4D54-9A93-00025F12DED9}" type="datetimeFigureOut">
               <a:rPr kumimoji="1" lang="ja-JP" altLang="en-US" smtClean="0"/>
-              <a:t>2025/7/6</a:t>
+              <a:t>2025/7/7</a:t>
             </a:fld>
             <a:endParaRPr kumimoji="1" lang="ja-JP" altLang="en-US"/>
           </a:p>
@@ -510,7 +510,7 @@
           <a:p>
             <a:fld id="{E9CC885B-4903-4D54-9A93-00025F12DED9}" type="datetimeFigureOut">
               <a:rPr kumimoji="1" lang="ja-JP" altLang="en-US" smtClean="0"/>
-              <a:t>2025/7/6</a:t>
+              <a:t>2025/7/7</a:t>
             </a:fld>
             <a:endParaRPr kumimoji="1" lang="ja-JP" altLang="en-US"/>
           </a:p>
@@ -750,7 +750,7 @@
           <a:p>
             <a:fld id="{E9CC885B-4903-4D54-9A93-00025F12DED9}" type="datetimeFigureOut">
               <a:rPr kumimoji="1" lang="ja-JP" altLang="en-US" smtClean="0"/>
-              <a:t>2025/7/6</a:t>
+              <a:t>2025/7/7</a:t>
             </a:fld>
             <a:endParaRPr kumimoji="1" lang="ja-JP" altLang="en-US"/>
           </a:p>
@@ -980,7 +980,7 @@
           <a:p>
             <a:fld id="{E9CC885B-4903-4D54-9A93-00025F12DED9}" type="datetimeFigureOut">
               <a:rPr kumimoji="1" lang="ja-JP" altLang="en-US" smtClean="0"/>
-              <a:t>2025/7/6</a:t>
+              <a:t>2025/7/7</a:t>
             </a:fld>
             <a:endParaRPr kumimoji="1" lang="ja-JP" altLang="en-US"/>
           </a:p>
@@ -1255,7 +1255,7 @@
           <a:p>
             <a:fld id="{E9CC885B-4903-4D54-9A93-00025F12DED9}" type="datetimeFigureOut">
               <a:rPr kumimoji="1" lang="ja-JP" altLang="en-US" smtClean="0"/>
-              <a:t>2025/7/6</a:t>
+              <a:t>2025/7/7</a:t>
             </a:fld>
             <a:endParaRPr kumimoji="1" lang="ja-JP" altLang="en-US"/>
           </a:p>
@@ -1584,7 +1584,7 @@
           <a:p>
             <a:fld id="{E9CC885B-4903-4D54-9A93-00025F12DED9}" type="datetimeFigureOut">
               <a:rPr kumimoji="1" lang="ja-JP" altLang="en-US" smtClean="0"/>
-              <a:t>2025/7/6</a:t>
+              <a:t>2025/7/7</a:t>
             </a:fld>
             <a:endParaRPr kumimoji="1" lang="ja-JP" altLang="en-US"/>
           </a:p>
@@ -2060,7 +2060,7 @@
           <a:p>
             <a:fld id="{E9CC885B-4903-4D54-9A93-00025F12DED9}" type="datetimeFigureOut">
               <a:rPr kumimoji="1" lang="ja-JP" altLang="en-US" smtClean="0"/>
-              <a:t>2025/7/6</a:t>
+              <a:t>2025/7/7</a:t>
             </a:fld>
             <a:endParaRPr kumimoji="1" lang="ja-JP" altLang="en-US"/>
           </a:p>
@@ -2201,7 +2201,7 @@
           <a:p>
             <a:fld id="{E9CC885B-4903-4D54-9A93-00025F12DED9}" type="datetimeFigureOut">
               <a:rPr kumimoji="1" lang="ja-JP" altLang="en-US" smtClean="0"/>
-              <a:t>2025/7/6</a:t>
+              <a:t>2025/7/7</a:t>
             </a:fld>
             <a:endParaRPr kumimoji="1" lang="ja-JP" altLang="en-US"/>
           </a:p>
@@ -2314,7 +2314,7 @@
           <a:p>
             <a:fld id="{E9CC885B-4903-4D54-9A93-00025F12DED9}" type="datetimeFigureOut">
               <a:rPr kumimoji="1" lang="ja-JP" altLang="en-US" smtClean="0"/>
-              <a:t>2025/7/6</a:t>
+              <a:t>2025/7/7</a:t>
             </a:fld>
             <a:endParaRPr kumimoji="1" lang="ja-JP" altLang="en-US"/>
           </a:p>
@@ -2657,7 +2657,7 @@
           <a:p>
             <a:fld id="{E9CC885B-4903-4D54-9A93-00025F12DED9}" type="datetimeFigureOut">
               <a:rPr kumimoji="1" lang="ja-JP" altLang="en-US" smtClean="0"/>
-              <a:t>2025/7/6</a:t>
+              <a:t>2025/7/7</a:t>
             </a:fld>
             <a:endParaRPr kumimoji="1" lang="ja-JP" altLang="en-US"/>
           </a:p>
@@ -2945,7 +2945,7 @@
           <a:p>
             <a:fld id="{E9CC885B-4903-4D54-9A93-00025F12DED9}" type="datetimeFigureOut">
               <a:rPr kumimoji="1" lang="ja-JP" altLang="en-US" smtClean="0"/>
-              <a:t>2025/7/6</a:t>
+              <a:t>2025/7/7</a:t>
             </a:fld>
             <a:endParaRPr kumimoji="1" lang="ja-JP" altLang="en-US"/>
           </a:p>
@@ -3218,7 +3218,7 @@
           <a:p>
             <a:fld id="{E9CC885B-4903-4D54-9A93-00025F12DED9}" type="datetimeFigureOut">
               <a:rPr kumimoji="1" lang="ja-JP" altLang="en-US" smtClean="0"/>
-              <a:t>2025/7/6</a:t>
+              <a:t>2025/7/7</a:t>
             </a:fld>
             <a:endParaRPr kumimoji="1" lang="ja-JP" altLang="en-US"/>
           </a:p>
@@ -3711,6 +3711,36 @@
           </a:p>
         </p:txBody>
       </p:sp>
+      <p:pic>
+        <p:nvPicPr>
+          <p:cNvPr id="3" name="図 2">
+            <a:extLst>
+              <a:ext uri="{FF2B5EF4-FFF2-40B4-BE49-F238E27FC236}">
+                <a16:creationId xmlns:a16="http://schemas.microsoft.com/office/drawing/2014/main" id="{8A5DD1C0-522A-4FDD-8986-876A8A9AC5E7}"/>
+              </a:ext>
+            </a:extLst>
+          </p:cNvPr>
+          <p:cNvPicPr>
+            <a:picLocks noChangeAspect="1"/>
+          </p:cNvPicPr>
+          <p:nvPr/>
+        </p:nvPicPr>
+        <p:blipFill>
+          <a:blip r:embed="rId2"/>
+          <a:stretch>
+            <a:fillRect/>
+          </a:stretch>
+        </p:blipFill>
+        <p:spPr>
+          <a:xfrm>
+            <a:off x="567542" y="1871445"/>
+            <a:ext cx="9900366" cy="4363100"/>
+          </a:xfrm>
+          <a:prstGeom prst="rect">
+            <a:avLst/>
+          </a:prstGeom>
+        </p:spPr>
+      </p:pic>
     </p:spTree>
     <p:extLst>
       <p:ext uri="{BB962C8B-B14F-4D97-AF65-F5344CB8AC3E}">
@@ -3854,8 +3884,8 @@
         </p:nvSpPr>
         <p:spPr>
           <a:xfrm>
-            <a:off x="567542" y="5641571"/>
-            <a:ext cx="10956846" cy="830997"/>
+            <a:off x="67777" y="4810575"/>
+            <a:ext cx="4905510" cy="369332"/>
           </a:xfrm>
           <a:prstGeom prst="rect">
             <a:avLst/>
@@ -3869,41 +3899,18 @@
           <a:lstStyle/>
           <a:p>
             <a:r>
-              <a:rPr lang="en-US" altLang="ja-JP" sz="2400" b="1" dirty="0"/>
-              <a:t>Overlap</a:t>
-            </a:r>
-            <a:r>
-              <a:rPr lang="ja-JP" altLang="en-US" sz="2400" dirty="0"/>
-              <a:t>とは</a:t>
-            </a:r>
-            <a:r>
-              <a:rPr lang="ja-JP" altLang="en-US" sz="2400" b="1" dirty="0"/>
-              <a:t>重なる</a:t>
-            </a:r>
-            <a:r>
-              <a:rPr lang="ja-JP" altLang="en-US" sz="2400" dirty="0"/>
-              <a:t>という意味です。</a:t>
-            </a:r>
-            <a:endParaRPr lang="en-US" altLang="ja-JP" sz="2400" dirty="0"/>
-          </a:p>
-          <a:p>
-            <a:r>
-              <a:rPr lang="ja-JP" altLang="en-US" sz="2400" dirty="0"/>
-              <a:t>つまり</a:t>
-            </a:r>
-            <a:r>
-              <a:rPr lang="ja-JP" altLang="en-US" sz="2400" b="1" dirty="0">
-                <a:solidFill>
-                  <a:srgbClr val="FF0000"/>
-                </a:solidFill>
-              </a:rPr>
-              <a:t>コインと重なったら、重なった処理をしてね。</a:t>
-            </a:r>
-            <a:r>
-              <a:rPr lang="ja-JP" altLang="en-US" sz="2400" dirty="0"/>
-              <a:t>というプログラムです。</a:t>
-            </a:r>
-            <a:endParaRPr lang="en-US" altLang="ja-JP" sz="2400" dirty="0"/>
+              <a:rPr lang="ja-JP" altLang="en-US" dirty="0"/>
+              <a:t>①右クリックして</a:t>
+            </a:r>
+            <a:r>
+              <a:rPr lang="en-US" altLang="ja-JP" dirty="0"/>
+              <a:t>Begin Overlap</a:t>
+            </a:r>
+            <a:r>
+              <a:rPr lang="ja-JP" altLang="en-US" dirty="0"/>
+              <a:t>ノードを追加</a:t>
+            </a:r>
+            <a:endParaRPr lang="en-US" altLang="ja-JP" dirty="0"/>
           </a:p>
         </p:txBody>
       </p:sp>
@@ -3929,7 +3936,7 @@
         </p:blipFill>
         <p:spPr>
           <a:xfrm>
-            <a:off x="567541" y="2187125"/>
+            <a:off x="4973287" y="2187126"/>
             <a:ext cx="6800237" cy="3265407"/>
           </a:xfrm>
           <a:prstGeom prst="rect">
@@ -3937,6 +3944,72 @@
           </a:prstGeom>
         </p:spPr>
       </p:pic>
+      <p:pic>
+        <p:nvPicPr>
+          <p:cNvPr id="3" name="図 2">
+            <a:extLst>
+              <a:ext uri="{FF2B5EF4-FFF2-40B4-BE49-F238E27FC236}">
+                <a16:creationId xmlns:a16="http://schemas.microsoft.com/office/drawing/2014/main" id="{BD382DDB-B67D-46A0-8595-C98CA2A2C692}"/>
+              </a:ext>
+            </a:extLst>
+          </p:cNvPr>
+          <p:cNvPicPr>
+            <a:picLocks noChangeAspect="1"/>
+          </p:cNvPicPr>
+          <p:nvPr/>
+        </p:nvPicPr>
+        <p:blipFill>
+          <a:blip r:embed="rId3"/>
+          <a:stretch>
+            <a:fillRect/>
+          </a:stretch>
+        </p:blipFill>
+        <p:spPr>
+          <a:xfrm>
+            <a:off x="567542" y="2187126"/>
+            <a:ext cx="4112288" cy="2428309"/>
+          </a:xfrm>
+          <a:prstGeom prst="rect">
+            <a:avLst/>
+          </a:prstGeom>
+        </p:spPr>
+      </p:pic>
+      <p:sp>
+        <p:nvSpPr>
+          <p:cNvPr id="9" name="テキスト ボックス 8">
+            <a:extLst>
+              <a:ext uri="{FF2B5EF4-FFF2-40B4-BE49-F238E27FC236}">
+                <a16:creationId xmlns:a16="http://schemas.microsoft.com/office/drawing/2014/main" id="{7DFC8678-FBC8-414F-BD3A-85153F24917B}"/>
+              </a:ext>
+            </a:extLst>
+          </p:cNvPr>
+          <p:cNvSpPr txBox="1"/>
+          <p:nvPr/>
+        </p:nvSpPr>
+        <p:spPr>
+          <a:xfrm>
+            <a:off x="5857331" y="5641571"/>
+            <a:ext cx="5032147" cy="369332"/>
+          </a:xfrm>
+          <a:prstGeom prst="rect">
+            <a:avLst/>
+          </a:prstGeom>
+          <a:noFill/>
+        </p:spPr>
+        <p:txBody>
+          <a:bodyPr wrap="none" rtlCol="0">
+            <a:spAutoFit/>
+          </a:bodyPr>
+          <a:lstStyle/>
+          <a:p>
+            <a:r>
+              <a:rPr lang="ja-JP" altLang="en-US" dirty="0"/>
+              <a:t>②ドラッグドロップで上のように線をつなげる</a:t>
+            </a:r>
+            <a:endParaRPr lang="en-US" altLang="ja-JP" dirty="0"/>
+          </a:p>
+        </p:txBody>
+      </p:sp>
     </p:spTree>
     <p:extLst>
       <p:ext uri="{BB962C8B-B14F-4D97-AF65-F5344CB8AC3E}">
@@ -4979,6 +5052,36 @@
           </a:p>
         </p:txBody>
       </p:sp>
+      <p:pic>
+        <p:nvPicPr>
+          <p:cNvPr id="5" name="図 4">
+            <a:extLst>
+              <a:ext uri="{FF2B5EF4-FFF2-40B4-BE49-F238E27FC236}">
+                <a16:creationId xmlns:a16="http://schemas.microsoft.com/office/drawing/2014/main" id="{109E0E40-E0D0-44E4-B9C4-805B7A18A6FA}"/>
+              </a:ext>
+            </a:extLst>
+          </p:cNvPr>
+          <p:cNvPicPr>
+            <a:picLocks noChangeAspect="1"/>
+          </p:cNvPicPr>
+          <p:nvPr/>
+        </p:nvPicPr>
+        <p:blipFill>
+          <a:blip r:embed="rId3"/>
+          <a:stretch>
+            <a:fillRect/>
+          </a:stretch>
+        </p:blipFill>
+        <p:spPr>
+          <a:xfrm>
+            <a:off x="4483642" y="2556458"/>
+            <a:ext cx="6716062" cy="2362530"/>
+          </a:xfrm>
+          <a:prstGeom prst="rect">
+            <a:avLst/>
+          </a:prstGeom>
+        </p:spPr>
+      </p:pic>
     </p:spTree>
     <p:extLst>
       <p:ext uri="{BB962C8B-B14F-4D97-AF65-F5344CB8AC3E}">
@@ -8739,6 +8842,74 @@
           </a:p>
         </p:txBody>
       </p:sp>
+      <p:sp>
+        <p:nvSpPr>
+          <p:cNvPr id="8" name="テキスト ボックス 7">
+            <a:extLst>
+              <a:ext uri="{FF2B5EF4-FFF2-40B4-BE49-F238E27FC236}">
+                <a16:creationId xmlns:a16="http://schemas.microsoft.com/office/drawing/2014/main" id="{5F6934B8-5230-46E7-8E07-2DC09AC7D6E8}"/>
+              </a:ext>
+            </a:extLst>
+          </p:cNvPr>
+          <p:cNvSpPr txBox="1"/>
+          <p:nvPr/>
+        </p:nvSpPr>
+        <p:spPr>
+          <a:xfrm>
+            <a:off x="5676633" y="4427054"/>
+            <a:ext cx="5724644" cy="1938992"/>
+          </a:xfrm>
+          <a:prstGeom prst="rect">
+            <a:avLst/>
+          </a:prstGeom>
+          <a:noFill/>
+        </p:spPr>
+        <p:txBody>
+          <a:bodyPr wrap="none" rtlCol="0">
+            <a:spAutoFit/>
+          </a:bodyPr>
+          <a:lstStyle/>
+          <a:p>
+            <a:r>
+              <a:rPr lang="ja-JP" altLang="en-US" sz="2400" b="1" dirty="0">
+                <a:solidFill>
+                  <a:srgbClr val="FF0000"/>
+                </a:solidFill>
+              </a:rPr>
+              <a:t>操作方法</a:t>
+            </a:r>
+            <a:endParaRPr lang="en-US" altLang="ja-JP" sz="2400" b="1" dirty="0">
+              <a:solidFill>
+                <a:srgbClr val="FF0000"/>
+              </a:solidFill>
+            </a:endParaRPr>
+          </a:p>
+          <a:p>
+            <a:r>
+              <a:rPr lang="ja-JP" altLang="en-US" sz="2400" dirty="0"/>
+              <a:t>マウスホイール回転：前進、後退</a:t>
+            </a:r>
+            <a:endParaRPr lang="en-US" altLang="ja-JP" sz="2400" dirty="0"/>
+          </a:p>
+          <a:p>
+            <a:endParaRPr lang="en-US" altLang="ja-JP" sz="2400" dirty="0"/>
+          </a:p>
+          <a:p>
+            <a:r>
+              <a:rPr lang="ja-JP" altLang="en-US" sz="2400" dirty="0"/>
+              <a:t>マウスホイールドラッグアンドドロップ</a:t>
+            </a:r>
+            <a:endParaRPr lang="en-US" altLang="ja-JP" sz="2400" dirty="0"/>
+          </a:p>
+          <a:p>
+            <a:r>
+              <a:rPr lang="ja-JP" altLang="en-US" sz="2400" dirty="0"/>
+              <a:t>上下左右移動</a:t>
+            </a:r>
+            <a:endParaRPr lang="en-US" altLang="ja-JP" sz="2400" dirty="0"/>
+          </a:p>
+        </p:txBody>
+      </p:sp>
     </p:spTree>
     <p:extLst>
       <p:ext uri="{BB962C8B-B14F-4D97-AF65-F5344CB8AC3E}">
@@ -9089,6 +9260,54 @@
           </a:prstGeom>
         </p:spPr>
       </p:pic>
+      <p:sp>
+        <p:nvSpPr>
+          <p:cNvPr id="7" name="テキスト ボックス 6">
+            <a:extLst>
+              <a:ext uri="{FF2B5EF4-FFF2-40B4-BE49-F238E27FC236}">
+                <a16:creationId xmlns:a16="http://schemas.microsoft.com/office/drawing/2014/main" id="{B57F5FA0-D20C-493D-9581-973743D1BA76}"/>
+              </a:ext>
+            </a:extLst>
+          </p:cNvPr>
+          <p:cNvSpPr txBox="1"/>
+          <p:nvPr/>
+        </p:nvSpPr>
+        <p:spPr>
+          <a:xfrm>
+            <a:off x="5676633" y="6005981"/>
+            <a:ext cx="3570208" cy="461665"/>
+          </a:xfrm>
+          <a:prstGeom prst="rect">
+            <a:avLst/>
+          </a:prstGeom>
+          <a:noFill/>
+        </p:spPr>
+        <p:txBody>
+          <a:bodyPr wrap="none" rtlCol="0">
+            <a:spAutoFit/>
+          </a:bodyPr>
+          <a:lstStyle/>
+          <a:p>
+            <a:r>
+              <a:rPr lang="ja-JP" altLang="en-US" sz="2400" dirty="0"/>
+              <a:t>ゲームは</a:t>
+            </a:r>
+            <a:r>
+              <a:rPr lang="ja-JP" altLang="en-US" sz="2400" b="1" dirty="0">
+                <a:solidFill>
+                  <a:srgbClr val="FF0000"/>
+                </a:solidFill>
+              </a:rPr>
+              <a:t>停止</a:t>
+            </a:r>
+            <a:r>
+              <a:rPr lang="ja-JP" altLang="en-US" sz="2400" dirty="0"/>
+              <a:t>しましょう</a:t>
+            </a:r>
+            <a:endParaRPr lang="en-US" altLang="ja-JP" sz="2400" dirty="0"/>
+          </a:p>
+        </p:txBody>
+      </p:sp>
     </p:spTree>
     <p:extLst>
       <p:ext uri="{BB962C8B-B14F-4D97-AF65-F5344CB8AC3E}">

--- a/Projects/OpenCanpas01/TrialClass/UE_アクションゲーム制作体験.pptx
+++ b/Projects/OpenCanpas01/TrialClass/UE_アクションゲーム制作体験.pptx
@@ -8,25 +8,30 @@
     <p:sldId id="257" r:id="rId2"/>
     <p:sldId id="258" r:id="rId3"/>
     <p:sldId id="259" r:id="rId4"/>
-    <p:sldId id="260" r:id="rId5"/>
-    <p:sldId id="261" r:id="rId6"/>
-    <p:sldId id="262" r:id="rId7"/>
-    <p:sldId id="263" r:id="rId8"/>
-    <p:sldId id="264" r:id="rId9"/>
-    <p:sldId id="265" r:id="rId10"/>
-    <p:sldId id="266" r:id="rId11"/>
-    <p:sldId id="278" r:id="rId12"/>
-    <p:sldId id="267" r:id="rId13"/>
-    <p:sldId id="268" r:id="rId14"/>
-    <p:sldId id="269" r:id="rId15"/>
-    <p:sldId id="270" r:id="rId16"/>
-    <p:sldId id="271" r:id="rId17"/>
-    <p:sldId id="272" r:id="rId18"/>
-    <p:sldId id="273" r:id="rId19"/>
-    <p:sldId id="274" r:id="rId20"/>
-    <p:sldId id="275" r:id="rId21"/>
-    <p:sldId id="276" r:id="rId22"/>
-    <p:sldId id="277" r:id="rId23"/>
+    <p:sldId id="279" r:id="rId5"/>
+    <p:sldId id="280" r:id="rId6"/>
+    <p:sldId id="281" r:id="rId7"/>
+    <p:sldId id="282" r:id="rId8"/>
+    <p:sldId id="260" r:id="rId9"/>
+    <p:sldId id="261" r:id="rId10"/>
+    <p:sldId id="262" r:id="rId11"/>
+    <p:sldId id="283" r:id="rId12"/>
+    <p:sldId id="263" r:id="rId13"/>
+    <p:sldId id="264" r:id="rId14"/>
+    <p:sldId id="265" r:id="rId15"/>
+    <p:sldId id="266" r:id="rId16"/>
+    <p:sldId id="278" r:id="rId17"/>
+    <p:sldId id="267" r:id="rId18"/>
+    <p:sldId id="268" r:id="rId19"/>
+    <p:sldId id="269" r:id="rId20"/>
+    <p:sldId id="270" r:id="rId21"/>
+    <p:sldId id="271" r:id="rId22"/>
+    <p:sldId id="272" r:id="rId23"/>
+    <p:sldId id="273" r:id="rId24"/>
+    <p:sldId id="274" r:id="rId25"/>
+    <p:sldId id="275" r:id="rId26"/>
+    <p:sldId id="276" r:id="rId27"/>
+    <p:sldId id="277" r:id="rId28"/>
   </p:sldIdLst>
   <p:sldSz cx="12192000" cy="6858000"/>
   <p:notesSz cx="6858000" cy="9144000"/>
@@ -280,7 +285,7 @@
           <a:p>
             <a:fld id="{E9CC885B-4903-4D54-9A93-00025F12DED9}" type="datetimeFigureOut">
               <a:rPr kumimoji="1" lang="ja-JP" altLang="en-US" smtClean="0"/>
-              <a:t>2025/7/7</a:t>
+              <a:t>2025/7/18</a:t>
             </a:fld>
             <a:endParaRPr kumimoji="1" lang="ja-JP" altLang="en-US"/>
           </a:p>
@@ -510,7 +515,7 @@
           <a:p>
             <a:fld id="{E9CC885B-4903-4D54-9A93-00025F12DED9}" type="datetimeFigureOut">
               <a:rPr kumimoji="1" lang="ja-JP" altLang="en-US" smtClean="0"/>
-              <a:t>2025/7/7</a:t>
+              <a:t>2025/7/18</a:t>
             </a:fld>
             <a:endParaRPr kumimoji="1" lang="ja-JP" altLang="en-US"/>
           </a:p>
@@ -750,7 +755,7 @@
           <a:p>
             <a:fld id="{E9CC885B-4903-4D54-9A93-00025F12DED9}" type="datetimeFigureOut">
               <a:rPr kumimoji="1" lang="ja-JP" altLang="en-US" smtClean="0"/>
-              <a:t>2025/7/7</a:t>
+              <a:t>2025/7/18</a:t>
             </a:fld>
             <a:endParaRPr kumimoji="1" lang="ja-JP" altLang="en-US"/>
           </a:p>
@@ -980,7 +985,7 @@
           <a:p>
             <a:fld id="{E9CC885B-4903-4D54-9A93-00025F12DED9}" type="datetimeFigureOut">
               <a:rPr kumimoji="1" lang="ja-JP" altLang="en-US" smtClean="0"/>
-              <a:t>2025/7/7</a:t>
+              <a:t>2025/7/18</a:t>
             </a:fld>
             <a:endParaRPr kumimoji="1" lang="ja-JP" altLang="en-US"/>
           </a:p>
@@ -1255,7 +1260,7 @@
           <a:p>
             <a:fld id="{E9CC885B-4903-4D54-9A93-00025F12DED9}" type="datetimeFigureOut">
               <a:rPr kumimoji="1" lang="ja-JP" altLang="en-US" smtClean="0"/>
-              <a:t>2025/7/7</a:t>
+              <a:t>2025/7/18</a:t>
             </a:fld>
             <a:endParaRPr kumimoji="1" lang="ja-JP" altLang="en-US"/>
           </a:p>
@@ -1584,7 +1589,7 @@
           <a:p>
             <a:fld id="{E9CC885B-4903-4D54-9A93-00025F12DED9}" type="datetimeFigureOut">
               <a:rPr kumimoji="1" lang="ja-JP" altLang="en-US" smtClean="0"/>
-              <a:t>2025/7/7</a:t>
+              <a:t>2025/7/18</a:t>
             </a:fld>
             <a:endParaRPr kumimoji="1" lang="ja-JP" altLang="en-US"/>
           </a:p>
@@ -2060,7 +2065,7 @@
           <a:p>
             <a:fld id="{E9CC885B-4903-4D54-9A93-00025F12DED9}" type="datetimeFigureOut">
               <a:rPr kumimoji="1" lang="ja-JP" altLang="en-US" smtClean="0"/>
-              <a:t>2025/7/7</a:t>
+              <a:t>2025/7/18</a:t>
             </a:fld>
             <a:endParaRPr kumimoji="1" lang="ja-JP" altLang="en-US"/>
           </a:p>
@@ -2201,7 +2206,7 @@
           <a:p>
             <a:fld id="{E9CC885B-4903-4D54-9A93-00025F12DED9}" type="datetimeFigureOut">
               <a:rPr kumimoji="1" lang="ja-JP" altLang="en-US" smtClean="0"/>
-              <a:t>2025/7/7</a:t>
+              <a:t>2025/7/18</a:t>
             </a:fld>
             <a:endParaRPr kumimoji="1" lang="ja-JP" altLang="en-US"/>
           </a:p>
@@ -2314,7 +2319,7 @@
           <a:p>
             <a:fld id="{E9CC885B-4903-4D54-9A93-00025F12DED9}" type="datetimeFigureOut">
               <a:rPr kumimoji="1" lang="ja-JP" altLang="en-US" smtClean="0"/>
-              <a:t>2025/7/7</a:t>
+              <a:t>2025/7/18</a:t>
             </a:fld>
             <a:endParaRPr kumimoji="1" lang="ja-JP" altLang="en-US"/>
           </a:p>
@@ -2657,7 +2662,7 @@
           <a:p>
             <a:fld id="{E9CC885B-4903-4D54-9A93-00025F12DED9}" type="datetimeFigureOut">
               <a:rPr kumimoji="1" lang="ja-JP" altLang="en-US" smtClean="0"/>
-              <a:t>2025/7/7</a:t>
+              <a:t>2025/7/18</a:t>
             </a:fld>
             <a:endParaRPr kumimoji="1" lang="ja-JP" altLang="en-US"/>
           </a:p>
@@ -2945,7 +2950,7 @@
           <a:p>
             <a:fld id="{E9CC885B-4903-4D54-9A93-00025F12DED9}" type="datetimeFigureOut">
               <a:rPr kumimoji="1" lang="ja-JP" altLang="en-US" smtClean="0"/>
-              <a:t>2025/7/7</a:t>
+              <a:t>2025/7/18</a:t>
             </a:fld>
             <a:endParaRPr kumimoji="1" lang="ja-JP" altLang="en-US"/>
           </a:p>
@@ -3218,7 +3223,7 @@
           <a:p>
             <a:fld id="{E9CC885B-4903-4D54-9A93-00025F12DED9}" type="datetimeFigureOut">
               <a:rPr kumimoji="1" lang="ja-JP" altLang="en-US" smtClean="0"/>
-              <a:t>2025/7/7</a:t>
+              <a:t>2025/7/18</a:t>
             </a:fld>
             <a:endParaRPr kumimoji="1" lang="ja-JP" altLang="en-US"/>
           </a:p>
@@ -3822,7 +3827,7 @@
         <p:spPr>
           <a:xfrm>
             <a:off x="567542" y="1216429"/>
-            <a:ext cx="10033516" cy="830997"/>
+            <a:ext cx="9241632" cy="461665"/>
           </a:xfrm>
           <a:prstGeom prst="rect">
             <a:avLst/>
@@ -3836,90 +3841,39 @@
           <a:lstStyle/>
           <a:p>
             <a:r>
+              <a:rPr lang="ja-JP" altLang="en-US" sz="2400" dirty="0"/>
+              <a:t>ステージに</a:t>
+            </a:r>
+            <a:r>
               <a:rPr lang="ja-JP" altLang="en-US" sz="2400" b="1" dirty="0">
                 <a:solidFill>
-                  <a:srgbClr val="FF0000"/>
+                  <a:srgbClr val="FF9900"/>
                 </a:solidFill>
               </a:rPr>
-              <a:t>イベントグラフ</a:t>
+              <a:t>コイン</a:t>
             </a:r>
             <a:r>
               <a:rPr lang="ja-JP" altLang="en-US" sz="2400" dirty="0"/>
-              <a:t>で</a:t>
-            </a:r>
-            <a:r>
-              <a:rPr lang="ja-JP" altLang="en-US" sz="2400" b="1" dirty="0">
-                <a:solidFill>
-                  <a:srgbClr val="FF0000"/>
-                </a:solidFill>
-              </a:rPr>
-              <a:t>ブループリントのプログラムを書く</a:t>
+              <a:t>を置いてみましょう。（場所はてきとーで</a:t>
+            </a:r>
+            <a:r>
+              <a:rPr lang="en-US" altLang="ja-JP" sz="2400" dirty="0"/>
+              <a:t>OK</a:t>
             </a:r>
             <a:r>
               <a:rPr lang="ja-JP" altLang="en-US" sz="2400" dirty="0"/>
-              <a:t>ことができます。</a:t>
+              <a:t>）</a:t>
             </a:r>
             <a:endParaRPr lang="en-US" altLang="ja-JP" sz="2400" dirty="0"/>
-          </a:p>
-          <a:p>
-            <a:r>
-              <a:rPr lang="ja-JP" altLang="en-US" sz="2400" dirty="0"/>
-              <a:t>ここに当たり判定のプログラムを書いていきます。</a:t>
-            </a:r>
-            <a:endParaRPr lang="en-US" altLang="ja-JP" sz="2400" dirty="0"/>
-          </a:p>
-        </p:txBody>
-      </p:sp>
-      <p:sp>
-        <p:nvSpPr>
-          <p:cNvPr id="7" name="テキスト ボックス 6">
-            <a:extLst>
-              <a:ext uri="{FF2B5EF4-FFF2-40B4-BE49-F238E27FC236}">
-                <a16:creationId xmlns:a16="http://schemas.microsoft.com/office/drawing/2014/main" id="{F3477FE4-E3BE-40C8-93E0-30DD901E2BE8}"/>
-              </a:ext>
-            </a:extLst>
-          </p:cNvPr>
-          <p:cNvSpPr txBox="1"/>
-          <p:nvPr/>
-        </p:nvSpPr>
-        <p:spPr>
-          <a:xfrm>
-            <a:off x="67777" y="4810575"/>
-            <a:ext cx="4905510" cy="369332"/>
-          </a:xfrm>
-          <a:prstGeom prst="rect">
-            <a:avLst/>
-          </a:prstGeom>
-          <a:noFill/>
-        </p:spPr>
-        <p:txBody>
-          <a:bodyPr wrap="none" rtlCol="0">
-            <a:spAutoFit/>
-          </a:bodyPr>
-          <a:lstStyle/>
-          <a:p>
-            <a:r>
-              <a:rPr lang="ja-JP" altLang="en-US" dirty="0"/>
-              <a:t>①右クリックして</a:t>
-            </a:r>
-            <a:r>
-              <a:rPr lang="en-US" altLang="ja-JP" dirty="0"/>
-              <a:t>Begin Overlap</a:t>
-            </a:r>
-            <a:r>
-              <a:rPr lang="ja-JP" altLang="en-US" dirty="0"/>
-              <a:t>ノードを追加</a:t>
-            </a:r>
-            <a:endParaRPr lang="en-US" altLang="ja-JP" dirty="0"/>
           </a:p>
         </p:txBody>
       </p:sp>
       <p:pic>
         <p:nvPicPr>
-          <p:cNvPr id="8" name="図 7">
-            <a:extLst>
-              <a:ext uri="{FF2B5EF4-FFF2-40B4-BE49-F238E27FC236}">
-                <a16:creationId xmlns:a16="http://schemas.microsoft.com/office/drawing/2014/main" id="{500D2806-7E71-4AF7-A5D2-758D8D1524CD}"/>
+          <p:cNvPr id="3" name="図 2">
+            <a:extLst>
+              <a:ext uri="{FF2B5EF4-FFF2-40B4-BE49-F238E27FC236}">
+                <a16:creationId xmlns:a16="http://schemas.microsoft.com/office/drawing/2014/main" id="{3B18F0A0-34F0-4CAE-B0C7-29B29C80A306}"/>
               </a:ext>
             </a:extLst>
           </p:cNvPr>
@@ -3936,50 +3890,74 @@
         </p:blipFill>
         <p:spPr>
           <a:xfrm>
-            <a:off x="4973287" y="2187126"/>
-            <a:ext cx="6800237" cy="3265407"/>
+            <a:off x="567542" y="1817794"/>
+            <a:ext cx="4856207" cy="4548252"/>
           </a:xfrm>
           <a:prstGeom prst="rect">
             <a:avLst/>
           </a:prstGeom>
         </p:spPr>
       </p:pic>
-      <p:pic>
-        <p:nvPicPr>
-          <p:cNvPr id="3" name="図 2">
-            <a:extLst>
-              <a:ext uri="{FF2B5EF4-FFF2-40B4-BE49-F238E27FC236}">
-                <a16:creationId xmlns:a16="http://schemas.microsoft.com/office/drawing/2014/main" id="{BD382DDB-B67D-46A0-8595-C98CA2A2C692}"/>
-              </a:ext>
-            </a:extLst>
-          </p:cNvPr>
-          <p:cNvPicPr>
-            <a:picLocks noChangeAspect="1"/>
-          </p:cNvPicPr>
-          <p:nvPr/>
-        </p:nvPicPr>
-        <p:blipFill>
-          <a:blip r:embed="rId3"/>
-          <a:stretch>
-            <a:fillRect/>
-          </a:stretch>
-        </p:blipFill>
-        <p:spPr>
-          <a:xfrm>
-            <a:off x="567542" y="2187126"/>
-            <a:ext cx="4112288" cy="2428309"/>
-          </a:xfrm>
-          <a:prstGeom prst="rect">
-            <a:avLst/>
-          </a:prstGeom>
-        </p:spPr>
-      </p:pic>
-      <p:sp>
-        <p:nvSpPr>
-          <p:cNvPr id="9" name="テキスト ボックス 8">
-            <a:extLst>
-              <a:ext uri="{FF2B5EF4-FFF2-40B4-BE49-F238E27FC236}">
-                <a16:creationId xmlns:a16="http://schemas.microsoft.com/office/drawing/2014/main" id="{7DFC8678-FBC8-414F-BD3A-85153F24917B}"/>
+      <p:sp>
+        <p:nvSpPr>
+          <p:cNvPr id="5" name="矢印: 右 4">
+            <a:extLst>
+              <a:ext uri="{FF2B5EF4-FFF2-40B4-BE49-F238E27FC236}">
+                <a16:creationId xmlns:a16="http://schemas.microsoft.com/office/drawing/2014/main" id="{45DB3A28-B094-43B4-AE05-A9F5EAE4F66D}"/>
+              </a:ext>
+            </a:extLst>
+          </p:cNvPr>
+          <p:cNvSpPr/>
+          <p:nvPr/>
+        </p:nvSpPr>
+        <p:spPr>
+          <a:xfrm rot="17961142">
+            <a:off x="1663903" y="3633340"/>
+            <a:ext cx="2360426" cy="422904"/>
+          </a:xfrm>
+          <a:prstGeom prst="rightArrow">
+            <a:avLst/>
+          </a:prstGeom>
+          <a:solidFill>
+            <a:srgbClr val="FF0000"/>
+          </a:solidFill>
+          <a:ln>
+            <a:solidFill>
+              <a:schemeClr val="tx1"/>
+            </a:solidFill>
+          </a:ln>
+        </p:spPr>
+        <p:style>
+          <a:lnRef idx="2">
+            <a:schemeClr val="accent1">
+              <a:shade val="50000"/>
+            </a:schemeClr>
+          </a:lnRef>
+          <a:fillRef idx="1">
+            <a:schemeClr val="accent1"/>
+          </a:fillRef>
+          <a:effectRef idx="0">
+            <a:schemeClr val="accent1"/>
+          </a:effectRef>
+          <a:fontRef idx="minor">
+            <a:schemeClr val="lt1"/>
+          </a:fontRef>
+        </p:style>
+        <p:txBody>
+          <a:bodyPr rtlCol="0" anchor="ctr"/>
+          <a:lstStyle/>
+          <a:p>
+            <a:pPr algn="ctr"/>
+            <a:endParaRPr kumimoji="1" lang="ja-JP" altLang="en-US"/>
+          </a:p>
+        </p:txBody>
+      </p:sp>
+      <p:sp>
+        <p:nvSpPr>
+          <p:cNvPr id="7" name="テキスト ボックス 6">
+            <a:extLst>
+              <a:ext uri="{FF2B5EF4-FFF2-40B4-BE49-F238E27FC236}">
+                <a16:creationId xmlns:a16="http://schemas.microsoft.com/office/drawing/2014/main" id="{69E73DEE-46FF-424B-89A4-8473DFABC8ED}"/>
               </a:ext>
             </a:extLst>
           </p:cNvPr>
@@ -3988,13 +3966,20 @@
         </p:nvSpPr>
         <p:spPr>
           <a:xfrm>
-            <a:off x="5857331" y="5641571"/>
-            <a:ext cx="5032147" cy="369332"/>
-          </a:xfrm>
-          <a:prstGeom prst="rect">
-            <a:avLst/>
-          </a:prstGeom>
-          <a:noFill/>
+            <a:off x="2995645" y="3630255"/>
+            <a:ext cx="5208477" cy="461665"/>
+          </a:xfrm>
+          <a:prstGeom prst="rect">
+            <a:avLst/>
+          </a:prstGeom>
+          <a:solidFill>
+            <a:schemeClr val="bg1"/>
+          </a:solidFill>
+          <a:ln>
+            <a:solidFill>
+              <a:schemeClr val="tx1"/>
+            </a:solidFill>
+          </a:ln>
         </p:spPr>
         <p:txBody>
           <a:bodyPr wrap="none" rtlCol="0">
@@ -4003,17 +3988,105 @@
           <a:lstStyle/>
           <a:p>
             <a:r>
-              <a:rPr lang="ja-JP" altLang="en-US" dirty="0"/>
-              <a:t>②ドラッグドロップで上のように線をつなげる</a:t>
-            </a:r>
-            <a:endParaRPr lang="en-US" altLang="ja-JP" dirty="0"/>
+              <a:rPr lang="en-US" altLang="ja-JP" sz="2400" b="1" dirty="0" err="1">
+                <a:solidFill>
+                  <a:srgbClr val="0070C0"/>
+                </a:solidFill>
+              </a:rPr>
+              <a:t>BP_ItemCoin</a:t>
+            </a:r>
+            <a:r>
+              <a:rPr lang="ja-JP" altLang="en-US" sz="2400" dirty="0"/>
+              <a:t>を</a:t>
+            </a:r>
+            <a:r>
+              <a:rPr lang="ja-JP" altLang="en-US" sz="2400" b="1" dirty="0">
+                <a:solidFill>
+                  <a:srgbClr val="FF0000"/>
+                </a:solidFill>
+              </a:rPr>
+              <a:t>ドラッグ＆ドロップ</a:t>
+            </a:r>
+            <a:endParaRPr lang="en-US" altLang="ja-JP" sz="2400" b="1" dirty="0">
+              <a:solidFill>
+                <a:srgbClr val="FF0000"/>
+              </a:solidFill>
+            </a:endParaRPr>
+          </a:p>
+        </p:txBody>
+      </p:sp>
+      <p:sp>
+        <p:nvSpPr>
+          <p:cNvPr id="8" name="テキスト ボックス 7">
+            <a:extLst>
+              <a:ext uri="{FF2B5EF4-FFF2-40B4-BE49-F238E27FC236}">
+                <a16:creationId xmlns:a16="http://schemas.microsoft.com/office/drawing/2014/main" id="{5F6934B8-5230-46E7-8E07-2DC09AC7D6E8}"/>
+              </a:ext>
+            </a:extLst>
+          </p:cNvPr>
+          <p:cNvSpPr txBox="1"/>
+          <p:nvPr/>
+        </p:nvSpPr>
+        <p:spPr>
+          <a:xfrm>
+            <a:off x="5676633" y="4427054"/>
+            <a:ext cx="5724644" cy="1938992"/>
+          </a:xfrm>
+          <a:prstGeom prst="rect">
+            <a:avLst/>
+          </a:prstGeom>
+          <a:noFill/>
+        </p:spPr>
+        <p:txBody>
+          <a:bodyPr wrap="none" rtlCol="0">
+            <a:spAutoFit/>
+          </a:bodyPr>
+          <a:lstStyle/>
+          <a:p>
+            <a:r>
+              <a:rPr lang="ja-JP" altLang="en-US" sz="2400" b="1" dirty="0">
+                <a:solidFill>
+                  <a:srgbClr val="FF0000"/>
+                </a:solidFill>
+              </a:rPr>
+              <a:t>操作方法</a:t>
+            </a:r>
+            <a:endParaRPr lang="en-US" altLang="ja-JP" sz="2400" b="1" dirty="0">
+              <a:solidFill>
+                <a:srgbClr val="FF0000"/>
+              </a:solidFill>
+            </a:endParaRPr>
+          </a:p>
+          <a:p>
+            <a:r>
+              <a:rPr lang="ja-JP" altLang="en-US" sz="2400" dirty="0"/>
+              <a:t>マウスホイール回転：前進、後退</a:t>
+            </a:r>
+            <a:endParaRPr lang="en-US" altLang="ja-JP" sz="2400" dirty="0"/>
+          </a:p>
+          <a:p>
+            <a:endParaRPr lang="en-US" altLang="ja-JP" sz="2400" dirty="0"/>
+          </a:p>
+          <a:p>
+            <a:r>
+              <a:rPr lang="ja-JP" altLang="en-US" sz="2400" dirty="0"/>
+              <a:t>マウスホイールドラッグアンドドロップ</a:t>
+            </a:r>
+            <a:endParaRPr lang="en-US" altLang="ja-JP" sz="2400" dirty="0"/>
+          </a:p>
+          <a:p>
+            <a:r>
+              <a:rPr lang="ja-JP" altLang="en-US" sz="2400" dirty="0"/>
+              <a:t>上下左右移動</a:t>
+            </a:r>
+            <a:endParaRPr lang="en-US" altLang="ja-JP" sz="2400" dirty="0"/>
           </a:p>
         </p:txBody>
       </p:sp>
     </p:spTree>
     <p:extLst>
       <p:ext uri="{BB962C8B-B14F-4D97-AF65-F5344CB8AC3E}">
-        <p14:creationId xmlns:p14="http://schemas.microsoft.com/office/powerpoint/2010/main" val="2966724515"/>
+        <p14:creationId xmlns:p14="http://schemas.microsoft.com/office/powerpoint/2010/main" val="2582325579"/>
       </p:ext>
     </p:extLst>
   </p:cSld>
@@ -4091,7 +4164,7 @@
         <p:spPr>
           <a:xfrm>
             <a:off x="567542" y="1216429"/>
-            <a:ext cx="9761005" cy="461665"/>
+            <a:ext cx="9417963" cy="830997"/>
           </a:xfrm>
           <a:prstGeom prst="rect">
             <a:avLst/>
@@ -4105,28 +4178,15 @@
           <a:lstStyle/>
           <a:p>
             <a:r>
-              <a:rPr lang="en-US" altLang="ja-JP" sz="2400" b="1" dirty="0">
-                <a:solidFill>
-                  <a:srgbClr val="7030A0"/>
-                </a:solidFill>
-              </a:rPr>
-              <a:t>Visual Studio</a:t>
-            </a:r>
-            <a:r>
               <a:rPr lang="ja-JP" altLang="en-US" sz="2400" dirty="0"/>
-              <a:t>に画面を切り替えて、</a:t>
-            </a:r>
-            <a:r>
-              <a:rPr lang="en-US" altLang="ja-JP" sz="2400" b="1" dirty="0">
-                <a:solidFill>
-                  <a:srgbClr val="FF0000"/>
-                </a:solidFill>
-              </a:rPr>
-              <a:t>ItemBase.cpp</a:t>
-            </a:r>
+              <a:t>画面右側のトランスフォームから配置場所を座標で入力できます。</a:t>
+            </a:r>
+            <a:endParaRPr lang="en-US" altLang="ja-JP" sz="2400" dirty="0"/>
+          </a:p>
+          <a:p>
             <a:r>
               <a:rPr lang="ja-JP" altLang="en-US" sz="2400" dirty="0"/>
-              <a:t>を開きましょう。</a:t>
+              <a:t>以下の数値を入力してみましょう。</a:t>
             </a:r>
             <a:endParaRPr lang="en-US" altLang="ja-JP" sz="2400" dirty="0"/>
           </a:p>
@@ -4134,10 +4194,10 @@
       </p:sp>
       <p:pic>
         <p:nvPicPr>
-          <p:cNvPr id="5" name="図 4">
-            <a:extLst>
-              <a:ext uri="{FF2B5EF4-FFF2-40B4-BE49-F238E27FC236}">
-                <a16:creationId xmlns:a16="http://schemas.microsoft.com/office/drawing/2014/main" id="{D142FDDD-3951-42A0-8CF9-E0741E51CEBC}"/>
+          <p:cNvPr id="10" name="図 9">
+            <a:extLst>
+              <a:ext uri="{FF2B5EF4-FFF2-40B4-BE49-F238E27FC236}">
+                <a16:creationId xmlns:a16="http://schemas.microsoft.com/office/drawing/2014/main" id="{77406808-EAE1-41E8-8E34-5FF80A255E18}"/>
               </a:ext>
             </a:extLst>
           </p:cNvPr>
@@ -4154,8 +4214,8 @@
         </p:blipFill>
         <p:spPr>
           <a:xfrm>
-            <a:off x="567542" y="1817794"/>
-            <a:ext cx="2676899" cy="4324954"/>
+            <a:off x="567542" y="2187126"/>
+            <a:ext cx="9261716" cy="2402803"/>
           </a:xfrm>
           <a:prstGeom prst="rect">
             <a:avLst/>
@@ -4164,10 +4224,10 @@
       </p:pic>
       <p:sp>
         <p:nvSpPr>
-          <p:cNvPr id="8" name="矢印: 右 7">
-            <a:extLst>
-              <a:ext uri="{FF2B5EF4-FFF2-40B4-BE49-F238E27FC236}">
-                <a16:creationId xmlns:a16="http://schemas.microsoft.com/office/drawing/2014/main" id="{555A8DCF-4A39-4E54-83D1-C79499F7403A}"/>
+          <p:cNvPr id="2" name="正方形/長方形 1">
+            <a:extLst>
+              <a:ext uri="{FF2B5EF4-FFF2-40B4-BE49-F238E27FC236}">
+                <a16:creationId xmlns:a16="http://schemas.microsoft.com/office/drawing/2014/main" id="{4E46A5D1-D8AA-41C1-B639-7B9FE4465BA3}"/>
               </a:ext>
             </a:extLst>
           </p:cNvPr>
@@ -4175,19 +4235,17 @@
           <p:nvPr/>
         </p:nvSpPr>
         <p:spPr>
-          <a:xfrm rot="18234661">
-            <a:off x="1402993" y="5768927"/>
-            <a:ext cx="776827" cy="524934"/>
-          </a:xfrm>
-          <a:prstGeom prst="rightArrow">
-            <a:avLst/>
-          </a:prstGeom>
-          <a:solidFill>
-            <a:srgbClr val="FF0000"/>
-          </a:solidFill>
-          <a:ln>
+          <a:xfrm>
+            <a:off x="1013012" y="2662518"/>
+            <a:ext cx="8444753" cy="766482"/>
+          </a:xfrm>
+          <a:prstGeom prst="rect">
+            <a:avLst/>
+          </a:prstGeom>
+          <a:noFill/>
+          <a:ln w="38100">
             <a:solidFill>
-              <a:schemeClr val="tx1"/>
+              <a:srgbClr val="FF0000"/>
             </a:solidFill>
           </a:ln>
         </p:spPr>
@@ -4219,7 +4277,7 @@
     </p:spTree>
     <p:extLst>
       <p:ext uri="{BB962C8B-B14F-4D97-AF65-F5344CB8AC3E}">
-        <p14:creationId xmlns:p14="http://schemas.microsoft.com/office/powerpoint/2010/main" val="2925135928"/>
+        <p14:creationId xmlns:p14="http://schemas.microsoft.com/office/powerpoint/2010/main" val="2203687872"/>
       </p:ext>
     </p:extLst>
   </p:cSld>
@@ -4297,7 +4355,7 @@
         <p:spPr>
           <a:xfrm>
             <a:off x="567542" y="1216429"/>
-            <a:ext cx="9110186" cy="830997"/>
+            <a:ext cx="6340197" cy="830997"/>
           </a:xfrm>
           <a:prstGeom prst="rect">
             <a:avLst/>
@@ -4311,58 +4369,34 @@
           <a:lstStyle/>
           <a:p>
             <a:r>
-              <a:rPr lang="en-US" altLang="ja-JP" sz="2400" dirty="0"/>
-              <a:t>Unreal Engine</a:t>
+              <a:rPr lang="ja-JP" altLang="en-US" sz="2400" b="1" dirty="0"/>
+              <a:t>実行ボタン</a:t>
             </a:r>
             <a:r>
               <a:rPr lang="ja-JP" altLang="en-US" sz="2400" dirty="0"/>
-              <a:t>では</a:t>
-            </a:r>
-            <a:r>
-              <a:rPr lang="en-US" altLang="ja-JP" sz="2400" b="1" dirty="0">
+              <a:t>を押すとゲームが始まります。</a:t>
+            </a:r>
+            <a:endParaRPr lang="en-US" altLang="ja-JP" sz="2400" dirty="0"/>
+          </a:p>
+          <a:p>
+            <a:r>
+              <a:rPr lang="ja-JP" altLang="en-US" sz="2400" dirty="0"/>
+              <a:t>さきほど置いた</a:t>
+            </a:r>
+            <a:r>
+              <a:rPr lang="ja-JP" altLang="en-US" sz="2400" b="1" dirty="0">
                 <a:solidFill>
-                  <a:srgbClr val="FF0000"/>
+                  <a:srgbClr val="FF9900"/>
                 </a:solidFill>
               </a:rPr>
-              <a:t>C++</a:t>
+              <a:t>コイン</a:t>
             </a:r>
             <a:r>
               <a:rPr lang="ja-JP" altLang="en-US" sz="2400" dirty="0"/>
-              <a:t>という</a:t>
-            </a:r>
-            <a:r>
-              <a:rPr lang="ja-JP" altLang="en-US" sz="2400" b="1" dirty="0">
-                <a:solidFill>
-                  <a:srgbClr val="FF0000"/>
-                </a:solidFill>
-              </a:rPr>
-              <a:t>プログラム言語</a:t>
-            </a:r>
-            <a:r>
-              <a:rPr lang="ja-JP" altLang="en-US" sz="2400" dirty="0"/>
-              <a:t>も使います。</a:t>
+              <a:t>を触ってみましょう。</a:t>
             </a:r>
             <a:endParaRPr lang="en-US" altLang="ja-JP" sz="2400" dirty="0"/>
           </a:p>
-          <a:p>
-            <a:r>
-              <a:rPr lang="ja-JP" altLang="en-US" sz="2400" dirty="0"/>
-              <a:t>こちらで、</a:t>
-            </a:r>
-            <a:r>
-              <a:rPr lang="ja-JP" altLang="en-US" sz="2400" b="1" dirty="0">
-                <a:solidFill>
-                  <a:srgbClr val="FF0000"/>
-                </a:solidFill>
-              </a:rPr>
-              <a:t>コインと重なった時のプログラム</a:t>
-            </a:r>
-            <a:r>
-              <a:rPr lang="ja-JP" altLang="en-US" sz="2400" dirty="0"/>
-              <a:t>を書いていきます。</a:t>
-            </a:r>
-            <a:endParaRPr lang="en-US" altLang="ja-JP" sz="2400" dirty="0"/>
-          </a:p>
         </p:txBody>
       </p:sp>
       <p:sp>
@@ -4370,7 +4404,7 @@
           <p:cNvPr id="5" name="テキスト ボックス 4">
             <a:extLst>
               <a:ext uri="{FF2B5EF4-FFF2-40B4-BE49-F238E27FC236}">
-                <a16:creationId xmlns:a16="http://schemas.microsoft.com/office/drawing/2014/main" id="{A6EAFAF2-BDAD-46C4-BE93-C91CB15D7D27}"/>
+                <a16:creationId xmlns:a16="http://schemas.microsoft.com/office/drawing/2014/main" id="{7A866068-CB18-4145-BEBA-A61ED3505C5C}"/>
               </a:ext>
             </a:extLst>
           </p:cNvPr>
@@ -4379,8 +4413,8 @@
         </p:nvSpPr>
         <p:spPr>
           <a:xfrm>
-            <a:off x="567542" y="5788429"/>
-            <a:ext cx="5198859" cy="461665"/>
+            <a:off x="567541" y="5535049"/>
+            <a:ext cx="5109091" cy="461665"/>
           </a:xfrm>
           <a:prstGeom prst="rect">
             <a:avLst/>
@@ -4395,43 +4429,7 @@
           <a:p>
             <a:r>
               <a:rPr lang="ja-JP" altLang="en-US" sz="2400" dirty="0"/>
-              <a:t>書いたら</a:t>
-            </a:r>
-            <a:r>
-              <a:rPr lang="en-US" altLang="ja-JP" sz="2400" b="1" dirty="0">
-                <a:solidFill>
-                  <a:srgbClr val="FF0000"/>
-                </a:solidFill>
-              </a:rPr>
-              <a:t>Ctrl</a:t>
-            </a:r>
-            <a:r>
-              <a:rPr lang="ja-JP" altLang="en-US" sz="2400" b="1" dirty="0">
-                <a:solidFill>
-                  <a:srgbClr val="FF0000"/>
-                </a:solidFill>
-              </a:rPr>
-              <a:t>＋</a:t>
-            </a:r>
-            <a:r>
-              <a:rPr lang="en-US" altLang="ja-JP" sz="2400" b="1" dirty="0">
-                <a:solidFill>
-                  <a:srgbClr val="FF0000"/>
-                </a:solidFill>
-              </a:rPr>
-              <a:t>S</a:t>
-            </a:r>
-            <a:r>
-              <a:rPr lang="ja-JP" altLang="en-US" sz="2400" b="1" dirty="0">
-                <a:solidFill>
-                  <a:srgbClr val="FF0000"/>
-                </a:solidFill>
-              </a:rPr>
-              <a:t>で保存</a:t>
-            </a:r>
-            <a:r>
-              <a:rPr lang="ja-JP" altLang="en-US" sz="2400" dirty="0"/>
-              <a:t>しましょう。</a:t>
+              <a:t>触っても何も起きないですね。。。</a:t>
             </a:r>
             <a:endParaRPr lang="en-US" altLang="ja-JP" sz="2400" dirty="0"/>
           </a:p>
@@ -4439,10 +4437,10 @@
       </p:sp>
       <p:pic>
         <p:nvPicPr>
-          <p:cNvPr id="9" name="図 8">
-            <a:extLst>
-              <a:ext uri="{FF2B5EF4-FFF2-40B4-BE49-F238E27FC236}">
-                <a16:creationId xmlns:a16="http://schemas.microsoft.com/office/drawing/2014/main" id="{699FAD0D-C5D3-4A77-AEEE-0287E9C58E3C}"/>
+          <p:cNvPr id="3" name="図 2">
+            <a:extLst>
+              <a:ext uri="{FF2B5EF4-FFF2-40B4-BE49-F238E27FC236}">
+                <a16:creationId xmlns:a16="http://schemas.microsoft.com/office/drawing/2014/main" id="{F146D193-5E51-4010-A423-F132E21D39FF}"/>
               </a:ext>
             </a:extLst>
           </p:cNvPr>
@@ -4459,20 +4457,50 @@
         </p:blipFill>
         <p:spPr>
           <a:xfrm>
-            <a:off x="677772" y="2041208"/>
-            <a:ext cx="8889725" cy="3753439"/>
+            <a:off x="567541" y="3869614"/>
+            <a:ext cx="1754318" cy="1572596"/>
           </a:xfrm>
           <a:prstGeom prst="rect">
             <a:avLst/>
           </a:prstGeom>
         </p:spPr>
       </p:pic>
-      <p:sp>
-        <p:nvSpPr>
-          <p:cNvPr id="10" name="正方形/長方形 9">
-            <a:extLst>
-              <a:ext uri="{FF2B5EF4-FFF2-40B4-BE49-F238E27FC236}">
-                <a16:creationId xmlns:a16="http://schemas.microsoft.com/office/drawing/2014/main" id="{D33D4275-CBF3-416A-90D5-088B1FFF34C8}"/>
+      <p:pic>
+        <p:nvPicPr>
+          <p:cNvPr id="7" name="図 6">
+            <a:extLst>
+              <a:ext uri="{FF2B5EF4-FFF2-40B4-BE49-F238E27FC236}">
+                <a16:creationId xmlns:a16="http://schemas.microsoft.com/office/drawing/2014/main" id="{616E21A1-031B-4FEE-AA25-8AD23862A0E1}"/>
+              </a:ext>
+            </a:extLst>
+          </p:cNvPr>
+          <p:cNvPicPr>
+            <a:picLocks noChangeAspect="1"/>
+          </p:cNvPicPr>
+          <p:nvPr/>
+        </p:nvPicPr>
+        <p:blipFill>
+          <a:blip r:embed="rId3"/>
+          <a:stretch>
+            <a:fillRect/>
+          </a:stretch>
+        </p:blipFill>
+        <p:spPr>
+          <a:xfrm>
+            <a:off x="567541" y="2302965"/>
+            <a:ext cx="7230484" cy="1409897"/>
+          </a:xfrm>
+          <a:prstGeom prst="rect">
+            <a:avLst/>
+          </a:prstGeom>
+        </p:spPr>
+      </p:pic>
+      <p:sp>
+        <p:nvSpPr>
+          <p:cNvPr id="8" name="矢印: 右 7">
+            <a:extLst>
+              <a:ext uri="{FF2B5EF4-FFF2-40B4-BE49-F238E27FC236}">
+                <a16:creationId xmlns:a16="http://schemas.microsoft.com/office/drawing/2014/main" id="{93C8974B-57F9-48A4-8A80-96040E36366D}"/>
               </a:ext>
             </a:extLst>
           </p:cNvPr>
@@ -4480,17 +4508,19 @@
           <p:nvPr/>
         </p:nvSpPr>
         <p:spPr>
-          <a:xfrm>
-            <a:off x="2269367" y="4673601"/>
-            <a:ext cx="2853267" cy="584200"/>
-          </a:xfrm>
-          <a:prstGeom prst="rect">
-            <a:avLst/>
-          </a:prstGeom>
-          <a:noFill/>
-          <a:ln w="38100">
+          <a:xfrm rot="14142799">
+            <a:off x="4940222" y="3214222"/>
+            <a:ext cx="776827" cy="524934"/>
+          </a:xfrm>
+          <a:prstGeom prst="rightArrow">
+            <a:avLst/>
+          </a:prstGeom>
+          <a:solidFill>
+            <a:srgbClr val="FF0000"/>
+          </a:solidFill>
+          <a:ln>
             <a:solidFill>
-              <a:srgbClr val="FF0000"/>
+              <a:schemeClr val="tx1"/>
             </a:solidFill>
           </a:ln>
         </p:spPr>
@@ -4522,7 +4552,7 @@
     </p:spTree>
     <p:extLst>
       <p:ext uri="{BB962C8B-B14F-4D97-AF65-F5344CB8AC3E}">
-        <p14:creationId xmlns:p14="http://schemas.microsoft.com/office/powerpoint/2010/main" val="1312901314"/>
+        <p14:creationId xmlns:p14="http://schemas.microsoft.com/office/powerpoint/2010/main" val="2675442058"/>
       </p:ext>
     </p:extLst>
   </p:cSld>
@@ -4600,7 +4630,7 @@
         <p:spPr>
           <a:xfrm>
             <a:off x="567542" y="1216429"/>
-            <a:ext cx="9110186" cy="830997"/>
+            <a:ext cx="10341293" cy="830997"/>
           </a:xfrm>
           <a:prstGeom prst="rect">
             <a:avLst/>
@@ -4614,12 +4644,8 @@
           <a:lstStyle/>
           <a:p>
             <a:r>
-              <a:rPr lang="en-US" altLang="ja-JP" sz="2400" b="1" dirty="0">
-                <a:solidFill>
-                  <a:srgbClr val="FF0000"/>
-                </a:solidFill>
-              </a:rPr>
-              <a:t>C++</a:t>
+              <a:rPr lang="ja-JP" altLang="en-US" sz="2400" dirty="0"/>
+              <a:t>ステージのものに触りたい場合は、</a:t>
             </a:r>
             <a:r>
               <a:rPr lang="ja-JP" altLang="en-US" sz="2400" b="1" dirty="0">
@@ -4627,94 +4653,26 @@
                   <a:srgbClr val="FF0000"/>
                 </a:solidFill>
               </a:rPr>
-              <a:t>を書いたら</a:t>
-            </a:r>
-            <a:r>
-              <a:rPr lang="en-US" altLang="ja-JP" sz="2400" b="1" dirty="0">
+              <a:t>当たり判定</a:t>
+            </a:r>
+            <a:r>
+              <a:rPr lang="ja-JP" altLang="en-US" sz="2400" dirty="0"/>
+              <a:t>のプログラムを作ります。</a:t>
+            </a:r>
+            <a:endParaRPr lang="en-US" altLang="ja-JP" sz="2400" dirty="0"/>
+          </a:p>
+          <a:p>
+            <a:r>
+              <a:rPr lang="en-US" altLang="ja-JP" sz="2400" b="1" dirty="0" err="1">
                 <a:solidFill>
-                  <a:srgbClr val="FF0000"/>
+                  <a:srgbClr val="0070C0"/>
                 </a:solidFill>
               </a:rPr>
-              <a:t>Unreal Engine</a:t>
-            </a:r>
-            <a:r>
-              <a:rPr lang="ja-JP" altLang="en-US" sz="2400" b="1" dirty="0">
-                <a:solidFill>
-                  <a:srgbClr val="FF0000"/>
-                </a:solidFill>
-              </a:rPr>
-              <a:t>側に教えなければいけません。</a:t>
-            </a:r>
-            <a:endParaRPr lang="en-US" altLang="ja-JP" sz="2400" b="1" dirty="0">
-              <a:solidFill>
-                <a:srgbClr val="FF0000"/>
-              </a:solidFill>
-            </a:endParaRPr>
-          </a:p>
-          <a:p>
+              <a:t>BP_ItemCoin</a:t>
+            </a:r>
             <a:r>
               <a:rPr lang="ja-JP" altLang="en-US" sz="2400" dirty="0"/>
-              <a:t>右下に小さな</a:t>
-            </a:r>
-            <a:r>
-              <a:rPr lang="ja-JP" altLang="en-US" sz="2400" b="1" dirty="0">
-                <a:solidFill>
-                  <a:srgbClr val="FF0000"/>
-                </a:solidFill>
-              </a:rPr>
-              <a:t>コンパイルボタン</a:t>
-            </a:r>
-            <a:r>
-              <a:rPr lang="ja-JP" altLang="en-US" sz="2400" dirty="0"/>
-              <a:t>があるので、押してみましょう。</a:t>
-            </a:r>
-            <a:endParaRPr lang="en-US" altLang="ja-JP" sz="2400" dirty="0"/>
-          </a:p>
-        </p:txBody>
-      </p:sp>
-      <p:sp>
-        <p:nvSpPr>
-          <p:cNvPr id="5" name="テキスト ボックス 4">
-            <a:extLst>
-              <a:ext uri="{FF2B5EF4-FFF2-40B4-BE49-F238E27FC236}">
-                <a16:creationId xmlns:a16="http://schemas.microsoft.com/office/drawing/2014/main" id="{A6EAFAF2-BDAD-46C4-BE93-C91CB15D7D27}"/>
-              </a:ext>
-            </a:extLst>
-          </p:cNvPr>
-          <p:cNvSpPr txBox="1"/>
-          <p:nvPr/>
-        </p:nvSpPr>
-        <p:spPr>
-          <a:xfrm>
-            <a:off x="567542" y="5788429"/>
-            <a:ext cx="6647974" cy="461665"/>
-          </a:xfrm>
-          <a:prstGeom prst="rect">
-            <a:avLst/>
-          </a:prstGeom>
-          <a:noFill/>
-        </p:spPr>
-        <p:txBody>
-          <a:bodyPr wrap="none" rtlCol="0">
-            <a:spAutoFit/>
-          </a:bodyPr>
-          <a:lstStyle/>
-          <a:p>
-            <a:r>
-              <a:rPr lang="ja-JP" altLang="en-US" sz="2400" dirty="0"/>
-              <a:t>実行して</a:t>
-            </a:r>
-            <a:r>
-              <a:rPr lang="ja-JP" altLang="en-US" sz="2400" b="1" dirty="0">
-                <a:solidFill>
-                  <a:srgbClr val="FF9900"/>
-                </a:solidFill>
-              </a:rPr>
-              <a:t>コイン</a:t>
-            </a:r>
-            <a:r>
-              <a:rPr lang="ja-JP" altLang="en-US" sz="2400" dirty="0"/>
-              <a:t>がとれるか確認しましょう！！</a:t>
+              <a:t>をダブルクリックしましょう。</a:t>
             </a:r>
             <a:endParaRPr lang="en-US" altLang="ja-JP" sz="2400" dirty="0"/>
           </a:p>
@@ -4722,10 +4680,10 @@
       </p:sp>
       <p:pic>
         <p:nvPicPr>
-          <p:cNvPr id="3" name="図 2">
-            <a:extLst>
-              <a:ext uri="{FF2B5EF4-FFF2-40B4-BE49-F238E27FC236}">
-                <a16:creationId xmlns:a16="http://schemas.microsoft.com/office/drawing/2014/main" id="{581A2539-54AE-4AD7-BDA7-8E88FD5A927A}"/>
+          <p:cNvPr id="5" name="図 4">
+            <a:extLst>
+              <a:ext uri="{FF2B5EF4-FFF2-40B4-BE49-F238E27FC236}">
+                <a16:creationId xmlns:a16="http://schemas.microsoft.com/office/drawing/2014/main" id="{1D56BB74-ED49-4F07-84E8-2BEF90E5C815}"/>
               </a:ext>
             </a:extLst>
           </p:cNvPr>
@@ -4743,7 +4701,7 @@
         <p:spPr>
           <a:xfrm>
             <a:off x="567542" y="2187126"/>
-            <a:ext cx="9963876" cy="1241874"/>
+            <a:ext cx="4987744" cy="4178920"/>
           </a:xfrm>
           <a:prstGeom prst="rect">
             <a:avLst/>
@@ -4752,10 +4710,88 @@
       </p:pic>
       <p:sp>
         <p:nvSpPr>
-          <p:cNvPr id="7" name="矢印: 右 6">
-            <a:extLst>
-              <a:ext uri="{FF2B5EF4-FFF2-40B4-BE49-F238E27FC236}">
-                <a16:creationId xmlns:a16="http://schemas.microsoft.com/office/drawing/2014/main" id="{C11E9EE3-3A66-46DD-9D3B-1C9FD3D3AA66}"/>
+          <p:cNvPr id="7" name="テキスト ボックス 6">
+            <a:extLst>
+              <a:ext uri="{FF2B5EF4-FFF2-40B4-BE49-F238E27FC236}">
+                <a16:creationId xmlns:a16="http://schemas.microsoft.com/office/drawing/2014/main" id="{B57F5FA0-D20C-493D-9581-973743D1BA76}"/>
+              </a:ext>
+            </a:extLst>
+          </p:cNvPr>
+          <p:cNvSpPr txBox="1"/>
+          <p:nvPr/>
+        </p:nvSpPr>
+        <p:spPr>
+          <a:xfrm>
+            <a:off x="5676633" y="6005981"/>
+            <a:ext cx="3570208" cy="461665"/>
+          </a:xfrm>
+          <a:prstGeom prst="rect">
+            <a:avLst/>
+          </a:prstGeom>
+          <a:noFill/>
+        </p:spPr>
+        <p:txBody>
+          <a:bodyPr wrap="none" rtlCol="0">
+            <a:spAutoFit/>
+          </a:bodyPr>
+          <a:lstStyle/>
+          <a:p>
+            <a:r>
+              <a:rPr lang="ja-JP" altLang="en-US" sz="2400" dirty="0"/>
+              <a:t>ゲームは</a:t>
+            </a:r>
+            <a:r>
+              <a:rPr lang="ja-JP" altLang="en-US" sz="2400" b="1" dirty="0">
+                <a:solidFill>
+                  <a:srgbClr val="FF0000"/>
+                </a:solidFill>
+              </a:rPr>
+              <a:t>停止</a:t>
+            </a:r>
+            <a:r>
+              <a:rPr lang="ja-JP" altLang="en-US" sz="2400" dirty="0"/>
+              <a:t>しましょう</a:t>
+            </a:r>
+            <a:endParaRPr lang="en-US" altLang="ja-JP" sz="2400" dirty="0"/>
+          </a:p>
+        </p:txBody>
+      </p:sp>
+      <p:pic>
+        <p:nvPicPr>
+          <p:cNvPr id="3" name="図 2">
+            <a:extLst>
+              <a:ext uri="{FF2B5EF4-FFF2-40B4-BE49-F238E27FC236}">
+                <a16:creationId xmlns:a16="http://schemas.microsoft.com/office/drawing/2014/main" id="{D14CC53A-9227-4562-807C-5113A406DD0C}"/>
+              </a:ext>
+            </a:extLst>
+          </p:cNvPr>
+          <p:cNvPicPr>
+            <a:picLocks noChangeAspect="1"/>
+          </p:cNvPicPr>
+          <p:nvPr/>
+        </p:nvPicPr>
+        <p:blipFill>
+          <a:blip r:embed="rId3"/>
+          <a:stretch>
+            <a:fillRect/>
+          </a:stretch>
+        </p:blipFill>
+        <p:spPr>
+          <a:xfrm>
+            <a:off x="9175124" y="6051049"/>
+            <a:ext cx="1400370" cy="371527"/>
+          </a:xfrm>
+          <a:prstGeom prst="rect">
+            <a:avLst/>
+          </a:prstGeom>
+        </p:spPr>
+      </p:pic>
+      <p:sp>
+        <p:nvSpPr>
+          <p:cNvPr id="8" name="矢印: 右 7">
+            <a:extLst>
+              <a:ext uri="{FF2B5EF4-FFF2-40B4-BE49-F238E27FC236}">
+                <a16:creationId xmlns:a16="http://schemas.microsoft.com/office/drawing/2014/main" id="{1EACBFD0-0AD5-4D06-9D9D-65B9AD12627E}"/>
               </a:ext>
             </a:extLst>
           </p:cNvPr>
@@ -4763,8 +4799,8 @@
           <p:nvPr/>
         </p:nvSpPr>
         <p:spPr>
-          <a:xfrm rot="18234661">
-            <a:off x="4409161" y="3408691"/>
+          <a:xfrm rot="7228074">
+            <a:off x="9763909" y="5506480"/>
             <a:ext cx="776827" cy="524934"/>
           </a:xfrm>
           <a:prstGeom prst="rightArrow">
@@ -4807,7 +4843,7 @@
     </p:spTree>
     <p:extLst>
       <p:ext uri="{BB962C8B-B14F-4D97-AF65-F5344CB8AC3E}">
-        <p14:creationId xmlns:p14="http://schemas.microsoft.com/office/powerpoint/2010/main" val="1251649344"/>
+        <p14:creationId xmlns:p14="http://schemas.microsoft.com/office/powerpoint/2010/main" val="2914600962"/>
       </p:ext>
     </p:extLst>
   </p:cSld>
@@ -4885,7 +4921,7 @@
         <p:spPr>
           <a:xfrm>
             <a:off x="567542" y="1216429"/>
-            <a:ext cx="9110186" cy="1200329"/>
+            <a:ext cx="11413702" cy="1200329"/>
           </a:xfrm>
           <a:prstGeom prst="rect">
             <a:avLst/>
@@ -4900,7 +4936,38 @@
           <a:p>
             <a:r>
               <a:rPr lang="ja-JP" altLang="en-US" sz="2400" dirty="0"/>
-              <a:t>ステージを進めていくと、</a:t>
+              <a:t>開いたものは</a:t>
+            </a:r>
+            <a:r>
+              <a:rPr lang="ja-JP" altLang="en-US" sz="2400" b="1" dirty="0">
+                <a:solidFill>
+                  <a:srgbClr val="0070C0"/>
+                </a:solidFill>
+              </a:rPr>
+              <a:t>ブループリント</a:t>
+            </a:r>
+            <a:r>
+              <a:rPr lang="ja-JP" altLang="en-US" sz="2400" dirty="0"/>
+              <a:t>と呼ばれる</a:t>
+            </a:r>
+            <a:r>
+              <a:rPr lang="ja-JP" altLang="en-US" sz="2400" b="1" dirty="0">
+                <a:solidFill>
+                  <a:srgbClr val="0070C0"/>
+                </a:solidFill>
+              </a:rPr>
+              <a:t>コインの設計書</a:t>
+            </a:r>
+            <a:r>
+              <a:rPr lang="ja-JP" altLang="en-US" sz="2400" dirty="0"/>
+              <a:t>になります。</a:t>
+            </a:r>
+            <a:endParaRPr lang="en-US" altLang="ja-JP" sz="2400" dirty="0"/>
+          </a:p>
+          <a:p>
+            <a:r>
+              <a:rPr lang="ja-JP" altLang="en-US" sz="2400" dirty="0"/>
+              <a:t>ブループリントでは</a:t>
             </a:r>
             <a:r>
               <a:rPr lang="ja-JP" altLang="en-US" sz="2400" b="1" dirty="0">
@@ -4908,61 +4975,22 @@
                   <a:srgbClr val="FF0000"/>
                 </a:solidFill>
               </a:rPr>
-              <a:t>敵</a:t>
-            </a:r>
-            <a:r>
-              <a:rPr lang="ja-JP" altLang="en-US" sz="2400" dirty="0"/>
-              <a:t>が出現します。</a:t>
-            </a:r>
-            <a:endParaRPr lang="en-US" altLang="ja-JP" sz="2400" dirty="0"/>
-          </a:p>
-          <a:p>
-            <a:r>
-              <a:rPr lang="ja-JP" altLang="en-US" sz="2400" dirty="0"/>
-              <a:t>敵をやっつけるために、</a:t>
-            </a:r>
-            <a:r>
-              <a:rPr lang="ja-JP" altLang="en-US" sz="2400" b="1" dirty="0">
-                <a:solidFill>
-                  <a:srgbClr val="FF0000"/>
-                </a:solidFill>
-              </a:rPr>
-              <a:t>攻撃</a:t>
-            </a:r>
-            <a:r>
-              <a:rPr lang="ja-JP" altLang="en-US" sz="2400" dirty="0"/>
-              <a:t>をプログラムで実装していきます。</a:t>
+              <a:t>プログラムを書いたり、細かい設定ができたりします。</a:t>
             </a:r>
             <a:endParaRPr lang="en-US" altLang="ja-JP" sz="2400" b="1" dirty="0">
               <a:solidFill>
-                <a:srgbClr val="7030A0"/>
+                <a:srgbClr val="FF0000"/>
               </a:solidFill>
             </a:endParaRPr>
           </a:p>
           <a:p>
             <a:r>
-              <a:rPr lang="en-US" altLang="ja-JP" sz="2400" b="1" dirty="0">
-                <a:solidFill>
-                  <a:srgbClr val="7030A0"/>
-                </a:solidFill>
-              </a:rPr>
-              <a:t>Visual Studio</a:t>
+              <a:rPr lang="en-US" altLang="ja-JP" sz="2400" dirty="0"/>
+              <a:t>Unreal Engine</a:t>
             </a:r>
             <a:r>
               <a:rPr lang="ja-JP" altLang="en-US" sz="2400" dirty="0"/>
-              <a:t>の</a:t>
-            </a:r>
-            <a:r>
-              <a:rPr lang="en-US" altLang="ja-JP" sz="2400" b="1" dirty="0">
-                <a:solidFill>
-                  <a:srgbClr val="FF0000"/>
-                </a:solidFill>
-              </a:rPr>
-              <a:t>Magician.cpp</a:t>
-            </a:r>
-            <a:r>
-              <a:rPr lang="ja-JP" altLang="en-US" sz="2400" dirty="0"/>
-              <a:t>を開きましょう。</a:t>
+              <a:t>での開発ではとても大事な要素で、このあともたくさん使います。</a:t>
             </a:r>
             <a:endParaRPr lang="en-US" altLang="ja-JP" sz="2400" dirty="0"/>
           </a:p>
@@ -4970,10 +4998,10 @@
       </p:sp>
       <p:pic>
         <p:nvPicPr>
-          <p:cNvPr id="3" name="図 2">
-            <a:extLst>
-              <a:ext uri="{FF2B5EF4-FFF2-40B4-BE49-F238E27FC236}">
-                <a16:creationId xmlns:a16="http://schemas.microsoft.com/office/drawing/2014/main" id="{52E6DF1A-B752-46FD-AC35-28E8CDB567D4}"/>
+          <p:cNvPr id="7" name="図 6">
+            <a:extLst>
+              <a:ext uri="{FF2B5EF4-FFF2-40B4-BE49-F238E27FC236}">
+                <a16:creationId xmlns:a16="http://schemas.microsoft.com/office/drawing/2014/main" id="{00DDFA51-5B28-4286-8E37-E053F7F96745}"/>
               </a:ext>
             </a:extLst>
           </p:cNvPr>
@@ -4991,91 +5019,7 @@
         <p:spPr>
           <a:xfrm>
             <a:off x="567542" y="2556458"/>
-            <a:ext cx="3562786" cy="3886675"/>
-          </a:xfrm>
-          <a:prstGeom prst="rect">
-            <a:avLst/>
-          </a:prstGeom>
-        </p:spPr>
-      </p:pic>
-      <p:sp>
-        <p:nvSpPr>
-          <p:cNvPr id="7" name="矢印: 右 6">
-            <a:extLst>
-              <a:ext uri="{FF2B5EF4-FFF2-40B4-BE49-F238E27FC236}">
-                <a16:creationId xmlns:a16="http://schemas.microsoft.com/office/drawing/2014/main" id="{6272AFA5-5138-41CE-949B-7CB7F0726AF0}"/>
-              </a:ext>
-            </a:extLst>
-          </p:cNvPr>
-          <p:cNvSpPr/>
-          <p:nvPr/>
-        </p:nvSpPr>
-        <p:spPr>
-          <a:xfrm rot="18234661">
-            <a:off x="1801427" y="5948691"/>
-            <a:ext cx="776827" cy="524934"/>
-          </a:xfrm>
-          <a:prstGeom prst="rightArrow">
-            <a:avLst/>
-          </a:prstGeom>
-          <a:solidFill>
-            <a:srgbClr val="FF0000"/>
-          </a:solidFill>
-          <a:ln>
-            <a:solidFill>
-              <a:schemeClr val="tx1"/>
-            </a:solidFill>
-          </a:ln>
-        </p:spPr>
-        <p:style>
-          <a:lnRef idx="2">
-            <a:schemeClr val="accent1">
-              <a:shade val="50000"/>
-            </a:schemeClr>
-          </a:lnRef>
-          <a:fillRef idx="1">
-            <a:schemeClr val="accent1"/>
-          </a:fillRef>
-          <a:effectRef idx="0">
-            <a:schemeClr val="accent1"/>
-          </a:effectRef>
-          <a:fontRef idx="minor">
-            <a:schemeClr val="lt1"/>
-          </a:fontRef>
-        </p:style>
-        <p:txBody>
-          <a:bodyPr rtlCol="0" anchor="ctr"/>
-          <a:lstStyle/>
-          <a:p>
-            <a:pPr algn="ctr"/>
-            <a:endParaRPr kumimoji="1" lang="ja-JP" altLang="en-US"/>
-          </a:p>
-        </p:txBody>
-      </p:sp>
-      <p:pic>
-        <p:nvPicPr>
-          <p:cNvPr id="5" name="図 4">
-            <a:extLst>
-              <a:ext uri="{FF2B5EF4-FFF2-40B4-BE49-F238E27FC236}">
-                <a16:creationId xmlns:a16="http://schemas.microsoft.com/office/drawing/2014/main" id="{109E0E40-E0D0-44E4-B9C4-805B7A18A6FA}"/>
-              </a:ext>
-            </a:extLst>
-          </p:cNvPr>
-          <p:cNvPicPr>
-            <a:picLocks noChangeAspect="1"/>
-          </p:cNvPicPr>
-          <p:nvPr/>
-        </p:nvPicPr>
-        <p:blipFill>
-          <a:blip r:embed="rId3"/>
-          <a:stretch>
-            <a:fillRect/>
-          </a:stretch>
-        </p:blipFill>
-        <p:spPr>
-          <a:xfrm>
-            <a:off x="4483642" y="2556458"/>
-            <a:ext cx="6716062" cy="2362530"/>
+            <a:ext cx="7382658" cy="3998940"/>
           </a:xfrm>
           <a:prstGeom prst="rect">
             <a:avLst/>
@@ -5085,7 +5029,7 @@
     </p:spTree>
     <p:extLst>
       <p:ext uri="{BB962C8B-B14F-4D97-AF65-F5344CB8AC3E}">
-        <p14:creationId xmlns:p14="http://schemas.microsoft.com/office/powerpoint/2010/main" val="1389448925"/>
+        <p14:creationId xmlns:p14="http://schemas.microsoft.com/office/powerpoint/2010/main" val="2164466022"/>
       </p:ext>
     </p:extLst>
   </p:cSld>
@@ -5163,7 +5107,7 @@
         <p:spPr>
           <a:xfrm>
             <a:off x="567542" y="1216429"/>
-            <a:ext cx="5764720" cy="461665"/>
+            <a:ext cx="10033516" cy="830997"/>
           </a:xfrm>
           <a:prstGeom prst="rect">
             <a:avLst/>
@@ -5176,95 +5120,91 @@
           </a:bodyPr>
           <a:lstStyle/>
           <a:p>
-            <a:r>
-              <a:rPr lang="en-US" altLang="ja-JP" sz="2400" dirty="0"/>
-              <a:t>C++</a:t>
-            </a:r>
-            <a:r>
-              <a:rPr lang="ja-JP" altLang="en-US" sz="2400" dirty="0"/>
-              <a:t>で以下のように書いてみましょう。</a:t>
-            </a:r>
-            <a:endParaRPr lang="en-US" altLang="ja-JP" sz="2400" dirty="0"/>
-          </a:p>
-        </p:txBody>
-      </p:sp>
-      <p:sp>
-        <p:nvSpPr>
-          <p:cNvPr id="5" name="テキスト ボックス 4">
-            <a:extLst>
-              <a:ext uri="{FF2B5EF4-FFF2-40B4-BE49-F238E27FC236}">
-                <a16:creationId xmlns:a16="http://schemas.microsoft.com/office/drawing/2014/main" id="{5F91C99E-110B-477C-9BB7-A07A1B418655}"/>
-              </a:ext>
-            </a:extLst>
-          </p:cNvPr>
-          <p:cNvSpPr txBox="1"/>
-          <p:nvPr/>
-        </p:nvSpPr>
-        <p:spPr>
-          <a:xfrm>
-            <a:off x="567542" y="5771495"/>
-            <a:ext cx="8319906" cy="830997"/>
-          </a:xfrm>
-          <a:prstGeom prst="rect">
-            <a:avLst/>
-          </a:prstGeom>
-          <a:noFill/>
-        </p:spPr>
-        <p:txBody>
-          <a:bodyPr wrap="none" rtlCol="0">
-            <a:spAutoFit/>
-          </a:bodyPr>
-          <a:lstStyle/>
-          <a:p>
-            <a:r>
-              <a:rPr lang="ja-JP" altLang="en-US" sz="2400" dirty="0"/>
-              <a:t>書き終わったら </a:t>
-            </a:r>
             <a:r>
               <a:rPr lang="ja-JP" altLang="en-US" sz="2400" b="1" dirty="0">
                 <a:solidFill>
                   <a:srgbClr val="FF0000"/>
                 </a:solidFill>
               </a:rPr>
-              <a:t>保存 → コンパイルボタン → 実行</a:t>
+              <a:t>イベントグラフ</a:t>
             </a:r>
             <a:r>
               <a:rPr lang="ja-JP" altLang="en-US" sz="2400" dirty="0"/>
-              <a:t>をして、</a:t>
-            </a:r>
-            <a:endParaRPr lang="en-US" altLang="ja-JP" sz="2400" dirty="0"/>
-          </a:p>
-          <a:p>
-            <a:r>
-              <a:rPr lang="en-US" altLang="ja-JP" sz="2400" b="1" dirty="0">
+              <a:t>で</a:t>
+            </a:r>
+            <a:r>
+              <a:rPr lang="ja-JP" altLang="en-US" sz="2400" b="1" dirty="0">
                 <a:solidFill>
-                  <a:srgbClr val="0070C0"/>
+                  <a:srgbClr val="FF0000"/>
                 </a:solidFill>
               </a:rPr>
-              <a:t>X</a:t>
-            </a:r>
-            <a:r>
-              <a:rPr lang="ja-JP" altLang="en-US" sz="2400" b="1" dirty="0">
-                <a:solidFill>
-                  <a:srgbClr val="0070C0"/>
-                </a:solidFill>
-              </a:rPr>
-              <a:t>ボタン</a:t>
+              <a:t>ブループリントのプログラムを書く</a:t>
             </a:r>
             <a:r>
               <a:rPr lang="ja-JP" altLang="en-US" sz="2400" dirty="0"/>
-              <a:t>を押してみましょう。</a:t>
+              <a:t>ことができます。</a:t>
             </a:r>
             <a:endParaRPr lang="en-US" altLang="ja-JP" sz="2400" dirty="0"/>
+          </a:p>
+          <a:p>
+            <a:r>
+              <a:rPr lang="ja-JP" altLang="en-US" sz="2400" dirty="0"/>
+              <a:t>ここに当たり判定のプログラムを書いていきます。</a:t>
+            </a:r>
+            <a:endParaRPr lang="en-US" altLang="ja-JP" sz="2400" dirty="0"/>
+          </a:p>
+        </p:txBody>
+      </p:sp>
+      <p:sp>
+        <p:nvSpPr>
+          <p:cNvPr id="7" name="テキスト ボックス 6">
+            <a:extLst>
+              <a:ext uri="{FF2B5EF4-FFF2-40B4-BE49-F238E27FC236}">
+                <a16:creationId xmlns:a16="http://schemas.microsoft.com/office/drawing/2014/main" id="{F3477FE4-E3BE-40C8-93E0-30DD901E2BE8}"/>
+              </a:ext>
+            </a:extLst>
+          </p:cNvPr>
+          <p:cNvSpPr txBox="1"/>
+          <p:nvPr/>
+        </p:nvSpPr>
+        <p:spPr>
+          <a:xfrm>
+            <a:off x="67777" y="4810575"/>
+            <a:ext cx="4905510" cy="369332"/>
+          </a:xfrm>
+          <a:prstGeom prst="rect">
+            <a:avLst/>
+          </a:prstGeom>
+          <a:noFill/>
+        </p:spPr>
+        <p:txBody>
+          <a:bodyPr wrap="none" rtlCol="0">
+            <a:spAutoFit/>
+          </a:bodyPr>
+          <a:lstStyle/>
+          <a:p>
+            <a:r>
+              <a:rPr lang="ja-JP" altLang="en-US" dirty="0"/>
+              <a:t>①右クリックして</a:t>
+            </a:r>
+            <a:r>
+              <a:rPr lang="en-US" altLang="ja-JP" dirty="0"/>
+              <a:t>Begin Overlap</a:t>
+            </a:r>
+            <a:r>
+              <a:rPr lang="ja-JP" altLang="en-US" dirty="0"/>
+              <a:t>ノードを追加</a:t>
+            </a:r>
+            <a:endParaRPr lang="en-US" altLang="ja-JP" dirty="0"/>
           </a:p>
         </p:txBody>
       </p:sp>
       <p:pic>
         <p:nvPicPr>
-          <p:cNvPr id="3" name="図 2">
-            <a:extLst>
-              <a:ext uri="{FF2B5EF4-FFF2-40B4-BE49-F238E27FC236}">
-                <a16:creationId xmlns:a16="http://schemas.microsoft.com/office/drawing/2014/main" id="{A582520D-D933-4606-99AA-B1D8DC76F2E5}"/>
+          <p:cNvPr id="8" name="図 7">
+            <a:extLst>
+              <a:ext uri="{FF2B5EF4-FFF2-40B4-BE49-F238E27FC236}">
+                <a16:creationId xmlns:a16="http://schemas.microsoft.com/office/drawing/2014/main" id="{500D2806-7E71-4AF7-A5D2-758D8D1524CD}"/>
               </a:ext>
             </a:extLst>
           </p:cNvPr>
@@ -5281,20 +5221,86 @@
         </p:blipFill>
         <p:spPr>
           <a:xfrm>
-            <a:off x="567542" y="1729028"/>
-            <a:ext cx="10145541" cy="3991532"/>
+            <a:off x="4973287" y="2187126"/>
+            <a:ext cx="6800237" cy="3265407"/>
           </a:xfrm>
           <a:prstGeom prst="rect">
             <a:avLst/>
           </a:prstGeom>
         </p:spPr>
       </p:pic>
-      <p:sp>
-        <p:nvSpPr>
-          <p:cNvPr id="7" name="正方形/長方形 6">
-            <a:extLst>
-              <a:ext uri="{FF2B5EF4-FFF2-40B4-BE49-F238E27FC236}">
-                <a16:creationId xmlns:a16="http://schemas.microsoft.com/office/drawing/2014/main" id="{0C4C30B0-9FBE-4500-A09E-51FDC19A0C8C}"/>
+      <p:pic>
+        <p:nvPicPr>
+          <p:cNvPr id="3" name="図 2">
+            <a:extLst>
+              <a:ext uri="{FF2B5EF4-FFF2-40B4-BE49-F238E27FC236}">
+                <a16:creationId xmlns:a16="http://schemas.microsoft.com/office/drawing/2014/main" id="{BD382DDB-B67D-46A0-8595-C98CA2A2C692}"/>
+              </a:ext>
+            </a:extLst>
+          </p:cNvPr>
+          <p:cNvPicPr>
+            <a:picLocks noChangeAspect="1"/>
+          </p:cNvPicPr>
+          <p:nvPr/>
+        </p:nvPicPr>
+        <p:blipFill>
+          <a:blip r:embed="rId3"/>
+          <a:stretch>
+            <a:fillRect/>
+          </a:stretch>
+        </p:blipFill>
+        <p:spPr>
+          <a:xfrm>
+            <a:off x="567542" y="2187126"/>
+            <a:ext cx="4112288" cy="2428309"/>
+          </a:xfrm>
+          <a:prstGeom prst="rect">
+            <a:avLst/>
+          </a:prstGeom>
+        </p:spPr>
+      </p:pic>
+      <p:sp>
+        <p:nvSpPr>
+          <p:cNvPr id="9" name="テキスト ボックス 8">
+            <a:extLst>
+              <a:ext uri="{FF2B5EF4-FFF2-40B4-BE49-F238E27FC236}">
+                <a16:creationId xmlns:a16="http://schemas.microsoft.com/office/drawing/2014/main" id="{7DFC8678-FBC8-414F-BD3A-85153F24917B}"/>
+              </a:ext>
+            </a:extLst>
+          </p:cNvPr>
+          <p:cNvSpPr txBox="1"/>
+          <p:nvPr/>
+        </p:nvSpPr>
+        <p:spPr>
+          <a:xfrm>
+            <a:off x="5857331" y="5641571"/>
+            <a:ext cx="5032147" cy="369332"/>
+          </a:xfrm>
+          <a:prstGeom prst="rect">
+            <a:avLst/>
+          </a:prstGeom>
+          <a:noFill/>
+        </p:spPr>
+        <p:txBody>
+          <a:bodyPr wrap="none" rtlCol="0">
+            <a:spAutoFit/>
+          </a:bodyPr>
+          <a:lstStyle/>
+          <a:p>
+            <a:r>
+              <a:rPr lang="ja-JP" altLang="en-US" dirty="0"/>
+              <a:t>②ドラッグドロップで上のように線をつなげる</a:t>
+            </a:r>
+            <a:endParaRPr lang="en-US" altLang="ja-JP" dirty="0"/>
+          </a:p>
+        </p:txBody>
+      </p:sp>
+      <p:sp>
+        <p:nvSpPr>
+          <p:cNvPr id="10" name="矢印: 右 9">
+            <a:extLst>
+              <a:ext uri="{FF2B5EF4-FFF2-40B4-BE49-F238E27FC236}">
+                <a16:creationId xmlns:a16="http://schemas.microsoft.com/office/drawing/2014/main" id="{EC4F219D-A3C3-432B-A018-FAC80B12F19A}"/>
               </a:ext>
             </a:extLst>
           </p:cNvPr>
@@ -5302,17 +5308,19 @@
           <p:nvPr/>
         </p:nvSpPr>
         <p:spPr>
-          <a:xfrm>
-            <a:off x="2819399" y="4334933"/>
-            <a:ext cx="7984067" cy="575734"/>
-          </a:xfrm>
-          <a:prstGeom prst="rect">
-            <a:avLst/>
-          </a:prstGeom>
-          <a:noFill/>
-          <a:ln w="38100">
+          <a:xfrm rot="13871335">
+            <a:off x="2914874" y="3904873"/>
+            <a:ext cx="776827" cy="524934"/>
+          </a:xfrm>
+          <a:prstGeom prst="rightArrow">
+            <a:avLst/>
+          </a:prstGeom>
+          <a:solidFill>
+            <a:srgbClr val="FF0000"/>
+          </a:solidFill>
+          <a:ln>
             <a:solidFill>
-              <a:srgbClr val="FF0000"/>
+              <a:schemeClr val="tx1"/>
             </a:solidFill>
           </a:ln>
         </p:spPr>
@@ -5344,7 +5352,7 @@
     </p:spTree>
     <p:extLst>
       <p:ext uri="{BB962C8B-B14F-4D97-AF65-F5344CB8AC3E}">
-        <p14:creationId xmlns:p14="http://schemas.microsoft.com/office/powerpoint/2010/main" val="499895268"/>
+        <p14:creationId xmlns:p14="http://schemas.microsoft.com/office/powerpoint/2010/main" val="2966724515"/>
       </p:ext>
     </p:extLst>
   </p:cSld>
@@ -5422,7 +5430,7 @@
         <p:spPr>
           <a:xfrm>
             <a:off x="567542" y="1216429"/>
-            <a:ext cx="7263527" cy="830997"/>
+            <a:ext cx="5625258" cy="461665"/>
           </a:xfrm>
           <a:prstGeom prst="rect">
             <a:avLst/>
@@ -5437,89 +5445,19 @@
           <a:p>
             <a:r>
               <a:rPr lang="ja-JP" altLang="en-US" sz="2400" dirty="0"/>
-              <a:t>アクションゲームで大事なことは、</a:t>
-            </a:r>
-            <a:endParaRPr lang="en-US" altLang="ja-JP" sz="2400" dirty="0"/>
-          </a:p>
-          <a:p>
-            <a:r>
-              <a:rPr lang="ja-JP" altLang="en-US" sz="2400" b="1" dirty="0">
+              <a:t>続いて</a:t>
+            </a:r>
+            <a:r>
+              <a:rPr lang="en-US" altLang="ja-JP" sz="2400" b="1" dirty="0">
                 <a:solidFill>
                   <a:srgbClr val="FF0000"/>
                 </a:solidFill>
               </a:rPr>
-              <a:t>敵をやっつけて気持ち良いと感じるかどうか</a:t>
+              <a:t>ItemBase.cpp</a:t>
             </a:r>
             <a:r>
               <a:rPr lang="ja-JP" altLang="en-US" sz="2400" dirty="0"/>
-              <a:t>です。</a:t>
-            </a:r>
-            <a:endParaRPr lang="en-US" altLang="ja-JP" sz="2400" dirty="0"/>
-          </a:p>
-        </p:txBody>
-      </p:sp>
-      <p:sp>
-        <p:nvSpPr>
-          <p:cNvPr id="7" name="テキスト ボックス 6">
-            <a:extLst>
-              <a:ext uri="{FF2B5EF4-FFF2-40B4-BE49-F238E27FC236}">
-                <a16:creationId xmlns:a16="http://schemas.microsoft.com/office/drawing/2014/main" id="{9F53DD6C-E45D-4399-9D63-AE50E346FE78}"/>
-              </a:ext>
-            </a:extLst>
-          </p:cNvPr>
-          <p:cNvSpPr txBox="1"/>
-          <p:nvPr/>
-        </p:nvSpPr>
-        <p:spPr>
-          <a:xfrm>
-            <a:off x="567541" y="5763029"/>
-            <a:ext cx="9110186" cy="830997"/>
-          </a:xfrm>
-          <a:prstGeom prst="rect">
-            <a:avLst/>
-          </a:prstGeom>
-          <a:noFill/>
-        </p:spPr>
-        <p:txBody>
-          <a:bodyPr wrap="none" rtlCol="0">
-            <a:spAutoFit/>
-          </a:bodyPr>
-          <a:lstStyle/>
-          <a:p>
-            <a:r>
-              <a:rPr lang="ja-JP" altLang="en-US" sz="2400" dirty="0"/>
-              <a:t>今のままだと</a:t>
-            </a:r>
-            <a:r>
-              <a:rPr lang="ja-JP" altLang="en-US" sz="2400" b="1" dirty="0">
-                <a:solidFill>
-                  <a:srgbClr val="0070C0"/>
-                </a:solidFill>
-              </a:rPr>
-              <a:t>あまり気持ちよくない</a:t>
-            </a:r>
-            <a:r>
-              <a:rPr lang="ja-JP" altLang="en-US" sz="2400" dirty="0"/>
-              <a:t>ですよね。。</a:t>
-            </a:r>
-            <a:endParaRPr lang="en-US" altLang="ja-JP" sz="2400" dirty="0"/>
-          </a:p>
-          <a:p>
-            <a:r>
-              <a:rPr lang="ja-JP" altLang="en-US" sz="2400" dirty="0"/>
-              <a:t>今回は、敵をやっつけて嬉しくなるように、</a:t>
-            </a:r>
-            <a:r>
-              <a:rPr lang="ja-JP" altLang="en-US" sz="2400" b="1" dirty="0">
-                <a:solidFill>
-                  <a:srgbClr val="FF0000"/>
-                </a:solidFill>
-              </a:rPr>
-              <a:t>演出</a:t>
-            </a:r>
-            <a:r>
-              <a:rPr lang="ja-JP" altLang="en-US" sz="2400" dirty="0"/>
-              <a:t>を追加します。</a:t>
+              <a:t>を開きましょう。</a:t>
             </a:r>
             <a:endParaRPr lang="en-US" altLang="ja-JP" sz="2400" dirty="0"/>
           </a:p>
@@ -5530,7 +5468,7 @@
           <p:cNvPr id="3" name="図 2">
             <a:extLst>
               <a:ext uri="{FF2B5EF4-FFF2-40B4-BE49-F238E27FC236}">
-                <a16:creationId xmlns:a16="http://schemas.microsoft.com/office/drawing/2014/main" id="{1AE54078-F5FB-43FF-BACE-F51D4CECA001}"/>
+                <a16:creationId xmlns:a16="http://schemas.microsoft.com/office/drawing/2014/main" id="{B7115640-DB2E-4DE1-9AF1-B60F3AD034C0}"/>
               </a:ext>
             </a:extLst>
           </p:cNvPr>
@@ -5540,31 +5478,82 @@
           <p:nvPr/>
         </p:nvPicPr>
         <p:blipFill>
-          <a:blip r:embed="rId2">
-            <a:extLst>
-              <a:ext uri="{28A0092B-C50C-407E-A947-70E740481C1C}">
-                <a14:useLocalDpi xmlns:a14="http://schemas.microsoft.com/office/drawing/2010/main" val="0"/>
-              </a:ext>
-            </a:extLst>
-          </a:blip>
+          <a:blip r:embed="rId2"/>
           <a:stretch>
             <a:fillRect/>
           </a:stretch>
         </p:blipFill>
         <p:spPr>
           <a:xfrm>
-            <a:off x="567541" y="2187126"/>
-            <a:ext cx="6204100" cy="3102050"/>
+            <a:off x="567542" y="1817794"/>
+            <a:ext cx="3701741" cy="3936029"/>
           </a:xfrm>
           <a:prstGeom prst="rect">
             <a:avLst/>
           </a:prstGeom>
         </p:spPr>
       </p:pic>
+      <p:sp>
+        <p:nvSpPr>
+          <p:cNvPr id="9" name="吹き出し: 四角形 8">
+            <a:extLst>
+              <a:ext uri="{FF2B5EF4-FFF2-40B4-BE49-F238E27FC236}">
+                <a16:creationId xmlns:a16="http://schemas.microsoft.com/office/drawing/2014/main" id="{4F16C164-7B29-41F0-B78A-92B1AEAE43B0}"/>
+              </a:ext>
+            </a:extLst>
+          </p:cNvPr>
+          <p:cNvSpPr/>
+          <p:nvPr/>
+        </p:nvSpPr>
+        <p:spPr>
+          <a:xfrm>
+            <a:off x="2788023" y="1950028"/>
+            <a:ext cx="2389152" cy="431799"/>
+          </a:xfrm>
+          <a:prstGeom prst="wedgeRectCallout">
+            <a:avLst>
+              <a:gd name="adj1" fmla="val -30047"/>
+              <a:gd name="adj2" fmla="val 101716"/>
+            </a:avLst>
+          </a:prstGeom>
+          <a:ln/>
+        </p:spPr>
+        <p:style>
+          <a:lnRef idx="2">
+            <a:schemeClr val="accent5">
+              <a:shade val="50000"/>
+            </a:schemeClr>
+          </a:lnRef>
+          <a:fillRef idx="1">
+            <a:schemeClr val="accent5"/>
+          </a:fillRef>
+          <a:effectRef idx="0">
+            <a:schemeClr val="accent5"/>
+          </a:effectRef>
+          <a:fontRef idx="minor">
+            <a:schemeClr val="lt1"/>
+          </a:fontRef>
+        </p:style>
+        <p:txBody>
+          <a:bodyPr rtlCol="0" anchor="ctr"/>
+          <a:lstStyle/>
+          <a:p>
+            <a:pPr algn="ctr"/>
+            <a:r>
+              <a:rPr kumimoji="1" lang="ja-JP" altLang="en-US" b="1" dirty="0">
+                <a:solidFill>
+                  <a:schemeClr val="bg1"/>
+                </a:solidFill>
+              </a:rPr>
+              <a:t>ダブルクリック</a:t>
+            </a:r>
+          </a:p>
+        </p:txBody>
+      </p:sp>
     </p:spTree>
     <p:extLst>
       <p:ext uri="{BB962C8B-B14F-4D97-AF65-F5344CB8AC3E}">
-        <p14:creationId xmlns:p14="http://schemas.microsoft.com/office/powerpoint/2010/main" val="4099386392"/>
+        <p14:creationId xmlns:p14="http://schemas.microsoft.com/office/powerpoint/2010/main" val="2925135928"/>
       </p:ext>
     </p:extLst>
   </p:cSld>
@@ -5642,7 +5631,7 @@
         <p:spPr>
           <a:xfrm>
             <a:off x="567542" y="1216429"/>
-            <a:ext cx="9725739" cy="1200329"/>
+            <a:ext cx="9110186" cy="830997"/>
           </a:xfrm>
           <a:prstGeom prst="rect">
             <a:avLst/>
@@ -5656,8 +5645,24 @@
           <a:lstStyle/>
           <a:p>
             <a:r>
+              <a:rPr lang="en-US" altLang="ja-JP" sz="2400" dirty="0"/>
+              <a:t>Unreal Engine</a:t>
+            </a:r>
+            <a:r>
               <a:rPr lang="ja-JP" altLang="en-US" sz="2400" dirty="0"/>
-              <a:t>弾丸が敵に当たったら</a:t>
+              <a:t>では</a:t>
+            </a:r>
+            <a:r>
+              <a:rPr lang="en-US" altLang="ja-JP" sz="2400" b="1" dirty="0">
+                <a:solidFill>
+                  <a:srgbClr val="FF0000"/>
+                </a:solidFill>
+              </a:rPr>
+              <a:t>C++</a:t>
+            </a:r>
+            <a:r>
+              <a:rPr lang="ja-JP" altLang="en-US" sz="2400" dirty="0"/>
+              <a:t>という</a:t>
             </a:r>
             <a:r>
               <a:rPr lang="ja-JP" altLang="en-US" sz="2400" b="1" dirty="0">
@@ -5665,18 +5670,18 @@
                   <a:srgbClr val="FF0000"/>
                 </a:solidFill>
               </a:rPr>
-              <a:t>ヒットエフェクト</a:t>
+              <a:t>プログラム言語</a:t>
             </a:r>
             <a:r>
               <a:rPr lang="ja-JP" altLang="en-US" sz="2400" dirty="0"/>
-              <a:t>が出るようにします。</a:t>
+              <a:t>も使います。</a:t>
             </a:r>
             <a:endParaRPr lang="en-US" altLang="ja-JP" sz="2400" dirty="0"/>
           </a:p>
           <a:p>
             <a:r>
               <a:rPr lang="ja-JP" altLang="en-US" sz="2400" dirty="0"/>
-              <a:t>エフェクトとは</a:t>
+              <a:t>こちらで、</a:t>
             </a:r>
             <a:r>
               <a:rPr lang="ja-JP" altLang="en-US" sz="2400" b="1" dirty="0">
@@ -5684,98 +5689,83 @@
                   <a:srgbClr val="FF0000"/>
                 </a:solidFill>
               </a:rPr>
-              <a:t>ゲームの飾りつけをするアニメーション</a:t>
+              <a:t>コインと重なった時のプログラム</a:t>
             </a:r>
             <a:r>
               <a:rPr lang="ja-JP" altLang="en-US" sz="2400" dirty="0"/>
-              <a:t>のことです。</a:t>
+              <a:t>を書いていきます。</a:t>
             </a:r>
             <a:endParaRPr lang="en-US" altLang="ja-JP" sz="2400" dirty="0"/>
           </a:p>
-          <a:p>
+        </p:txBody>
+      </p:sp>
+      <p:sp>
+        <p:nvSpPr>
+          <p:cNvPr id="5" name="テキスト ボックス 4">
+            <a:extLst>
+              <a:ext uri="{FF2B5EF4-FFF2-40B4-BE49-F238E27FC236}">
+                <a16:creationId xmlns:a16="http://schemas.microsoft.com/office/drawing/2014/main" id="{A6EAFAF2-BDAD-46C4-BE93-C91CB15D7D27}"/>
+              </a:ext>
+            </a:extLst>
+          </p:cNvPr>
+          <p:cNvSpPr txBox="1"/>
+          <p:nvPr/>
+        </p:nvSpPr>
+        <p:spPr>
+          <a:xfrm>
+            <a:off x="567542" y="5788429"/>
+            <a:ext cx="5198859" cy="461665"/>
+          </a:xfrm>
+          <a:prstGeom prst="rect">
+            <a:avLst/>
+          </a:prstGeom>
+          <a:noFill/>
+        </p:spPr>
+        <p:txBody>
+          <a:bodyPr wrap="none" rtlCol="0">
+            <a:spAutoFit/>
+          </a:bodyPr>
+          <a:lstStyle/>
+          <a:p>
+            <a:r>
+              <a:rPr lang="ja-JP" altLang="en-US" sz="2400" dirty="0"/>
+              <a:t>書いたら</a:t>
+            </a:r>
+            <a:r>
+              <a:rPr lang="en-US" altLang="ja-JP" sz="2400" b="1" dirty="0">
+                <a:solidFill>
+                  <a:srgbClr val="FF0000"/>
+                </a:solidFill>
+              </a:rPr>
+              <a:t>Ctrl</a:t>
+            </a:r>
             <a:r>
               <a:rPr lang="ja-JP" altLang="en-US" sz="2400" b="1" dirty="0">
                 <a:solidFill>
                   <a:srgbClr val="FF0000"/>
                 </a:solidFill>
               </a:rPr>
-              <a:t>炎</a:t>
-            </a:r>
-            <a:r>
-              <a:rPr lang="ja-JP" altLang="en-US" sz="2400" dirty="0"/>
-              <a:t>、</a:t>
+              <a:t>＋</a:t>
+            </a:r>
+            <a:r>
+              <a:rPr lang="en-US" altLang="ja-JP" sz="2400" b="1" dirty="0">
+                <a:solidFill>
+                  <a:srgbClr val="FF0000"/>
+                </a:solidFill>
+              </a:rPr>
+              <a:t>S</a:t>
             </a:r>
             <a:r>
               <a:rPr lang="ja-JP" altLang="en-US" sz="2400" b="1" dirty="0">
                 <a:solidFill>
-                  <a:srgbClr val="0070C0"/>
+                  <a:srgbClr val="FF0000"/>
                 </a:solidFill>
               </a:rPr>
-              <a:t>電撃</a:t>
+              <a:t>で保存</a:t>
             </a:r>
             <a:r>
               <a:rPr lang="ja-JP" altLang="en-US" sz="2400" dirty="0"/>
-              <a:t>、</a:t>
-            </a:r>
-            <a:r>
-              <a:rPr lang="ja-JP" altLang="en-US" sz="2400" b="1" dirty="0">
-                <a:solidFill>
-                  <a:srgbClr val="FFC000"/>
-                </a:solidFill>
-              </a:rPr>
-              <a:t>爆発</a:t>
-            </a:r>
-            <a:r>
-              <a:rPr lang="ja-JP" altLang="en-US" sz="2400" dirty="0"/>
-              <a:t>、</a:t>
-            </a:r>
-            <a:r>
-              <a:rPr lang="ja-JP" altLang="en-US" sz="2400" b="1" dirty="0">
-                <a:solidFill>
-                  <a:srgbClr val="00B050"/>
-                </a:solidFill>
-              </a:rPr>
-              <a:t>衝撃波</a:t>
-            </a:r>
-            <a:r>
-              <a:rPr lang="ja-JP" altLang="en-US" sz="2400" dirty="0"/>
-              <a:t>など</a:t>
-            </a:r>
-            <a:endParaRPr lang="en-US" altLang="ja-JP" sz="2400" dirty="0"/>
-          </a:p>
-        </p:txBody>
-      </p:sp>
-      <p:sp>
-        <p:nvSpPr>
-          <p:cNvPr id="7" name="テキスト ボックス 6">
-            <a:extLst>
-              <a:ext uri="{FF2B5EF4-FFF2-40B4-BE49-F238E27FC236}">
-                <a16:creationId xmlns:a16="http://schemas.microsoft.com/office/drawing/2014/main" id="{9F53DD6C-E45D-4399-9D63-AE50E346FE78}"/>
-              </a:ext>
-            </a:extLst>
-          </p:cNvPr>
-          <p:cNvSpPr txBox="1"/>
-          <p:nvPr/>
-        </p:nvSpPr>
-        <p:spPr>
-          <a:xfrm>
-            <a:off x="567541" y="6227233"/>
-            <a:ext cx="5109091" cy="461665"/>
-          </a:xfrm>
-          <a:prstGeom prst="rect">
-            <a:avLst/>
-          </a:prstGeom>
-          <a:noFill/>
-        </p:spPr>
-        <p:txBody>
-          <a:bodyPr wrap="none" rtlCol="0">
-            <a:spAutoFit/>
-          </a:bodyPr>
-          <a:lstStyle/>
-          <a:p>
-            <a:r>
-              <a:rPr lang="ja-JP" altLang="en-US" sz="2400" dirty="0"/>
-              <a:t>実行して弾丸を敵に当てましょう。</a:t>
+              <a:t>しましょう。</a:t>
             </a:r>
             <a:endParaRPr lang="en-US" altLang="ja-JP" sz="2400" dirty="0"/>
           </a:p>
@@ -5783,10 +5773,10 @@
       </p:sp>
       <p:pic>
         <p:nvPicPr>
-          <p:cNvPr id="3" name="図 2">
-            <a:extLst>
-              <a:ext uri="{FF2B5EF4-FFF2-40B4-BE49-F238E27FC236}">
-                <a16:creationId xmlns:a16="http://schemas.microsoft.com/office/drawing/2014/main" id="{3F6306C5-22A4-45C2-8435-BDF184C1D2F2}"/>
+          <p:cNvPr id="9" name="図 8">
+            <a:extLst>
+              <a:ext uri="{FF2B5EF4-FFF2-40B4-BE49-F238E27FC236}">
+                <a16:creationId xmlns:a16="http://schemas.microsoft.com/office/drawing/2014/main" id="{699FAD0D-C5D3-4A77-AEEE-0287E9C58E3C}"/>
               </a:ext>
             </a:extLst>
           </p:cNvPr>
@@ -5803,50 +5793,20 @@
         </p:blipFill>
         <p:spPr>
           <a:xfrm>
-            <a:off x="6651535" y="2556458"/>
-            <a:ext cx="3899790" cy="4135403"/>
+            <a:off x="677772" y="2041208"/>
+            <a:ext cx="8889725" cy="3753439"/>
           </a:xfrm>
           <a:prstGeom prst="rect">
             <a:avLst/>
           </a:prstGeom>
         </p:spPr>
       </p:pic>
-      <p:pic>
-        <p:nvPicPr>
-          <p:cNvPr id="8" name="図 7">
-            <a:extLst>
-              <a:ext uri="{FF2B5EF4-FFF2-40B4-BE49-F238E27FC236}">
-                <a16:creationId xmlns:a16="http://schemas.microsoft.com/office/drawing/2014/main" id="{5AFAE87B-7EE8-4250-A71A-8CE1597C9017}"/>
-              </a:ext>
-            </a:extLst>
-          </p:cNvPr>
-          <p:cNvPicPr>
-            <a:picLocks noChangeAspect="1"/>
-          </p:cNvPicPr>
-          <p:nvPr/>
-        </p:nvPicPr>
-        <p:blipFill>
-          <a:blip r:embed="rId3"/>
-          <a:stretch>
-            <a:fillRect/>
-          </a:stretch>
-        </p:blipFill>
-        <p:spPr>
-          <a:xfrm>
-            <a:off x="567541" y="2556458"/>
-            <a:ext cx="4267796" cy="2953162"/>
-          </a:xfrm>
-          <a:prstGeom prst="rect">
-            <a:avLst/>
-          </a:prstGeom>
-        </p:spPr>
-      </p:pic>
-      <p:sp>
-        <p:nvSpPr>
-          <p:cNvPr id="9" name="矢印: 右 8">
-            <a:extLst>
-              <a:ext uri="{FF2B5EF4-FFF2-40B4-BE49-F238E27FC236}">
-                <a16:creationId xmlns:a16="http://schemas.microsoft.com/office/drawing/2014/main" id="{F242E171-8846-4777-8B83-DB37EF3B09E6}"/>
+      <p:sp>
+        <p:nvSpPr>
+          <p:cNvPr id="10" name="正方形/長方形 9">
+            <a:extLst>
+              <a:ext uri="{FF2B5EF4-FFF2-40B4-BE49-F238E27FC236}">
+                <a16:creationId xmlns:a16="http://schemas.microsoft.com/office/drawing/2014/main" id="{D33D4275-CBF3-416A-90D5-088B1FFF34C8}"/>
               </a:ext>
             </a:extLst>
           </p:cNvPr>
@@ -5855,18 +5815,16 @@
         </p:nvSpPr>
         <p:spPr>
           <a:xfrm>
-            <a:off x="4899805" y="3705025"/>
-            <a:ext cx="1687262" cy="524934"/>
-          </a:xfrm>
-          <a:prstGeom prst="rightArrow">
-            <a:avLst/>
-          </a:prstGeom>
-          <a:solidFill>
-            <a:srgbClr val="FF0000"/>
-          </a:solidFill>
-          <a:ln>
+            <a:off x="2269367" y="4673601"/>
+            <a:ext cx="2853267" cy="584200"/>
+          </a:xfrm>
+          <a:prstGeom prst="rect">
+            <a:avLst/>
+          </a:prstGeom>
+          <a:noFill/>
+          <a:ln w="38100">
             <a:solidFill>
-              <a:schemeClr val="tx1"/>
+              <a:srgbClr val="FF0000"/>
             </a:solidFill>
           </a:ln>
         </p:spPr>
@@ -5895,196 +5853,10 @@
           </a:p>
         </p:txBody>
       </p:sp>
-      <p:sp>
-        <p:nvSpPr>
-          <p:cNvPr id="10" name="正方形/長方形 9">
-            <a:extLst>
-              <a:ext uri="{FF2B5EF4-FFF2-40B4-BE49-F238E27FC236}">
-                <a16:creationId xmlns:a16="http://schemas.microsoft.com/office/drawing/2014/main" id="{66B23E0C-430A-4EBB-801E-0BA43010D31B}"/>
-              </a:ext>
-            </a:extLst>
-          </p:cNvPr>
-          <p:cNvSpPr/>
-          <p:nvPr/>
-        </p:nvSpPr>
-        <p:spPr>
-          <a:xfrm>
-            <a:off x="6651536" y="5985933"/>
-            <a:ext cx="3899790" cy="482600"/>
-          </a:xfrm>
-          <a:prstGeom prst="rect">
-            <a:avLst/>
-          </a:prstGeom>
-          <a:noFill/>
-          <a:ln w="38100">
-            <a:solidFill>
-              <a:srgbClr val="FF0000"/>
-            </a:solidFill>
-          </a:ln>
-        </p:spPr>
-        <p:style>
-          <a:lnRef idx="2">
-            <a:schemeClr val="accent1">
-              <a:shade val="50000"/>
-            </a:schemeClr>
-          </a:lnRef>
-          <a:fillRef idx="1">
-            <a:schemeClr val="accent1"/>
-          </a:fillRef>
-          <a:effectRef idx="0">
-            <a:schemeClr val="accent1"/>
-          </a:effectRef>
-          <a:fontRef idx="minor">
-            <a:schemeClr val="lt1"/>
-          </a:fontRef>
-        </p:style>
-        <p:txBody>
-          <a:bodyPr rtlCol="0" anchor="ctr"/>
-          <a:lstStyle/>
-          <a:p>
-            <a:pPr algn="ctr"/>
-            <a:endParaRPr kumimoji="1" lang="ja-JP" altLang="en-US"/>
-          </a:p>
-        </p:txBody>
-      </p:sp>
-      <p:sp>
-        <p:nvSpPr>
-          <p:cNvPr id="11" name="テキスト ボックス 10">
-            <a:extLst>
-              <a:ext uri="{FF2B5EF4-FFF2-40B4-BE49-F238E27FC236}">
-                <a16:creationId xmlns:a16="http://schemas.microsoft.com/office/drawing/2014/main" id="{C61A9F67-1248-4CA0-96C2-49D12C70A21B}"/>
-              </a:ext>
-            </a:extLst>
-          </p:cNvPr>
-          <p:cNvSpPr txBox="1"/>
-          <p:nvPr/>
-        </p:nvSpPr>
-        <p:spPr>
-          <a:xfrm>
-            <a:off x="3011076" y="4778295"/>
-            <a:ext cx="2900153" cy="338554"/>
-          </a:xfrm>
-          <a:prstGeom prst="rect">
-            <a:avLst/>
-          </a:prstGeom>
-          <a:solidFill>
-            <a:schemeClr val="bg1"/>
-          </a:solidFill>
-          <a:ln>
-            <a:solidFill>
-              <a:schemeClr val="tx1"/>
-            </a:solidFill>
-          </a:ln>
-        </p:spPr>
-        <p:txBody>
-          <a:bodyPr wrap="none" rtlCol="0">
-            <a:spAutoFit/>
-          </a:bodyPr>
-          <a:lstStyle/>
-          <a:p>
-            <a:r>
-              <a:rPr lang="en-US" altLang="ja-JP" sz="1600" b="1" dirty="0" err="1">
-                <a:solidFill>
-                  <a:srgbClr val="FF0000"/>
-                </a:solidFill>
-              </a:rPr>
-              <a:t>BP_MagicianBullet</a:t>
-            </a:r>
-            <a:r>
-              <a:rPr lang="ja-JP" altLang="en-US" sz="1600" b="1" dirty="0">
-                <a:solidFill>
-                  <a:srgbClr val="FF0000"/>
-                </a:solidFill>
-              </a:rPr>
-              <a:t>を開いて</a:t>
-            </a:r>
-            <a:endParaRPr lang="en-US" altLang="ja-JP" sz="1600" b="1" dirty="0">
-              <a:solidFill>
-                <a:srgbClr val="FF0000"/>
-              </a:solidFill>
-            </a:endParaRPr>
-          </a:p>
-        </p:txBody>
-      </p:sp>
-      <p:sp>
-        <p:nvSpPr>
-          <p:cNvPr id="12" name="テキスト ボックス 11">
-            <a:extLst>
-              <a:ext uri="{FF2B5EF4-FFF2-40B4-BE49-F238E27FC236}">
-                <a16:creationId xmlns:a16="http://schemas.microsoft.com/office/drawing/2014/main" id="{16893B75-38A5-46A2-AE59-4FCE920452EA}"/>
-              </a:ext>
-            </a:extLst>
-          </p:cNvPr>
-          <p:cNvSpPr txBox="1"/>
-          <p:nvPr/>
-        </p:nvSpPr>
-        <p:spPr>
-          <a:xfrm>
-            <a:off x="6651534" y="5593328"/>
-            <a:ext cx="3156633" cy="338554"/>
-          </a:xfrm>
-          <a:prstGeom prst="rect">
-            <a:avLst/>
-          </a:prstGeom>
-          <a:solidFill>
-            <a:schemeClr val="bg1"/>
-          </a:solidFill>
-          <a:ln>
-            <a:solidFill>
-              <a:schemeClr val="tx1"/>
-            </a:solidFill>
-          </a:ln>
-        </p:spPr>
-        <p:txBody>
-          <a:bodyPr wrap="none" rtlCol="0">
-            <a:spAutoFit/>
-          </a:bodyPr>
-          <a:lstStyle/>
-          <a:p>
-            <a:r>
-              <a:rPr lang="en-US" altLang="ja-JP" sz="1600" b="1" dirty="0">
-                <a:solidFill>
-                  <a:srgbClr val="FF0000"/>
-                </a:solidFill>
-              </a:rPr>
-              <a:t>M Hit Effect</a:t>
-            </a:r>
-            <a:r>
-              <a:rPr lang="ja-JP" altLang="en-US" sz="1600" b="1" dirty="0">
-                <a:solidFill>
-                  <a:srgbClr val="FF0000"/>
-                </a:solidFill>
-              </a:rPr>
-              <a:t>を「</a:t>
-            </a:r>
-            <a:r>
-              <a:rPr lang="en-US" altLang="ja-JP" sz="1600" b="1" dirty="0">
-                <a:solidFill>
-                  <a:srgbClr val="FF0000"/>
-                </a:solidFill>
-              </a:rPr>
-              <a:t>Hit00</a:t>
-            </a:r>
-            <a:r>
-              <a:rPr lang="ja-JP" altLang="en-US" sz="1600" b="1" dirty="0">
-                <a:solidFill>
-                  <a:srgbClr val="FF0000"/>
-                </a:solidFill>
-              </a:rPr>
-              <a:t>」に設定</a:t>
-            </a:r>
-            <a:endParaRPr lang="en-US" altLang="ja-JP" sz="1600" b="1" dirty="0">
-              <a:solidFill>
-                <a:srgbClr val="FF0000"/>
-              </a:solidFill>
-            </a:endParaRPr>
-          </a:p>
-        </p:txBody>
-      </p:sp>
     </p:spTree>
     <p:extLst>
       <p:ext uri="{BB962C8B-B14F-4D97-AF65-F5344CB8AC3E}">
-        <p14:creationId xmlns:p14="http://schemas.microsoft.com/office/powerpoint/2010/main" val="424298462"/>
+        <p14:creationId xmlns:p14="http://schemas.microsoft.com/office/powerpoint/2010/main" val="1312901314"/>
       </p:ext>
     </p:extLst>
   </p:cSld>
@@ -6162,7 +5934,7 @@
         <p:spPr>
           <a:xfrm>
             <a:off x="567542" y="1216429"/>
-            <a:ext cx="7571303" cy="830997"/>
+            <a:ext cx="9110186" cy="830997"/>
           </a:xfrm>
           <a:prstGeom prst="rect">
             <a:avLst/>
@@ -6175,17 +5947,29 @@
           </a:bodyPr>
           <a:lstStyle/>
           <a:p>
+            <a:r>
+              <a:rPr lang="en-US" altLang="ja-JP" sz="2400" b="1" dirty="0">
+                <a:solidFill>
+                  <a:srgbClr val="FF0000"/>
+                </a:solidFill>
+              </a:rPr>
+              <a:t>C++</a:t>
+            </a:r>
             <a:r>
               <a:rPr lang="ja-JP" altLang="en-US" sz="2400" b="1" dirty="0">
                 <a:solidFill>
                   <a:srgbClr val="FF0000"/>
                 </a:solidFill>
               </a:rPr>
-              <a:t>ヒットストップ</a:t>
-            </a:r>
-            <a:r>
-              <a:rPr lang="ja-JP" altLang="en-US" sz="2400" dirty="0"/>
-              <a:t>を設定して、</a:t>
+              <a:t>を書いたら</a:t>
+            </a:r>
+            <a:r>
+              <a:rPr lang="en-US" altLang="ja-JP" sz="2400" b="1" dirty="0">
+                <a:solidFill>
+                  <a:srgbClr val="FF0000"/>
+                </a:solidFill>
+              </a:rPr>
+              <a:t>Unreal Engine</a:t>
             </a:r>
             <a:r>
               <a:rPr lang="ja-JP" altLang="en-US" sz="2400" b="1" dirty="0">
@@ -6193,7 +5977,7 @@
                   <a:srgbClr val="FF0000"/>
                 </a:solidFill>
               </a:rPr>
-              <a:t>当たった感を強めます。</a:t>
+              <a:t>側に教えなければいけません。</a:t>
             </a:r>
             <a:endParaRPr lang="en-US" altLang="ja-JP" sz="2400" b="1" dirty="0">
               <a:solidFill>
@@ -6204,7 +5988,19 @@
           <a:p>
             <a:r>
               <a:rPr lang="ja-JP" altLang="en-US" sz="2400" dirty="0"/>
-              <a:t>スマブラにも使われている、有名な演出です。</a:t>
+              <a:t>右下に</a:t>
+            </a:r>
+            <a:r>
+              <a:rPr lang="ja-JP" altLang="en-US" sz="2400" b="1" dirty="0">
+                <a:solidFill>
+                  <a:srgbClr val="FF0000"/>
+                </a:solidFill>
+              </a:rPr>
+              <a:t>コンパイルボタン</a:t>
+            </a:r>
+            <a:r>
+              <a:rPr lang="ja-JP" altLang="en-US" sz="2400" dirty="0"/>
+              <a:t>があるので、押してみましょう。</a:t>
             </a:r>
             <a:endParaRPr lang="en-US" altLang="ja-JP" sz="2400" dirty="0"/>
           </a:p>
@@ -6212,10 +6008,10 @@
       </p:sp>
       <p:sp>
         <p:nvSpPr>
-          <p:cNvPr id="7" name="テキスト ボックス 6">
-            <a:extLst>
-              <a:ext uri="{FF2B5EF4-FFF2-40B4-BE49-F238E27FC236}">
-                <a16:creationId xmlns:a16="http://schemas.microsoft.com/office/drawing/2014/main" id="{9F53DD6C-E45D-4399-9D63-AE50E346FE78}"/>
+          <p:cNvPr id="5" name="テキスト ボックス 4">
+            <a:extLst>
+              <a:ext uri="{FF2B5EF4-FFF2-40B4-BE49-F238E27FC236}">
+                <a16:creationId xmlns:a16="http://schemas.microsoft.com/office/drawing/2014/main" id="{A6EAFAF2-BDAD-46C4-BE93-C91CB15D7D27}"/>
               </a:ext>
             </a:extLst>
           </p:cNvPr>
@@ -6224,8 +6020,8 @@
         </p:nvSpPr>
         <p:spPr>
           <a:xfrm>
-            <a:off x="567541" y="5763029"/>
-            <a:ext cx="5109091" cy="461665"/>
+            <a:off x="567542" y="5788429"/>
+            <a:ext cx="6647974" cy="461665"/>
           </a:xfrm>
           <a:prstGeom prst="rect">
             <a:avLst/>
@@ -6240,7 +6036,19 @@
           <a:p>
             <a:r>
               <a:rPr lang="ja-JP" altLang="en-US" sz="2400" dirty="0"/>
-              <a:t>実行して弾丸を敵に当てましょう。</a:t>
+              <a:t>実行して</a:t>
+            </a:r>
+            <a:r>
+              <a:rPr lang="ja-JP" altLang="en-US" sz="2400" b="1" dirty="0">
+                <a:solidFill>
+                  <a:srgbClr val="FF9900"/>
+                </a:solidFill>
+              </a:rPr>
+              <a:t>コイン</a:t>
+            </a:r>
+            <a:r>
+              <a:rPr lang="ja-JP" altLang="en-US" sz="2400" dirty="0"/>
+              <a:t>がとれるか確認しましょう！！</a:t>
             </a:r>
             <a:endParaRPr lang="en-US" altLang="ja-JP" sz="2400" dirty="0"/>
           </a:p>
@@ -6248,10 +6056,10 @@
       </p:sp>
       <p:pic>
         <p:nvPicPr>
-          <p:cNvPr id="8" name="図 7">
-            <a:extLst>
-              <a:ext uri="{FF2B5EF4-FFF2-40B4-BE49-F238E27FC236}">
-                <a16:creationId xmlns:a16="http://schemas.microsoft.com/office/drawing/2014/main" id="{FE193B84-74E3-4EF1-8465-B0276F5468A8}"/>
+          <p:cNvPr id="3" name="図 2">
+            <a:extLst>
+              <a:ext uri="{FF2B5EF4-FFF2-40B4-BE49-F238E27FC236}">
+                <a16:creationId xmlns:a16="http://schemas.microsoft.com/office/drawing/2014/main" id="{581A2539-54AE-4AD7-BDA7-8E88FD5A927A}"/>
               </a:ext>
             </a:extLst>
           </p:cNvPr>
@@ -6268,8 +6076,8 @@
         </p:blipFill>
         <p:spPr>
           <a:xfrm>
-            <a:off x="7070874" y="2271462"/>
-            <a:ext cx="4553585" cy="2343477"/>
+            <a:off x="567542" y="2187126"/>
+            <a:ext cx="9963876" cy="1241874"/>
           </a:xfrm>
           <a:prstGeom prst="rect">
             <a:avLst/>
@@ -6278,10 +6086,10 @@
       </p:pic>
       <p:sp>
         <p:nvSpPr>
-          <p:cNvPr id="9" name="矢印: 右 8">
-            <a:extLst>
-              <a:ext uri="{FF2B5EF4-FFF2-40B4-BE49-F238E27FC236}">
-                <a16:creationId xmlns:a16="http://schemas.microsoft.com/office/drawing/2014/main" id="{F87F0251-0093-4B90-BE2A-327BEA5F621F}"/>
+          <p:cNvPr id="7" name="矢印: 右 6">
+            <a:extLst>
+              <a:ext uri="{FF2B5EF4-FFF2-40B4-BE49-F238E27FC236}">
+                <a16:creationId xmlns:a16="http://schemas.microsoft.com/office/drawing/2014/main" id="{C11E9EE3-3A66-46DD-9D3B-1C9FD3D3AA66}"/>
               </a:ext>
             </a:extLst>
           </p:cNvPr>
@@ -6289,8 +6097,8 @@
           <p:nvPr/>
         </p:nvSpPr>
         <p:spPr>
-          <a:xfrm>
-            <a:off x="6179140" y="3380293"/>
+          <a:xfrm rot="18234661">
+            <a:off x="4409161" y="3408691"/>
             <a:ext cx="776827" cy="524934"/>
           </a:xfrm>
           <a:prstGeom prst="rightArrow">
@@ -6330,210 +6138,10 @@
           </a:p>
         </p:txBody>
       </p:sp>
-      <p:sp>
-        <p:nvSpPr>
-          <p:cNvPr id="11" name="テキスト ボックス 10">
-            <a:extLst>
-              <a:ext uri="{FF2B5EF4-FFF2-40B4-BE49-F238E27FC236}">
-                <a16:creationId xmlns:a16="http://schemas.microsoft.com/office/drawing/2014/main" id="{F5F2B2F6-BE52-4257-A7E6-F948EB626E67}"/>
-              </a:ext>
-            </a:extLst>
-          </p:cNvPr>
-          <p:cNvSpPr txBox="1"/>
-          <p:nvPr/>
-        </p:nvSpPr>
-        <p:spPr>
-          <a:xfrm>
-            <a:off x="7174184" y="3735950"/>
-            <a:ext cx="2432076" cy="338554"/>
-          </a:xfrm>
-          <a:prstGeom prst="rect">
-            <a:avLst/>
-          </a:prstGeom>
-          <a:solidFill>
-            <a:schemeClr val="bg1"/>
-          </a:solidFill>
-          <a:ln>
-            <a:solidFill>
-              <a:schemeClr val="tx1"/>
-            </a:solidFill>
-          </a:ln>
-        </p:spPr>
-        <p:txBody>
-          <a:bodyPr wrap="none" rtlCol="0">
-            <a:spAutoFit/>
-          </a:bodyPr>
-          <a:lstStyle/>
-          <a:p>
-            <a:r>
-              <a:rPr lang="en-US" altLang="ja-JP" sz="1600" b="1" dirty="0">
-                <a:solidFill>
-                  <a:srgbClr val="FF0000"/>
-                </a:solidFill>
-              </a:rPr>
-              <a:t>M Hit Stop Time</a:t>
-            </a:r>
-            <a:r>
-              <a:rPr lang="ja-JP" altLang="en-US" sz="1600" b="1" dirty="0">
-                <a:solidFill>
-                  <a:srgbClr val="FF0000"/>
-                </a:solidFill>
-              </a:rPr>
-              <a:t>を設定</a:t>
-            </a:r>
-            <a:endParaRPr lang="en-US" altLang="ja-JP" sz="1600" b="1" dirty="0">
-              <a:solidFill>
-                <a:srgbClr val="FF0000"/>
-              </a:solidFill>
-            </a:endParaRPr>
-          </a:p>
-        </p:txBody>
-      </p:sp>
-      <p:sp>
-        <p:nvSpPr>
-          <p:cNvPr id="12" name="正方形/長方形 11">
-            <a:extLst>
-              <a:ext uri="{FF2B5EF4-FFF2-40B4-BE49-F238E27FC236}">
-                <a16:creationId xmlns:a16="http://schemas.microsoft.com/office/drawing/2014/main" id="{DEE2F801-B6E9-4709-8B5B-F027E1811B6F}"/>
-              </a:ext>
-            </a:extLst>
-          </p:cNvPr>
-          <p:cNvSpPr/>
-          <p:nvPr/>
-        </p:nvSpPr>
-        <p:spPr>
-          <a:xfrm>
-            <a:off x="7174184" y="4132339"/>
-            <a:ext cx="3899790" cy="261861"/>
-          </a:xfrm>
-          <a:prstGeom prst="rect">
-            <a:avLst/>
-          </a:prstGeom>
-          <a:noFill/>
-          <a:ln w="38100">
-            <a:solidFill>
-              <a:srgbClr val="FF0000"/>
-            </a:solidFill>
-          </a:ln>
-        </p:spPr>
-        <p:style>
-          <a:lnRef idx="2">
-            <a:schemeClr val="accent1">
-              <a:shade val="50000"/>
-            </a:schemeClr>
-          </a:lnRef>
-          <a:fillRef idx="1">
-            <a:schemeClr val="accent1"/>
-          </a:fillRef>
-          <a:effectRef idx="0">
-            <a:schemeClr val="accent1"/>
-          </a:effectRef>
-          <a:fontRef idx="minor">
-            <a:schemeClr val="lt1"/>
-          </a:fontRef>
-        </p:style>
-        <p:txBody>
-          <a:bodyPr rtlCol="0" anchor="ctr"/>
-          <a:lstStyle/>
-          <a:p>
-            <a:pPr algn="ctr"/>
-            <a:endParaRPr kumimoji="1" lang="ja-JP" altLang="en-US"/>
-          </a:p>
-        </p:txBody>
-      </p:sp>
-      <p:pic>
-        <p:nvPicPr>
-          <p:cNvPr id="5" name="図 4">
-            <a:extLst>
-              <a:ext uri="{FF2B5EF4-FFF2-40B4-BE49-F238E27FC236}">
-                <a16:creationId xmlns:a16="http://schemas.microsoft.com/office/drawing/2014/main" id="{A78DC1DF-E98C-4CC1-8D80-49FE8976185A}"/>
-              </a:ext>
-            </a:extLst>
-          </p:cNvPr>
-          <p:cNvPicPr>
-            <a:picLocks noChangeAspect="1"/>
-          </p:cNvPicPr>
-          <p:nvPr/>
-        </p:nvPicPr>
-        <p:blipFill>
-          <a:blip r:embed="rId3"/>
-          <a:stretch>
-            <a:fillRect/>
-          </a:stretch>
-        </p:blipFill>
-        <p:spPr>
-          <a:xfrm>
-            <a:off x="567541" y="2187126"/>
-            <a:ext cx="5144218" cy="3400900"/>
-          </a:xfrm>
-          <a:prstGeom prst="rect">
-            <a:avLst/>
-          </a:prstGeom>
-        </p:spPr>
-      </p:pic>
-      <p:sp>
-        <p:nvSpPr>
-          <p:cNvPr id="13" name="テキスト ボックス 12">
-            <a:extLst>
-              <a:ext uri="{FF2B5EF4-FFF2-40B4-BE49-F238E27FC236}">
-                <a16:creationId xmlns:a16="http://schemas.microsoft.com/office/drawing/2014/main" id="{DC255C99-D8B2-447B-9EAF-617CFE6C3010}"/>
-              </a:ext>
-            </a:extLst>
-          </p:cNvPr>
-          <p:cNvSpPr txBox="1"/>
-          <p:nvPr/>
-        </p:nvSpPr>
-        <p:spPr>
-          <a:xfrm>
-            <a:off x="4132162" y="4472021"/>
-            <a:ext cx="2630848" cy="338554"/>
-          </a:xfrm>
-          <a:prstGeom prst="rect">
-            <a:avLst/>
-          </a:prstGeom>
-          <a:solidFill>
-            <a:schemeClr val="bg1"/>
-          </a:solidFill>
-          <a:ln>
-            <a:solidFill>
-              <a:schemeClr val="tx1"/>
-            </a:solidFill>
-          </a:ln>
-        </p:spPr>
-        <p:txBody>
-          <a:bodyPr wrap="none" rtlCol="0">
-            <a:spAutoFit/>
-          </a:bodyPr>
-          <a:lstStyle/>
-          <a:p>
-            <a:r>
-              <a:rPr lang="en-US" altLang="ja-JP" sz="1600" b="1" dirty="0" err="1">
-                <a:solidFill>
-                  <a:srgbClr val="FF0000"/>
-                </a:solidFill>
-              </a:rPr>
-              <a:t>BP_EnemyMush</a:t>
-            </a:r>
-            <a:r>
-              <a:rPr lang="ja-JP" altLang="en-US" sz="1600" b="1" dirty="0">
-                <a:solidFill>
-                  <a:srgbClr val="FF0000"/>
-                </a:solidFill>
-              </a:rPr>
-              <a:t>を開いて</a:t>
-            </a:r>
-            <a:endParaRPr lang="en-US" altLang="ja-JP" sz="1600" b="1" dirty="0">
-              <a:solidFill>
-                <a:srgbClr val="FF0000"/>
-              </a:solidFill>
-            </a:endParaRPr>
-          </a:p>
-        </p:txBody>
-      </p:sp>
     </p:spTree>
     <p:extLst>
       <p:ext uri="{BB962C8B-B14F-4D97-AF65-F5344CB8AC3E}">
-        <p14:creationId xmlns:p14="http://schemas.microsoft.com/office/powerpoint/2010/main" val="3580522964"/>
+        <p14:creationId xmlns:p14="http://schemas.microsoft.com/office/powerpoint/2010/main" val="1251649344"/>
       </p:ext>
     </p:extLst>
   </p:cSld>
@@ -6611,7 +6219,7 @@
         <p:spPr>
           <a:xfrm>
             <a:off x="567542" y="1216429"/>
-            <a:ext cx="6340197" cy="461665"/>
+            <a:ext cx="9110186" cy="1200329"/>
           </a:xfrm>
           <a:prstGeom prst="rect">
             <a:avLst/>
@@ -6626,7 +6234,7 @@
           <a:p>
             <a:r>
               <a:rPr lang="ja-JP" altLang="en-US" sz="2400" dirty="0"/>
-              <a:t>敵がやられたら</a:t>
+              <a:t>ステージを進めていくと、</a:t>
             </a:r>
             <a:r>
               <a:rPr lang="ja-JP" altLang="en-US" sz="2400" b="1" dirty="0">
@@ -6634,58 +6242,18 @@
                   <a:srgbClr val="FF0000"/>
                 </a:solidFill>
               </a:rPr>
-              <a:t>吹っ飛ぶ</a:t>
+              <a:t>敵</a:t>
             </a:r>
             <a:r>
               <a:rPr lang="ja-JP" altLang="en-US" sz="2400" dirty="0"/>
-              <a:t>ようにしましょう。</a:t>
+              <a:t>が出現します。</a:t>
             </a:r>
             <a:endParaRPr lang="en-US" altLang="ja-JP" sz="2400" dirty="0"/>
           </a:p>
-        </p:txBody>
-      </p:sp>
-      <p:sp>
-        <p:nvSpPr>
-          <p:cNvPr id="7" name="テキスト ボックス 6">
-            <a:extLst>
-              <a:ext uri="{FF2B5EF4-FFF2-40B4-BE49-F238E27FC236}">
-                <a16:creationId xmlns:a16="http://schemas.microsoft.com/office/drawing/2014/main" id="{9F53DD6C-E45D-4399-9D63-AE50E346FE78}"/>
-              </a:ext>
-            </a:extLst>
-          </p:cNvPr>
-          <p:cNvSpPr txBox="1"/>
-          <p:nvPr/>
-        </p:nvSpPr>
-        <p:spPr>
-          <a:xfrm>
-            <a:off x="567542" y="5535049"/>
-            <a:ext cx="9765815" cy="830997"/>
-          </a:xfrm>
-          <a:prstGeom prst="rect">
-            <a:avLst/>
-          </a:prstGeom>
-          <a:noFill/>
-        </p:spPr>
-        <p:txBody>
-          <a:bodyPr wrap="none" rtlCol="0">
-            <a:spAutoFit/>
-          </a:bodyPr>
-          <a:lstStyle/>
           <a:p>
             <a:r>
               <a:rPr lang="ja-JP" altLang="en-US" sz="2400" dirty="0"/>
-              <a:t>書いたら動作確認をしましょう。</a:t>
-            </a:r>
-            <a:endParaRPr lang="en-US" altLang="ja-JP" sz="2400" dirty="0"/>
-          </a:p>
-          <a:p>
-            <a:r>
-              <a:rPr lang="en-US" altLang="ja-JP" sz="2400" dirty="0"/>
-              <a:t>C++</a:t>
-            </a:r>
-            <a:r>
-              <a:rPr lang="ja-JP" altLang="en-US" sz="2400" dirty="0"/>
-              <a:t>を書いたので、</a:t>
+              <a:t>敵をやっつけるために、</a:t>
             </a:r>
             <a:r>
               <a:rPr lang="ja-JP" altLang="en-US" sz="2400" b="1" dirty="0">
@@ -6693,11 +6261,42 @@
                   <a:srgbClr val="FF0000"/>
                 </a:solidFill>
               </a:rPr>
-              <a:t>保存、コンパイルを忘れないように</a:t>
+              <a:t>攻撃</a:t>
             </a:r>
             <a:r>
               <a:rPr lang="ja-JP" altLang="en-US" sz="2400" dirty="0"/>
-              <a:t>しましょう。</a:t>
+              <a:t>をプログラムで実装していきます。</a:t>
+            </a:r>
+            <a:endParaRPr lang="en-US" altLang="ja-JP" sz="2400" b="1" dirty="0">
+              <a:solidFill>
+                <a:srgbClr val="7030A0"/>
+              </a:solidFill>
+            </a:endParaRPr>
+          </a:p>
+          <a:p>
+            <a:r>
+              <a:rPr lang="en-US" altLang="ja-JP" sz="2400" b="1" dirty="0">
+                <a:solidFill>
+                  <a:srgbClr val="7030A0"/>
+                </a:solidFill>
+              </a:rPr>
+              <a:t>Visual Studio</a:t>
+            </a:r>
+            <a:r>
+              <a:rPr lang="ja-JP" altLang="en-US" sz="2400" dirty="0"/>
+              <a:t>の</a:t>
+            </a:r>
+            <a:r>
+              <a:rPr lang="en-US" altLang="ja-JP" sz="2400" b="1" dirty="0">
+                <a:solidFill>
+                  <a:srgbClr val="FF0000"/>
+                </a:solidFill>
+              </a:rPr>
+              <a:t>Magician.cpp</a:t>
+            </a:r>
+            <a:r>
+              <a:rPr lang="ja-JP" altLang="en-US" sz="2400" dirty="0"/>
+              <a:t>を開きましょう。</a:t>
             </a:r>
             <a:endParaRPr lang="en-US" altLang="ja-JP" sz="2400" dirty="0"/>
           </a:p>
@@ -6705,10 +6304,10 @@
       </p:sp>
       <p:pic>
         <p:nvPicPr>
-          <p:cNvPr id="3" name="図 2">
-            <a:extLst>
-              <a:ext uri="{FF2B5EF4-FFF2-40B4-BE49-F238E27FC236}">
-                <a16:creationId xmlns:a16="http://schemas.microsoft.com/office/drawing/2014/main" id="{B6C5D076-24F0-45A8-8C2F-9AC36311B0EB}"/>
+          <p:cNvPr id="5" name="図 4">
+            <a:extLst>
+              <a:ext uri="{FF2B5EF4-FFF2-40B4-BE49-F238E27FC236}">
+                <a16:creationId xmlns:a16="http://schemas.microsoft.com/office/drawing/2014/main" id="{109E0E40-E0D0-44E4-B9C4-805B7A18A6FA}"/>
               </a:ext>
             </a:extLst>
           </p:cNvPr>
@@ -6725,20 +6324,50 @@
         </p:blipFill>
         <p:spPr>
           <a:xfrm>
-            <a:off x="567542" y="1748009"/>
-            <a:ext cx="7907591" cy="3717125"/>
+            <a:off x="4483642" y="2556458"/>
+            <a:ext cx="6716062" cy="2362530"/>
           </a:xfrm>
           <a:prstGeom prst="rect">
             <a:avLst/>
           </a:prstGeom>
         </p:spPr>
       </p:pic>
-      <p:sp>
-        <p:nvSpPr>
-          <p:cNvPr id="8" name="正方形/長方形 7">
-            <a:extLst>
-              <a:ext uri="{FF2B5EF4-FFF2-40B4-BE49-F238E27FC236}">
-                <a16:creationId xmlns:a16="http://schemas.microsoft.com/office/drawing/2014/main" id="{18853624-D3FF-4CBF-981D-F1F0115CA137}"/>
+      <p:pic>
+        <p:nvPicPr>
+          <p:cNvPr id="10" name="図 9">
+            <a:extLst>
+              <a:ext uri="{FF2B5EF4-FFF2-40B4-BE49-F238E27FC236}">
+                <a16:creationId xmlns:a16="http://schemas.microsoft.com/office/drawing/2014/main" id="{AB7082BE-B78F-4B9B-BC6F-05BEC8A311FA}"/>
+              </a:ext>
+            </a:extLst>
+          </p:cNvPr>
+          <p:cNvPicPr>
+            <a:picLocks noChangeAspect="1"/>
+          </p:cNvPicPr>
+          <p:nvPr/>
+        </p:nvPicPr>
+        <p:blipFill>
+          <a:blip r:embed="rId3"/>
+          <a:stretch>
+            <a:fillRect/>
+          </a:stretch>
+        </p:blipFill>
+        <p:spPr>
+          <a:xfrm>
+            <a:off x="678048" y="2493108"/>
+            <a:ext cx="2871976" cy="4150666"/>
+          </a:xfrm>
+          <a:prstGeom prst="rect">
+            <a:avLst/>
+          </a:prstGeom>
+        </p:spPr>
+      </p:pic>
+      <p:sp>
+        <p:nvSpPr>
+          <p:cNvPr id="11" name="矢印: 右 10">
+            <a:extLst>
+              <a:ext uri="{FF2B5EF4-FFF2-40B4-BE49-F238E27FC236}">
+                <a16:creationId xmlns:a16="http://schemas.microsoft.com/office/drawing/2014/main" id="{6724F54F-5870-4B6C-A3BA-7C0B45F75AE0}"/>
               </a:ext>
             </a:extLst>
           </p:cNvPr>
@@ -6746,17 +6375,19 @@
           <p:nvPr/>
         </p:nvSpPr>
         <p:spPr>
-          <a:xfrm>
-            <a:off x="1524000" y="4360333"/>
-            <a:ext cx="2675468" cy="550334"/>
-          </a:xfrm>
-          <a:prstGeom prst="rect">
-            <a:avLst/>
-          </a:prstGeom>
-          <a:noFill/>
-          <a:ln w="38100">
+          <a:xfrm rot="10800000">
+            <a:off x="3161610" y="6027176"/>
+            <a:ext cx="776827" cy="524934"/>
+          </a:xfrm>
+          <a:prstGeom prst="rightArrow">
+            <a:avLst/>
+          </a:prstGeom>
+          <a:solidFill>
+            <a:srgbClr val="FF0000"/>
+          </a:solidFill>
+          <a:ln>
             <a:solidFill>
-              <a:srgbClr val="FF0000"/>
+              <a:schemeClr val="tx1"/>
             </a:solidFill>
           </a:ln>
         </p:spPr>
@@ -6787,39 +6418,56 @@
       </p:sp>
       <p:sp>
         <p:nvSpPr>
-          <p:cNvPr id="9" name="テキスト ボックス 8">
-            <a:extLst>
-              <a:ext uri="{FF2B5EF4-FFF2-40B4-BE49-F238E27FC236}">
-                <a16:creationId xmlns:a16="http://schemas.microsoft.com/office/drawing/2014/main" id="{A7FA4E2D-F36A-43D0-840B-E22EA7A1261E}"/>
-              </a:ext>
-            </a:extLst>
-          </p:cNvPr>
-          <p:cNvSpPr txBox="1"/>
-          <p:nvPr/>
-        </p:nvSpPr>
-        <p:spPr>
-          <a:xfrm>
-            <a:off x="5898787" y="1748009"/>
-            <a:ext cx="2576346" cy="461665"/>
-          </a:xfrm>
-          <a:prstGeom prst="rect">
-            <a:avLst/>
-          </a:prstGeom>
-          <a:noFill/>
-        </p:spPr>
-        <p:txBody>
-          <a:bodyPr wrap="none" rtlCol="0">
-            <a:spAutoFit/>
-          </a:bodyPr>
-          <a:lstStyle/>
-          <a:p>
-            <a:r>
-              <a:rPr lang="en-US" altLang="ja-JP" sz="2400" b="1" dirty="0">
-                <a:solidFill>
-                  <a:srgbClr val="FF0000"/>
-                </a:solidFill>
-              </a:rPr>
-              <a:t>EnemyBase.cpp</a:t>
+          <p:cNvPr id="12" name="吹き出し: 折線 11">
+            <a:extLst>
+              <a:ext uri="{FF2B5EF4-FFF2-40B4-BE49-F238E27FC236}">
+                <a16:creationId xmlns:a16="http://schemas.microsoft.com/office/drawing/2014/main" id="{9DCA956D-3BB3-44ED-96F1-C4B01748CAD6}"/>
+              </a:ext>
+            </a:extLst>
+          </p:cNvPr>
+          <p:cNvSpPr/>
+          <p:nvPr/>
+        </p:nvSpPr>
+        <p:spPr>
+          <a:xfrm>
+            <a:off x="11199704" y="5280212"/>
+            <a:ext cx="577054" cy="529963"/>
+          </a:xfrm>
+          <a:prstGeom prst="borderCallout2">
+            <a:avLst>
+              <a:gd name="adj1" fmla="val 18750"/>
+              <a:gd name="adj2" fmla="val -8333"/>
+              <a:gd name="adj3" fmla="val -52296"/>
+              <a:gd name="adj4" fmla="val -95898"/>
+              <a:gd name="adj5" fmla="val -224122"/>
+              <a:gd name="adj6" fmla="val -115022"/>
+            </a:avLst>
+          </a:prstGeom>
+        </p:spPr>
+        <p:style>
+          <a:lnRef idx="2">
+            <a:schemeClr val="accent1">
+              <a:shade val="50000"/>
+            </a:schemeClr>
+          </a:lnRef>
+          <a:fillRef idx="1">
+            <a:schemeClr val="accent1"/>
+          </a:fillRef>
+          <a:effectRef idx="0">
+            <a:schemeClr val="accent1"/>
+          </a:effectRef>
+          <a:fontRef idx="minor">
+            <a:schemeClr val="lt1"/>
+          </a:fontRef>
+        </p:style>
+        <p:txBody>
+          <a:bodyPr rtlCol="0" anchor="ctr"/>
+          <a:lstStyle/>
+          <a:p>
+            <a:pPr algn="ctr"/>
+            <a:r>
+              <a:rPr kumimoji="1" lang="ja-JP" altLang="en-US" b="1" dirty="0"/>
+              <a:t>敵</a:t>
             </a:r>
           </a:p>
         </p:txBody>
@@ -6827,7 +6475,7 @@
     </p:spTree>
     <p:extLst>
       <p:ext uri="{BB962C8B-B14F-4D97-AF65-F5344CB8AC3E}">
-        <p14:creationId xmlns:p14="http://schemas.microsoft.com/office/powerpoint/2010/main" val="805065936"/>
+        <p14:creationId xmlns:p14="http://schemas.microsoft.com/office/powerpoint/2010/main" val="1389448925"/>
       </p:ext>
     </p:extLst>
   </p:cSld>
@@ -7139,7 +6787,7 @@
         <p:spPr>
           <a:xfrm>
             <a:off x="567542" y="1216429"/>
-            <a:ext cx="6955750" cy="461665"/>
+            <a:ext cx="5764720" cy="461665"/>
           </a:xfrm>
           <a:prstGeom prst="rect">
             <a:avLst/>
@@ -7153,8 +6801,12 @@
           <a:lstStyle/>
           <a:p>
             <a:r>
+              <a:rPr lang="en-US" altLang="ja-JP" sz="2400" dirty="0"/>
+              <a:t>C++</a:t>
+            </a:r>
+            <a:r>
               <a:rPr lang="ja-JP" altLang="en-US" sz="2400" dirty="0"/>
-              <a:t>敵が消えるときにもエフェクトを出しましょう。</a:t>
+              <a:t>で以下のように書いてみましょう。</a:t>
             </a:r>
             <a:endParaRPr lang="en-US" altLang="ja-JP" sz="2400" dirty="0"/>
           </a:p>
@@ -7162,10 +6814,10 @@
       </p:sp>
       <p:sp>
         <p:nvSpPr>
-          <p:cNvPr id="7" name="テキスト ボックス 6">
-            <a:extLst>
-              <a:ext uri="{FF2B5EF4-FFF2-40B4-BE49-F238E27FC236}">
-                <a16:creationId xmlns:a16="http://schemas.microsoft.com/office/drawing/2014/main" id="{9F53DD6C-E45D-4399-9D63-AE50E346FE78}"/>
+          <p:cNvPr id="5" name="テキスト ボックス 4">
+            <a:extLst>
+              <a:ext uri="{FF2B5EF4-FFF2-40B4-BE49-F238E27FC236}">
+                <a16:creationId xmlns:a16="http://schemas.microsoft.com/office/drawing/2014/main" id="{5F91C99E-110B-477C-9BB7-A07A1B418655}"/>
               </a:ext>
             </a:extLst>
           </p:cNvPr>
@@ -7174,8 +6826,8 @@
         </p:nvSpPr>
         <p:spPr>
           <a:xfrm>
-            <a:off x="567541" y="5763029"/>
-            <a:ext cx="9110186" cy="461665"/>
+            <a:off x="567542" y="5771495"/>
+            <a:ext cx="8319906" cy="830997"/>
           </a:xfrm>
           <a:prstGeom prst="rect">
             <a:avLst/>
@@ -7188,28 +6840,55 @@
           </a:bodyPr>
           <a:lstStyle/>
           <a:p>
+            <a:r>
+              <a:rPr lang="ja-JP" altLang="en-US" sz="2400" dirty="0"/>
+              <a:t>書き終わったら </a:t>
+            </a:r>
             <a:r>
               <a:rPr lang="ja-JP" altLang="en-US" sz="2400" b="1" dirty="0">
                 <a:solidFill>
                   <a:srgbClr val="FF0000"/>
                 </a:solidFill>
               </a:rPr>
-              <a:t>最初より、敵をやっつけることが楽しくなっているはずです！！</a:t>
-            </a:r>
-            <a:endParaRPr lang="en-US" altLang="ja-JP" sz="2400" b="1" dirty="0">
-              <a:solidFill>
-                <a:srgbClr val="FF0000"/>
-              </a:solidFill>
-            </a:endParaRPr>
+              <a:t>保存 → コンパイルボタン → 実行</a:t>
+            </a:r>
+            <a:r>
+              <a:rPr lang="ja-JP" altLang="en-US" sz="2400" dirty="0"/>
+              <a:t>をして、</a:t>
+            </a:r>
+            <a:endParaRPr lang="en-US" altLang="ja-JP" sz="2400" dirty="0"/>
+          </a:p>
+          <a:p>
+            <a:r>
+              <a:rPr lang="en-US" altLang="ja-JP" sz="2400" b="1" dirty="0">
+                <a:solidFill>
+                  <a:srgbClr val="0070C0"/>
+                </a:solidFill>
+              </a:rPr>
+              <a:t>X</a:t>
+            </a:r>
+            <a:r>
+              <a:rPr lang="ja-JP" altLang="en-US" sz="2400" b="1" dirty="0">
+                <a:solidFill>
+                  <a:srgbClr val="0070C0"/>
+                </a:solidFill>
+              </a:rPr>
+              <a:t>ボタン</a:t>
+            </a:r>
+            <a:r>
+              <a:rPr lang="ja-JP" altLang="en-US" sz="2400" dirty="0"/>
+              <a:t>を押してみましょう。</a:t>
+            </a:r>
+            <a:endParaRPr lang="en-US" altLang="ja-JP" sz="2400" dirty="0"/>
           </a:p>
         </p:txBody>
       </p:sp>
       <p:pic>
         <p:nvPicPr>
-          <p:cNvPr id="5" name="図 4">
-            <a:extLst>
-              <a:ext uri="{FF2B5EF4-FFF2-40B4-BE49-F238E27FC236}">
-                <a16:creationId xmlns:a16="http://schemas.microsoft.com/office/drawing/2014/main" id="{5FF55E57-2E7A-4FD5-9497-B27586702A4D}"/>
+          <p:cNvPr id="3" name="図 2">
+            <a:extLst>
+              <a:ext uri="{FF2B5EF4-FFF2-40B4-BE49-F238E27FC236}">
+                <a16:creationId xmlns:a16="http://schemas.microsoft.com/office/drawing/2014/main" id="{A582520D-D933-4606-99AA-B1D8DC76F2E5}"/>
               </a:ext>
             </a:extLst>
           </p:cNvPr>
@@ -7226,168 +6905,20 @@
         </p:blipFill>
         <p:spPr>
           <a:xfrm>
-            <a:off x="567541" y="2035996"/>
-            <a:ext cx="5496692" cy="3267531"/>
+            <a:off x="567542" y="1729028"/>
+            <a:ext cx="10145541" cy="3991532"/>
           </a:xfrm>
           <a:prstGeom prst="rect">
             <a:avLst/>
           </a:prstGeom>
         </p:spPr>
       </p:pic>
-      <p:pic>
-        <p:nvPicPr>
-          <p:cNvPr id="8" name="図 7">
-            <a:extLst>
-              <a:ext uri="{FF2B5EF4-FFF2-40B4-BE49-F238E27FC236}">
-                <a16:creationId xmlns:a16="http://schemas.microsoft.com/office/drawing/2014/main" id="{9E73C815-7129-444C-814B-F92BFD1D9DDE}"/>
-              </a:ext>
-            </a:extLst>
-          </p:cNvPr>
-          <p:cNvPicPr>
-            <a:picLocks noChangeAspect="1"/>
-          </p:cNvPicPr>
-          <p:nvPr/>
-        </p:nvPicPr>
-        <p:blipFill>
-          <a:blip r:embed="rId3"/>
-          <a:stretch>
-            <a:fillRect/>
-          </a:stretch>
-        </p:blipFill>
-        <p:spPr>
-          <a:xfrm>
-            <a:off x="7070874" y="2035996"/>
-            <a:ext cx="4553585" cy="2343477"/>
-          </a:xfrm>
-          <a:prstGeom prst="rect">
-            <a:avLst/>
-          </a:prstGeom>
-        </p:spPr>
-      </p:pic>
-      <p:sp>
-        <p:nvSpPr>
-          <p:cNvPr id="9" name="テキスト ボックス 8">
-            <a:extLst>
-              <a:ext uri="{FF2B5EF4-FFF2-40B4-BE49-F238E27FC236}">
-                <a16:creationId xmlns:a16="http://schemas.microsoft.com/office/drawing/2014/main" id="{81596496-C899-4A3D-8D4E-22CBB49B4613}"/>
-              </a:ext>
-            </a:extLst>
-          </p:cNvPr>
-          <p:cNvSpPr txBox="1"/>
-          <p:nvPr/>
-        </p:nvSpPr>
-        <p:spPr>
-          <a:xfrm>
-            <a:off x="4221809" y="4379473"/>
-            <a:ext cx="2630848" cy="338554"/>
-          </a:xfrm>
-          <a:prstGeom prst="rect">
-            <a:avLst/>
-          </a:prstGeom>
-          <a:solidFill>
-            <a:schemeClr val="bg1"/>
-          </a:solidFill>
-          <a:ln>
-            <a:solidFill>
-              <a:schemeClr val="tx1"/>
-            </a:solidFill>
-          </a:ln>
-        </p:spPr>
-        <p:txBody>
-          <a:bodyPr wrap="none" rtlCol="0">
-            <a:spAutoFit/>
-          </a:bodyPr>
-          <a:lstStyle/>
-          <a:p>
-            <a:r>
-              <a:rPr lang="en-US" altLang="ja-JP" sz="1600" b="1" dirty="0" err="1">
-                <a:solidFill>
-                  <a:srgbClr val="FF0000"/>
-                </a:solidFill>
-              </a:rPr>
-              <a:t>BP_EnemyMush</a:t>
-            </a:r>
-            <a:r>
-              <a:rPr lang="ja-JP" altLang="en-US" sz="1600" b="1" dirty="0">
-                <a:solidFill>
-                  <a:srgbClr val="FF0000"/>
-                </a:solidFill>
-              </a:rPr>
-              <a:t>を開いて</a:t>
-            </a:r>
-            <a:endParaRPr lang="en-US" altLang="ja-JP" sz="1600" b="1" dirty="0">
-              <a:solidFill>
-                <a:srgbClr val="FF0000"/>
-              </a:solidFill>
-            </a:endParaRPr>
-          </a:p>
-        </p:txBody>
-      </p:sp>
-      <p:sp>
-        <p:nvSpPr>
-          <p:cNvPr id="10" name="テキスト ボックス 9">
-            <a:extLst>
-              <a:ext uri="{FF2B5EF4-FFF2-40B4-BE49-F238E27FC236}">
-                <a16:creationId xmlns:a16="http://schemas.microsoft.com/office/drawing/2014/main" id="{162E0DA4-D512-4FEB-A8E6-325F8E7490EC}"/>
-              </a:ext>
-            </a:extLst>
-          </p:cNvPr>
-          <p:cNvSpPr txBox="1"/>
-          <p:nvPr/>
-        </p:nvSpPr>
-        <p:spPr>
-          <a:xfrm>
-            <a:off x="7070874" y="2723096"/>
-            <a:ext cx="2239716" cy="338554"/>
-          </a:xfrm>
-          <a:prstGeom prst="rect">
-            <a:avLst/>
-          </a:prstGeom>
-          <a:solidFill>
-            <a:schemeClr val="bg1"/>
-          </a:solidFill>
-          <a:ln>
-            <a:solidFill>
-              <a:schemeClr val="tx1"/>
-            </a:solidFill>
-          </a:ln>
-        </p:spPr>
-        <p:txBody>
-          <a:bodyPr wrap="none" rtlCol="0">
-            <a:spAutoFit/>
-          </a:bodyPr>
-          <a:lstStyle/>
-          <a:p>
-            <a:r>
-              <a:rPr lang="en-US" altLang="ja-JP" sz="1600" b="1" dirty="0">
-                <a:solidFill>
-                  <a:srgbClr val="FF0000"/>
-                </a:solidFill>
-              </a:rPr>
-              <a:t>M Dead Effect</a:t>
-            </a:r>
-            <a:r>
-              <a:rPr lang="ja-JP" altLang="en-US" sz="1600" b="1" dirty="0">
-                <a:solidFill>
-                  <a:srgbClr val="FF0000"/>
-                </a:solidFill>
-              </a:rPr>
-              <a:t>を設定</a:t>
-            </a:r>
-            <a:endParaRPr lang="en-US" altLang="ja-JP" sz="1600" b="1" dirty="0">
-              <a:solidFill>
-                <a:srgbClr val="FF0000"/>
-              </a:solidFill>
-            </a:endParaRPr>
-          </a:p>
-        </p:txBody>
-      </p:sp>
-      <p:sp>
-        <p:nvSpPr>
-          <p:cNvPr id="11" name="正方形/長方形 10">
-            <a:extLst>
-              <a:ext uri="{FF2B5EF4-FFF2-40B4-BE49-F238E27FC236}">
-                <a16:creationId xmlns:a16="http://schemas.microsoft.com/office/drawing/2014/main" id="{31DFA8E7-A630-4486-B6C0-D7420AD62D6C}"/>
+      <p:sp>
+        <p:nvSpPr>
+          <p:cNvPr id="7" name="正方形/長方形 6">
+            <a:extLst>
+              <a:ext uri="{FF2B5EF4-FFF2-40B4-BE49-F238E27FC236}">
+                <a16:creationId xmlns:a16="http://schemas.microsoft.com/office/drawing/2014/main" id="{0C4C30B0-9FBE-4500-A09E-51FDC19A0C8C}"/>
               </a:ext>
             </a:extLst>
           </p:cNvPr>
@@ -7396,8 +6927,8 @@
         </p:nvSpPr>
         <p:spPr>
           <a:xfrm>
-            <a:off x="8839200" y="3061650"/>
-            <a:ext cx="2675468" cy="595950"/>
+            <a:off x="2819399" y="4334933"/>
+            <a:ext cx="7984067" cy="575734"/>
           </a:xfrm>
           <a:prstGeom prst="rect">
             <a:avLst/>
@@ -7437,7 +6968,7 @@
     </p:spTree>
     <p:extLst>
       <p:ext uri="{BB962C8B-B14F-4D97-AF65-F5344CB8AC3E}">
-        <p14:creationId xmlns:p14="http://schemas.microsoft.com/office/powerpoint/2010/main" val="1378075712"/>
+        <p14:creationId xmlns:p14="http://schemas.microsoft.com/office/powerpoint/2010/main" val="499895268"/>
       </p:ext>
     </p:extLst>
   </p:cSld>
@@ -7515,7 +7046,7 @@
         <p:spPr>
           <a:xfrm>
             <a:off x="567542" y="1216429"/>
-            <a:ext cx="6340197" cy="2677656"/>
+            <a:ext cx="7263527" cy="830997"/>
           </a:xfrm>
           <a:prstGeom prst="rect">
             <a:avLst/>
@@ -7530,11 +7061,8 @@
           <a:p>
             <a:r>
               <a:rPr lang="ja-JP" altLang="en-US" sz="2400" dirty="0"/>
-              <a:t>ステージを進めて遊んでみましょう！</a:t>
-            </a:r>
-            <a:endParaRPr lang="en-US" altLang="ja-JP" sz="2400" dirty="0"/>
-          </a:p>
-          <a:p>
+              <a:t>アクションゲームで大事なことは、</a:t>
+            </a:r>
             <a:endParaRPr lang="en-US" altLang="ja-JP" sz="2400" dirty="0"/>
           </a:p>
           <a:p>
@@ -7544,60 +7072,123 @@
                   <a:srgbClr val="FF0000"/>
                 </a:solidFill>
               </a:rPr>
-              <a:t>もっとこうしたら面白い！</a:t>
-            </a:r>
-            <a:endParaRPr lang="en-US" altLang="ja-JP" sz="2400" b="1" dirty="0">
-              <a:solidFill>
-                <a:srgbClr val="FF0000"/>
-              </a:solidFill>
-            </a:endParaRPr>
-          </a:p>
-          <a:p>
+              <a:t>敵をやっつけて気持ち良いと感じるかどうか</a:t>
+            </a:r>
+            <a:r>
+              <a:rPr lang="ja-JP" altLang="en-US" sz="2400" dirty="0"/>
+              <a:t>です。</a:t>
+            </a:r>
+            <a:endParaRPr lang="en-US" altLang="ja-JP" sz="2400" dirty="0"/>
+          </a:p>
+        </p:txBody>
+      </p:sp>
+      <p:sp>
+        <p:nvSpPr>
+          <p:cNvPr id="7" name="テキスト ボックス 6">
+            <a:extLst>
+              <a:ext uri="{FF2B5EF4-FFF2-40B4-BE49-F238E27FC236}">
+                <a16:creationId xmlns:a16="http://schemas.microsoft.com/office/drawing/2014/main" id="{9F53DD6C-E45D-4399-9D63-AE50E346FE78}"/>
+              </a:ext>
+            </a:extLst>
+          </p:cNvPr>
+          <p:cNvSpPr txBox="1"/>
+          <p:nvPr/>
+        </p:nvSpPr>
+        <p:spPr>
+          <a:xfrm>
+            <a:off x="567541" y="5763029"/>
+            <a:ext cx="9110186" cy="830997"/>
+          </a:xfrm>
+          <a:prstGeom prst="rect">
+            <a:avLst/>
+          </a:prstGeom>
+          <a:noFill/>
+        </p:spPr>
+        <p:txBody>
+          <a:bodyPr wrap="none" rtlCol="0">
+            <a:spAutoFit/>
+          </a:bodyPr>
+          <a:lstStyle/>
+          <a:p>
+            <a:r>
+              <a:rPr lang="ja-JP" altLang="en-US" sz="2400" dirty="0"/>
+              <a:t>今のままだと</a:t>
+            </a:r>
+            <a:r>
+              <a:rPr lang="ja-JP" altLang="en-US" sz="2400" b="1" dirty="0">
+                <a:solidFill>
+                  <a:srgbClr val="0070C0"/>
+                </a:solidFill>
+              </a:rPr>
+              <a:t>あまり気持ちよくない</a:t>
+            </a:r>
+            <a:r>
+              <a:rPr lang="ja-JP" altLang="en-US" sz="2400" dirty="0"/>
+              <a:t>ですよね。。</a:t>
+            </a:r>
+            <a:endParaRPr lang="en-US" altLang="ja-JP" sz="2400" dirty="0"/>
+          </a:p>
+          <a:p>
+            <a:r>
+              <a:rPr lang="ja-JP" altLang="en-US" sz="2400" dirty="0"/>
+              <a:t>今回は、敵をやっつけて嬉しくなるように、</a:t>
+            </a:r>
             <a:r>
               <a:rPr lang="ja-JP" altLang="en-US" sz="2400" b="1" dirty="0">
                 <a:solidFill>
                   <a:srgbClr val="FF0000"/>
                 </a:solidFill>
               </a:rPr>
-              <a:t>もっとこんなことがしたい！</a:t>
-            </a:r>
-            <a:endParaRPr lang="en-US" altLang="ja-JP" sz="2400" b="1" dirty="0">
-              <a:solidFill>
-                <a:srgbClr val="FF0000"/>
-              </a:solidFill>
-            </a:endParaRPr>
-          </a:p>
-          <a:p>
+              <a:t>演出</a:t>
+            </a:r>
             <a:r>
               <a:rPr lang="ja-JP" altLang="en-US" sz="2400" dirty="0"/>
-              <a:t>など意見があればどんどん言ってください！</a:t>
+              <a:t>を追加します。</a:t>
             </a:r>
             <a:endParaRPr lang="en-US" altLang="ja-JP" sz="2400" dirty="0"/>
           </a:p>
-          <a:p>
-            <a:endParaRPr lang="en-US" altLang="ja-JP" sz="2400" dirty="0"/>
-          </a:p>
-          <a:p>
-            <a:r>
-              <a:rPr lang="ja-JP" altLang="en-US" sz="2400" b="1" dirty="0">
-                <a:solidFill>
-                  <a:srgbClr val="00B050"/>
-                </a:solidFill>
-              </a:rPr>
-              <a:t>来年のオープンキャンパスに採用されるかも</a:t>
-            </a:r>
-            <a:endParaRPr lang="en-US" altLang="ja-JP" sz="2400" b="1" dirty="0">
-              <a:solidFill>
-                <a:srgbClr val="00B050"/>
-              </a:solidFill>
-            </a:endParaRPr>
-          </a:p>
-        </p:txBody>
-      </p:sp>
+        </p:txBody>
+      </p:sp>
+      <p:pic>
+        <p:nvPicPr>
+          <p:cNvPr id="3" name="図 2">
+            <a:extLst>
+              <a:ext uri="{FF2B5EF4-FFF2-40B4-BE49-F238E27FC236}">
+                <a16:creationId xmlns:a16="http://schemas.microsoft.com/office/drawing/2014/main" id="{1AE54078-F5FB-43FF-BACE-F51D4CECA001}"/>
+              </a:ext>
+            </a:extLst>
+          </p:cNvPr>
+          <p:cNvPicPr>
+            <a:picLocks noChangeAspect="1"/>
+          </p:cNvPicPr>
+          <p:nvPr/>
+        </p:nvPicPr>
+        <p:blipFill>
+          <a:blip r:embed="rId2">
+            <a:extLst>
+              <a:ext uri="{28A0092B-C50C-407E-A947-70E740481C1C}">
+                <a14:useLocalDpi xmlns:a14="http://schemas.microsoft.com/office/drawing/2010/main" val="0"/>
+              </a:ext>
+            </a:extLst>
+          </a:blip>
+          <a:stretch>
+            <a:fillRect/>
+          </a:stretch>
+        </p:blipFill>
+        <p:spPr>
+          <a:xfrm>
+            <a:off x="567541" y="2187126"/>
+            <a:ext cx="6204100" cy="3102050"/>
+          </a:xfrm>
+          <a:prstGeom prst="rect">
+            <a:avLst/>
+          </a:prstGeom>
+        </p:spPr>
+      </p:pic>
     </p:spTree>
     <p:extLst>
       <p:ext uri="{BB962C8B-B14F-4D97-AF65-F5344CB8AC3E}">
-        <p14:creationId xmlns:p14="http://schemas.microsoft.com/office/powerpoint/2010/main" val="3705044167"/>
+        <p14:creationId xmlns:p14="http://schemas.microsoft.com/office/powerpoint/2010/main" val="4099386392"/>
       </p:ext>
     </p:extLst>
   </p:cSld>
@@ -7675,6 +7266,1805 @@
         <p:spPr>
           <a:xfrm>
             <a:off x="567542" y="1216429"/>
+            <a:ext cx="9725739" cy="1200329"/>
+          </a:xfrm>
+          <a:prstGeom prst="rect">
+            <a:avLst/>
+          </a:prstGeom>
+          <a:noFill/>
+        </p:spPr>
+        <p:txBody>
+          <a:bodyPr wrap="none" rtlCol="0">
+            <a:spAutoFit/>
+          </a:bodyPr>
+          <a:lstStyle/>
+          <a:p>
+            <a:r>
+              <a:rPr lang="ja-JP" altLang="en-US" sz="2400" dirty="0"/>
+              <a:t>弾丸が敵に当たったら</a:t>
+            </a:r>
+            <a:r>
+              <a:rPr lang="ja-JP" altLang="en-US" sz="2400" b="1" dirty="0">
+                <a:solidFill>
+                  <a:srgbClr val="FF0000"/>
+                </a:solidFill>
+              </a:rPr>
+              <a:t>ヒットエフェクト</a:t>
+            </a:r>
+            <a:r>
+              <a:rPr lang="ja-JP" altLang="en-US" sz="2400" dirty="0"/>
+              <a:t>が出るようにします。</a:t>
+            </a:r>
+            <a:endParaRPr lang="en-US" altLang="ja-JP" sz="2400" dirty="0"/>
+          </a:p>
+          <a:p>
+            <a:r>
+              <a:rPr lang="ja-JP" altLang="en-US" sz="2400" dirty="0"/>
+              <a:t>エフェクトとは</a:t>
+            </a:r>
+            <a:r>
+              <a:rPr lang="ja-JP" altLang="en-US" sz="2400" b="1" dirty="0">
+                <a:solidFill>
+                  <a:srgbClr val="FF0000"/>
+                </a:solidFill>
+              </a:rPr>
+              <a:t>ゲームの飾りつけをするアニメーション</a:t>
+            </a:r>
+            <a:r>
+              <a:rPr lang="ja-JP" altLang="en-US" sz="2400" dirty="0"/>
+              <a:t>のことです。</a:t>
+            </a:r>
+            <a:endParaRPr lang="en-US" altLang="ja-JP" sz="2400" dirty="0"/>
+          </a:p>
+          <a:p>
+            <a:r>
+              <a:rPr lang="ja-JP" altLang="en-US" sz="2400" b="1" dirty="0">
+                <a:solidFill>
+                  <a:srgbClr val="FF0000"/>
+                </a:solidFill>
+              </a:rPr>
+              <a:t>炎</a:t>
+            </a:r>
+            <a:r>
+              <a:rPr lang="ja-JP" altLang="en-US" sz="2400" dirty="0"/>
+              <a:t>、</a:t>
+            </a:r>
+            <a:r>
+              <a:rPr lang="ja-JP" altLang="en-US" sz="2400" b="1" dirty="0">
+                <a:solidFill>
+                  <a:srgbClr val="0070C0"/>
+                </a:solidFill>
+              </a:rPr>
+              <a:t>電撃</a:t>
+            </a:r>
+            <a:r>
+              <a:rPr lang="ja-JP" altLang="en-US" sz="2400" dirty="0"/>
+              <a:t>、</a:t>
+            </a:r>
+            <a:r>
+              <a:rPr lang="ja-JP" altLang="en-US" sz="2400" b="1" dirty="0">
+                <a:solidFill>
+                  <a:srgbClr val="FFC000"/>
+                </a:solidFill>
+              </a:rPr>
+              <a:t>爆発</a:t>
+            </a:r>
+            <a:r>
+              <a:rPr lang="ja-JP" altLang="en-US" sz="2400" dirty="0"/>
+              <a:t>、</a:t>
+            </a:r>
+            <a:r>
+              <a:rPr lang="ja-JP" altLang="en-US" sz="2400" b="1" dirty="0">
+                <a:solidFill>
+                  <a:srgbClr val="00B050"/>
+                </a:solidFill>
+              </a:rPr>
+              <a:t>衝撃波</a:t>
+            </a:r>
+            <a:r>
+              <a:rPr lang="ja-JP" altLang="en-US" sz="2400" dirty="0"/>
+              <a:t>など</a:t>
+            </a:r>
+            <a:endParaRPr lang="en-US" altLang="ja-JP" sz="2400" dirty="0"/>
+          </a:p>
+        </p:txBody>
+      </p:sp>
+      <p:sp>
+        <p:nvSpPr>
+          <p:cNvPr id="7" name="テキスト ボックス 6">
+            <a:extLst>
+              <a:ext uri="{FF2B5EF4-FFF2-40B4-BE49-F238E27FC236}">
+                <a16:creationId xmlns:a16="http://schemas.microsoft.com/office/drawing/2014/main" id="{9F53DD6C-E45D-4399-9D63-AE50E346FE78}"/>
+              </a:ext>
+            </a:extLst>
+          </p:cNvPr>
+          <p:cNvSpPr txBox="1"/>
+          <p:nvPr/>
+        </p:nvSpPr>
+        <p:spPr>
+          <a:xfrm>
+            <a:off x="567541" y="6227233"/>
+            <a:ext cx="5109091" cy="461665"/>
+          </a:xfrm>
+          <a:prstGeom prst="rect">
+            <a:avLst/>
+          </a:prstGeom>
+          <a:noFill/>
+        </p:spPr>
+        <p:txBody>
+          <a:bodyPr wrap="none" rtlCol="0">
+            <a:spAutoFit/>
+          </a:bodyPr>
+          <a:lstStyle/>
+          <a:p>
+            <a:r>
+              <a:rPr lang="ja-JP" altLang="en-US" sz="2400" dirty="0"/>
+              <a:t>実行して弾丸を敵に当てましょう。</a:t>
+            </a:r>
+            <a:endParaRPr lang="en-US" altLang="ja-JP" sz="2400" dirty="0"/>
+          </a:p>
+        </p:txBody>
+      </p:sp>
+      <p:pic>
+        <p:nvPicPr>
+          <p:cNvPr id="3" name="図 2">
+            <a:extLst>
+              <a:ext uri="{FF2B5EF4-FFF2-40B4-BE49-F238E27FC236}">
+                <a16:creationId xmlns:a16="http://schemas.microsoft.com/office/drawing/2014/main" id="{3F6306C5-22A4-45C2-8435-BDF184C1D2F2}"/>
+              </a:ext>
+            </a:extLst>
+          </p:cNvPr>
+          <p:cNvPicPr>
+            <a:picLocks noChangeAspect="1"/>
+          </p:cNvPicPr>
+          <p:nvPr/>
+        </p:nvPicPr>
+        <p:blipFill>
+          <a:blip r:embed="rId2"/>
+          <a:stretch>
+            <a:fillRect/>
+          </a:stretch>
+        </p:blipFill>
+        <p:spPr>
+          <a:xfrm>
+            <a:off x="6651535" y="2556458"/>
+            <a:ext cx="3899790" cy="4135403"/>
+          </a:xfrm>
+          <a:prstGeom prst="rect">
+            <a:avLst/>
+          </a:prstGeom>
+        </p:spPr>
+      </p:pic>
+      <p:pic>
+        <p:nvPicPr>
+          <p:cNvPr id="8" name="図 7">
+            <a:extLst>
+              <a:ext uri="{FF2B5EF4-FFF2-40B4-BE49-F238E27FC236}">
+                <a16:creationId xmlns:a16="http://schemas.microsoft.com/office/drawing/2014/main" id="{5AFAE87B-7EE8-4250-A71A-8CE1597C9017}"/>
+              </a:ext>
+            </a:extLst>
+          </p:cNvPr>
+          <p:cNvPicPr>
+            <a:picLocks noChangeAspect="1"/>
+          </p:cNvPicPr>
+          <p:nvPr/>
+        </p:nvPicPr>
+        <p:blipFill>
+          <a:blip r:embed="rId3"/>
+          <a:stretch>
+            <a:fillRect/>
+          </a:stretch>
+        </p:blipFill>
+        <p:spPr>
+          <a:xfrm>
+            <a:off x="567541" y="2556458"/>
+            <a:ext cx="4267796" cy="2953162"/>
+          </a:xfrm>
+          <a:prstGeom prst="rect">
+            <a:avLst/>
+          </a:prstGeom>
+        </p:spPr>
+      </p:pic>
+      <p:sp>
+        <p:nvSpPr>
+          <p:cNvPr id="9" name="矢印: 右 8">
+            <a:extLst>
+              <a:ext uri="{FF2B5EF4-FFF2-40B4-BE49-F238E27FC236}">
+                <a16:creationId xmlns:a16="http://schemas.microsoft.com/office/drawing/2014/main" id="{F242E171-8846-4777-8B83-DB37EF3B09E6}"/>
+              </a:ext>
+            </a:extLst>
+          </p:cNvPr>
+          <p:cNvSpPr/>
+          <p:nvPr/>
+        </p:nvSpPr>
+        <p:spPr>
+          <a:xfrm>
+            <a:off x="4899805" y="3705025"/>
+            <a:ext cx="1687262" cy="524934"/>
+          </a:xfrm>
+          <a:prstGeom prst="rightArrow">
+            <a:avLst/>
+          </a:prstGeom>
+          <a:solidFill>
+            <a:srgbClr val="FF0000"/>
+          </a:solidFill>
+          <a:ln>
+            <a:solidFill>
+              <a:schemeClr val="tx1"/>
+            </a:solidFill>
+          </a:ln>
+        </p:spPr>
+        <p:style>
+          <a:lnRef idx="2">
+            <a:schemeClr val="accent1">
+              <a:shade val="50000"/>
+            </a:schemeClr>
+          </a:lnRef>
+          <a:fillRef idx="1">
+            <a:schemeClr val="accent1"/>
+          </a:fillRef>
+          <a:effectRef idx="0">
+            <a:schemeClr val="accent1"/>
+          </a:effectRef>
+          <a:fontRef idx="minor">
+            <a:schemeClr val="lt1"/>
+          </a:fontRef>
+        </p:style>
+        <p:txBody>
+          <a:bodyPr rtlCol="0" anchor="ctr"/>
+          <a:lstStyle/>
+          <a:p>
+            <a:pPr algn="ctr"/>
+            <a:endParaRPr kumimoji="1" lang="ja-JP" altLang="en-US"/>
+          </a:p>
+        </p:txBody>
+      </p:sp>
+      <p:sp>
+        <p:nvSpPr>
+          <p:cNvPr id="10" name="正方形/長方形 9">
+            <a:extLst>
+              <a:ext uri="{FF2B5EF4-FFF2-40B4-BE49-F238E27FC236}">
+                <a16:creationId xmlns:a16="http://schemas.microsoft.com/office/drawing/2014/main" id="{66B23E0C-430A-4EBB-801E-0BA43010D31B}"/>
+              </a:ext>
+            </a:extLst>
+          </p:cNvPr>
+          <p:cNvSpPr/>
+          <p:nvPr/>
+        </p:nvSpPr>
+        <p:spPr>
+          <a:xfrm>
+            <a:off x="6651536" y="5985933"/>
+            <a:ext cx="3899790" cy="482600"/>
+          </a:xfrm>
+          <a:prstGeom prst="rect">
+            <a:avLst/>
+          </a:prstGeom>
+          <a:noFill/>
+          <a:ln w="38100">
+            <a:solidFill>
+              <a:srgbClr val="FF0000"/>
+            </a:solidFill>
+          </a:ln>
+        </p:spPr>
+        <p:style>
+          <a:lnRef idx="2">
+            <a:schemeClr val="accent1">
+              <a:shade val="50000"/>
+            </a:schemeClr>
+          </a:lnRef>
+          <a:fillRef idx="1">
+            <a:schemeClr val="accent1"/>
+          </a:fillRef>
+          <a:effectRef idx="0">
+            <a:schemeClr val="accent1"/>
+          </a:effectRef>
+          <a:fontRef idx="minor">
+            <a:schemeClr val="lt1"/>
+          </a:fontRef>
+        </p:style>
+        <p:txBody>
+          <a:bodyPr rtlCol="0" anchor="ctr"/>
+          <a:lstStyle/>
+          <a:p>
+            <a:pPr algn="ctr"/>
+            <a:endParaRPr kumimoji="1" lang="ja-JP" altLang="en-US"/>
+          </a:p>
+        </p:txBody>
+      </p:sp>
+      <p:sp>
+        <p:nvSpPr>
+          <p:cNvPr id="11" name="テキスト ボックス 10">
+            <a:extLst>
+              <a:ext uri="{FF2B5EF4-FFF2-40B4-BE49-F238E27FC236}">
+                <a16:creationId xmlns:a16="http://schemas.microsoft.com/office/drawing/2014/main" id="{C61A9F67-1248-4CA0-96C2-49D12C70A21B}"/>
+              </a:ext>
+            </a:extLst>
+          </p:cNvPr>
+          <p:cNvSpPr txBox="1"/>
+          <p:nvPr/>
+        </p:nvSpPr>
+        <p:spPr>
+          <a:xfrm>
+            <a:off x="3011076" y="4778295"/>
+            <a:ext cx="2900153" cy="338554"/>
+          </a:xfrm>
+          <a:prstGeom prst="rect">
+            <a:avLst/>
+          </a:prstGeom>
+          <a:solidFill>
+            <a:schemeClr val="bg1"/>
+          </a:solidFill>
+          <a:ln>
+            <a:solidFill>
+              <a:schemeClr val="tx1"/>
+            </a:solidFill>
+          </a:ln>
+        </p:spPr>
+        <p:txBody>
+          <a:bodyPr wrap="none" rtlCol="0">
+            <a:spAutoFit/>
+          </a:bodyPr>
+          <a:lstStyle/>
+          <a:p>
+            <a:r>
+              <a:rPr lang="en-US" altLang="ja-JP" sz="1600" b="1" dirty="0" err="1">
+                <a:solidFill>
+                  <a:srgbClr val="FF0000"/>
+                </a:solidFill>
+              </a:rPr>
+              <a:t>BP_MagicianBullet</a:t>
+            </a:r>
+            <a:r>
+              <a:rPr lang="ja-JP" altLang="en-US" sz="1600" b="1" dirty="0">
+                <a:solidFill>
+                  <a:srgbClr val="FF0000"/>
+                </a:solidFill>
+              </a:rPr>
+              <a:t>を開いて</a:t>
+            </a:r>
+            <a:endParaRPr lang="en-US" altLang="ja-JP" sz="1600" b="1" dirty="0">
+              <a:solidFill>
+                <a:srgbClr val="FF0000"/>
+              </a:solidFill>
+            </a:endParaRPr>
+          </a:p>
+        </p:txBody>
+      </p:sp>
+      <p:sp>
+        <p:nvSpPr>
+          <p:cNvPr id="12" name="テキスト ボックス 11">
+            <a:extLst>
+              <a:ext uri="{FF2B5EF4-FFF2-40B4-BE49-F238E27FC236}">
+                <a16:creationId xmlns:a16="http://schemas.microsoft.com/office/drawing/2014/main" id="{16893B75-38A5-46A2-AE59-4FCE920452EA}"/>
+              </a:ext>
+            </a:extLst>
+          </p:cNvPr>
+          <p:cNvSpPr txBox="1"/>
+          <p:nvPr/>
+        </p:nvSpPr>
+        <p:spPr>
+          <a:xfrm>
+            <a:off x="6651534" y="5593328"/>
+            <a:ext cx="3156633" cy="338554"/>
+          </a:xfrm>
+          <a:prstGeom prst="rect">
+            <a:avLst/>
+          </a:prstGeom>
+          <a:solidFill>
+            <a:schemeClr val="bg1"/>
+          </a:solidFill>
+          <a:ln>
+            <a:solidFill>
+              <a:schemeClr val="tx1"/>
+            </a:solidFill>
+          </a:ln>
+        </p:spPr>
+        <p:txBody>
+          <a:bodyPr wrap="none" rtlCol="0">
+            <a:spAutoFit/>
+          </a:bodyPr>
+          <a:lstStyle/>
+          <a:p>
+            <a:r>
+              <a:rPr lang="en-US" altLang="ja-JP" sz="1600" b="1" dirty="0">
+                <a:solidFill>
+                  <a:srgbClr val="FF0000"/>
+                </a:solidFill>
+              </a:rPr>
+              <a:t>M Hit Effect</a:t>
+            </a:r>
+            <a:r>
+              <a:rPr lang="ja-JP" altLang="en-US" sz="1600" b="1" dirty="0">
+                <a:solidFill>
+                  <a:srgbClr val="FF0000"/>
+                </a:solidFill>
+              </a:rPr>
+              <a:t>を「</a:t>
+            </a:r>
+            <a:r>
+              <a:rPr lang="en-US" altLang="ja-JP" sz="1600" b="1" dirty="0">
+                <a:solidFill>
+                  <a:srgbClr val="FF0000"/>
+                </a:solidFill>
+              </a:rPr>
+              <a:t>Hit00</a:t>
+            </a:r>
+            <a:r>
+              <a:rPr lang="ja-JP" altLang="en-US" sz="1600" b="1" dirty="0">
+                <a:solidFill>
+                  <a:srgbClr val="FF0000"/>
+                </a:solidFill>
+              </a:rPr>
+              <a:t>」に設定</a:t>
+            </a:r>
+            <a:endParaRPr lang="en-US" altLang="ja-JP" sz="1600" b="1" dirty="0">
+              <a:solidFill>
+                <a:srgbClr val="FF0000"/>
+              </a:solidFill>
+            </a:endParaRPr>
+          </a:p>
+        </p:txBody>
+      </p:sp>
+    </p:spTree>
+    <p:extLst>
+      <p:ext uri="{BB962C8B-B14F-4D97-AF65-F5344CB8AC3E}">
+        <p14:creationId xmlns:p14="http://schemas.microsoft.com/office/powerpoint/2010/main" val="424298462"/>
+      </p:ext>
+    </p:extLst>
+  </p:cSld>
+  <p:clrMapOvr>
+    <a:masterClrMapping/>
+  </p:clrMapOvr>
+</p:sld>
+</file>
+
+<file path=ppt/slides/slide23.xml><?xml version="1.0" encoding="utf-8"?>
+<p:sld xmlns:a="http://schemas.openxmlformats.org/drawingml/2006/main" xmlns:r="http://schemas.openxmlformats.org/officeDocument/2006/relationships" xmlns:p="http://schemas.openxmlformats.org/presentationml/2006/main">
+  <p:cSld>
+    <p:spTree>
+      <p:nvGrpSpPr>
+        <p:cNvPr id="1" name=""/>
+        <p:cNvGrpSpPr/>
+        <p:nvPr/>
+      </p:nvGrpSpPr>
+      <p:grpSpPr>
+        <a:xfrm>
+          <a:off x="0" y="0"/>
+          <a:ext cx="0" cy="0"/>
+          <a:chOff x="0" y="0"/>
+          <a:chExt cx="0" cy="0"/>
+        </a:xfrm>
+      </p:grpSpPr>
+      <p:sp>
+        <p:nvSpPr>
+          <p:cNvPr id="4" name="テキスト ボックス 3">
+            <a:extLst>
+              <a:ext uri="{FF2B5EF4-FFF2-40B4-BE49-F238E27FC236}">
+                <a16:creationId xmlns:a16="http://schemas.microsoft.com/office/drawing/2014/main" id="{5A13BF46-B8C5-48AA-8308-C9ECFF431A18}"/>
+              </a:ext>
+            </a:extLst>
+          </p:cNvPr>
+          <p:cNvSpPr txBox="1"/>
+          <p:nvPr/>
+        </p:nvSpPr>
+        <p:spPr>
+          <a:xfrm>
+            <a:off x="567542" y="491954"/>
+            <a:ext cx="5109091" cy="584775"/>
+          </a:xfrm>
+          <a:prstGeom prst="rect">
+            <a:avLst/>
+          </a:prstGeom>
+          <a:noFill/>
+        </p:spPr>
+        <p:txBody>
+          <a:bodyPr wrap="none" rtlCol="0">
+            <a:spAutoFit/>
+          </a:bodyPr>
+          <a:lstStyle/>
+          <a:p>
+            <a:r>
+              <a:rPr kumimoji="1" lang="ja-JP" altLang="en-US" sz="3200" b="1" u="sng" dirty="0"/>
+              <a:t>アクションゲーム制作体験</a:t>
+            </a:r>
+            <a:endParaRPr kumimoji="1" lang="en-US" altLang="ja-JP" sz="3200" b="1" u="sng" dirty="0"/>
+          </a:p>
+        </p:txBody>
+      </p:sp>
+      <p:sp>
+        <p:nvSpPr>
+          <p:cNvPr id="6" name="テキスト ボックス 5">
+            <a:extLst>
+              <a:ext uri="{FF2B5EF4-FFF2-40B4-BE49-F238E27FC236}">
+                <a16:creationId xmlns:a16="http://schemas.microsoft.com/office/drawing/2014/main" id="{55830AD6-028B-4C4E-80BF-B70DFC1C3A46}"/>
+              </a:ext>
+            </a:extLst>
+          </p:cNvPr>
+          <p:cNvSpPr txBox="1"/>
+          <p:nvPr/>
+        </p:nvSpPr>
+        <p:spPr>
+          <a:xfrm>
+            <a:off x="567542" y="1216429"/>
+            <a:ext cx="7571303" cy="830997"/>
+          </a:xfrm>
+          <a:prstGeom prst="rect">
+            <a:avLst/>
+          </a:prstGeom>
+          <a:noFill/>
+        </p:spPr>
+        <p:txBody>
+          <a:bodyPr wrap="none" rtlCol="0">
+            <a:spAutoFit/>
+          </a:bodyPr>
+          <a:lstStyle/>
+          <a:p>
+            <a:r>
+              <a:rPr lang="ja-JP" altLang="en-US" sz="2400" b="1" dirty="0">
+                <a:solidFill>
+                  <a:srgbClr val="FF0000"/>
+                </a:solidFill>
+              </a:rPr>
+              <a:t>ヒットストップ</a:t>
+            </a:r>
+            <a:r>
+              <a:rPr lang="ja-JP" altLang="en-US" sz="2400" dirty="0"/>
+              <a:t>を設定して、</a:t>
+            </a:r>
+            <a:r>
+              <a:rPr lang="ja-JP" altLang="en-US" sz="2400" b="1" dirty="0">
+                <a:solidFill>
+                  <a:srgbClr val="FF0000"/>
+                </a:solidFill>
+              </a:rPr>
+              <a:t>当たった感を強めます。</a:t>
+            </a:r>
+            <a:endParaRPr lang="en-US" altLang="ja-JP" sz="2400" b="1" dirty="0">
+              <a:solidFill>
+                <a:srgbClr val="FF0000"/>
+              </a:solidFill>
+            </a:endParaRPr>
+          </a:p>
+          <a:p>
+            <a:r>
+              <a:rPr lang="ja-JP" altLang="en-US" sz="2400" dirty="0"/>
+              <a:t>スマブラにも使われている、有名な演出です。</a:t>
+            </a:r>
+            <a:endParaRPr lang="en-US" altLang="ja-JP" sz="2400" dirty="0"/>
+          </a:p>
+        </p:txBody>
+      </p:sp>
+      <p:sp>
+        <p:nvSpPr>
+          <p:cNvPr id="7" name="テキスト ボックス 6">
+            <a:extLst>
+              <a:ext uri="{FF2B5EF4-FFF2-40B4-BE49-F238E27FC236}">
+                <a16:creationId xmlns:a16="http://schemas.microsoft.com/office/drawing/2014/main" id="{9F53DD6C-E45D-4399-9D63-AE50E346FE78}"/>
+              </a:ext>
+            </a:extLst>
+          </p:cNvPr>
+          <p:cNvSpPr txBox="1"/>
+          <p:nvPr/>
+        </p:nvSpPr>
+        <p:spPr>
+          <a:xfrm>
+            <a:off x="567541" y="5763029"/>
+            <a:ext cx="5109091" cy="461665"/>
+          </a:xfrm>
+          <a:prstGeom prst="rect">
+            <a:avLst/>
+          </a:prstGeom>
+          <a:noFill/>
+        </p:spPr>
+        <p:txBody>
+          <a:bodyPr wrap="none" rtlCol="0">
+            <a:spAutoFit/>
+          </a:bodyPr>
+          <a:lstStyle/>
+          <a:p>
+            <a:r>
+              <a:rPr lang="ja-JP" altLang="en-US" sz="2400" dirty="0"/>
+              <a:t>実行して弾丸を敵に当てましょう。</a:t>
+            </a:r>
+            <a:endParaRPr lang="en-US" altLang="ja-JP" sz="2400" dirty="0"/>
+          </a:p>
+        </p:txBody>
+      </p:sp>
+      <p:pic>
+        <p:nvPicPr>
+          <p:cNvPr id="8" name="図 7">
+            <a:extLst>
+              <a:ext uri="{FF2B5EF4-FFF2-40B4-BE49-F238E27FC236}">
+                <a16:creationId xmlns:a16="http://schemas.microsoft.com/office/drawing/2014/main" id="{FE193B84-74E3-4EF1-8465-B0276F5468A8}"/>
+              </a:ext>
+            </a:extLst>
+          </p:cNvPr>
+          <p:cNvPicPr>
+            <a:picLocks noChangeAspect="1"/>
+          </p:cNvPicPr>
+          <p:nvPr/>
+        </p:nvPicPr>
+        <p:blipFill>
+          <a:blip r:embed="rId2"/>
+          <a:stretch>
+            <a:fillRect/>
+          </a:stretch>
+        </p:blipFill>
+        <p:spPr>
+          <a:xfrm>
+            <a:off x="7070874" y="2271462"/>
+            <a:ext cx="4553585" cy="2343477"/>
+          </a:xfrm>
+          <a:prstGeom prst="rect">
+            <a:avLst/>
+          </a:prstGeom>
+        </p:spPr>
+      </p:pic>
+      <p:sp>
+        <p:nvSpPr>
+          <p:cNvPr id="9" name="矢印: 右 8">
+            <a:extLst>
+              <a:ext uri="{FF2B5EF4-FFF2-40B4-BE49-F238E27FC236}">
+                <a16:creationId xmlns:a16="http://schemas.microsoft.com/office/drawing/2014/main" id="{F87F0251-0093-4B90-BE2A-327BEA5F621F}"/>
+              </a:ext>
+            </a:extLst>
+          </p:cNvPr>
+          <p:cNvSpPr/>
+          <p:nvPr/>
+        </p:nvSpPr>
+        <p:spPr>
+          <a:xfrm>
+            <a:off x="6179140" y="3380293"/>
+            <a:ext cx="776827" cy="524934"/>
+          </a:xfrm>
+          <a:prstGeom prst="rightArrow">
+            <a:avLst/>
+          </a:prstGeom>
+          <a:solidFill>
+            <a:srgbClr val="FF0000"/>
+          </a:solidFill>
+          <a:ln>
+            <a:solidFill>
+              <a:schemeClr val="tx1"/>
+            </a:solidFill>
+          </a:ln>
+        </p:spPr>
+        <p:style>
+          <a:lnRef idx="2">
+            <a:schemeClr val="accent1">
+              <a:shade val="50000"/>
+            </a:schemeClr>
+          </a:lnRef>
+          <a:fillRef idx="1">
+            <a:schemeClr val="accent1"/>
+          </a:fillRef>
+          <a:effectRef idx="0">
+            <a:schemeClr val="accent1"/>
+          </a:effectRef>
+          <a:fontRef idx="minor">
+            <a:schemeClr val="lt1"/>
+          </a:fontRef>
+        </p:style>
+        <p:txBody>
+          <a:bodyPr rtlCol="0" anchor="ctr"/>
+          <a:lstStyle/>
+          <a:p>
+            <a:pPr algn="ctr"/>
+            <a:endParaRPr kumimoji="1" lang="ja-JP" altLang="en-US"/>
+          </a:p>
+        </p:txBody>
+      </p:sp>
+      <p:sp>
+        <p:nvSpPr>
+          <p:cNvPr id="11" name="テキスト ボックス 10">
+            <a:extLst>
+              <a:ext uri="{FF2B5EF4-FFF2-40B4-BE49-F238E27FC236}">
+                <a16:creationId xmlns:a16="http://schemas.microsoft.com/office/drawing/2014/main" id="{F5F2B2F6-BE52-4257-A7E6-F948EB626E67}"/>
+              </a:ext>
+            </a:extLst>
+          </p:cNvPr>
+          <p:cNvSpPr txBox="1"/>
+          <p:nvPr/>
+        </p:nvSpPr>
+        <p:spPr>
+          <a:xfrm>
+            <a:off x="7174184" y="3735950"/>
+            <a:ext cx="2432076" cy="338554"/>
+          </a:xfrm>
+          <a:prstGeom prst="rect">
+            <a:avLst/>
+          </a:prstGeom>
+          <a:solidFill>
+            <a:schemeClr val="bg1"/>
+          </a:solidFill>
+          <a:ln>
+            <a:solidFill>
+              <a:schemeClr val="tx1"/>
+            </a:solidFill>
+          </a:ln>
+        </p:spPr>
+        <p:txBody>
+          <a:bodyPr wrap="none" rtlCol="0">
+            <a:spAutoFit/>
+          </a:bodyPr>
+          <a:lstStyle/>
+          <a:p>
+            <a:r>
+              <a:rPr lang="en-US" altLang="ja-JP" sz="1600" b="1" dirty="0">
+                <a:solidFill>
+                  <a:srgbClr val="FF0000"/>
+                </a:solidFill>
+              </a:rPr>
+              <a:t>M Hit Stop Time</a:t>
+            </a:r>
+            <a:r>
+              <a:rPr lang="ja-JP" altLang="en-US" sz="1600" b="1" dirty="0">
+                <a:solidFill>
+                  <a:srgbClr val="FF0000"/>
+                </a:solidFill>
+              </a:rPr>
+              <a:t>を設定</a:t>
+            </a:r>
+            <a:endParaRPr lang="en-US" altLang="ja-JP" sz="1600" b="1" dirty="0">
+              <a:solidFill>
+                <a:srgbClr val="FF0000"/>
+              </a:solidFill>
+            </a:endParaRPr>
+          </a:p>
+        </p:txBody>
+      </p:sp>
+      <p:sp>
+        <p:nvSpPr>
+          <p:cNvPr id="12" name="正方形/長方形 11">
+            <a:extLst>
+              <a:ext uri="{FF2B5EF4-FFF2-40B4-BE49-F238E27FC236}">
+                <a16:creationId xmlns:a16="http://schemas.microsoft.com/office/drawing/2014/main" id="{DEE2F801-B6E9-4709-8B5B-F027E1811B6F}"/>
+              </a:ext>
+            </a:extLst>
+          </p:cNvPr>
+          <p:cNvSpPr/>
+          <p:nvPr/>
+        </p:nvSpPr>
+        <p:spPr>
+          <a:xfrm>
+            <a:off x="7174184" y="4132339"/>
+            <a:ext cx="3899790" cy="261861"/>
+          </a:xfrm>
+          <a:prstGeom prst="rect">
+            <a:avLst/>
+          </a:prstGeom>
+          <a:noFill/>
+          <a:ln w="38100">
+            <a:solidFill>
+              <a:srgbClr val="FF0000"/>
+            </a:solidFill>
+          </a:ln>
+        </p:spPr>
+        <p:style>
+          <a:lnRef idx="2">
+            <a:schemeClr val="accent1">
+              <a:shade val="50000"/>
+            </a:schemeClr>
+          </a:lnRef>
+          <a:fillRef idx="1">
+            <a:schemeClr val="accent1"/>
+          </a:fillRef>
+          <a:effectRef idx="0">
+            <a:schemeClr val="accent1"/>
+          </a:effectRef>
+          <a:fontRef idx="minor">
+            <a:schemeClr val="lt1"/>
+          </a:fontRef>
+        </p:style>
+        <p:txBody>
+          <a:bodyPr rtlCol="0" anchor="ctr"/>
+          <a:lstStyle/>
+          <a:p>
+            <a:pPr algn="ctr"/>
+            <a:endParaRPr kumimoji="1" lang="ja-JP" altLang="en-US"/>
+          </a:p>
+        </p:txBody>
+      </p:sp>
+      <p:pic>
+        <p:nvPicPr>
+          <p:cNvPr id="5" name="図 4">
+            <a:extLst>
+              <a:ext uri="{FF2B5EF4-FFF2-40B4-BE49-F238E27FC236}">
+                <a16:creationId xmlns:a16="http://schemas.microsoft.com/office/drawing/2014/main" id="{A78DC1DF-E98C-4CC1-8D80-49FE8976185A}"/>
+              </a:ext>
+            </a:extLst>
+          </p:cNvPr>
+          <p:cNvPicPr>
+            <a:picLocks noChangeAspect="1"/>
+          </p:cNvPicPr>
+          <p:nvPr/>
+        </p:nvPicPr>
+        <p:blipFill>
+          <a:blip r:embed="rId3"/>
+          <a:stretch>
+            <a:fillRect/>
+          </a:stretch>
+        </p:blipFill>
+        <p:spPr>
+          <a:xfrm>
+            <a:off x="567541" y="2187126"/>
+            <a:ext cx="5144218" cy="3400900"/>
+          </a:xfrm>
+          <a:prstGeom prst="rect">
+            <a:avLst/>
+          </a:prstGeom>
+        </p:spPr>
+      </p:pic>
+      <p:sp>
+        <p:nvSpPr>
+          <p:cNvPr id="13" name="テキスト ボックス 12">
+            <a:extLst>
+              <a:ext uri="{FF2B5EF4-FFF2-40B4-BE49-F238E27FC236}">
+                <a16:creationId xmlns:a16="http://schemas.microsoft.com/office/drawing/2014/main" id="{DC255C99-D8B2-447B-9EAF-617CFE6C3010}"/>
+              </a:ext>
+            </a:extLst>
+          </p:cNvPr>
+          <p:cNvSpPr txBox="1"/>
+          <p:nvPr/>
+        </p:nvSpPr>
+        <p:spPr>
+          <a:xfrm>
+            <a:off x="4132162" y="4472021"/>
+            <a:ext cx="2630848" cy="338554"/>
+          </a:xfrm>
+          <a:prstGeom prst="rect">
+            <a:avLst/>
+          </a:prstGeom>
+          <a:solidFill>
+            <a:schemeClr val="bg1"/>
+          </a:solidFill>
+          <a:ln>
+            <a:solidFill>
+              <a:schemeClr val="tx1"/>
+            </a:solidFill>
+          </a:ln>
+        </p:spPr>
+        <p:txBody>
+          <a:bodyPr wrap="none" rtlCol="0">
+            <a:spAutoFit/>
+          </a:bodyPr>
+          <a:lstStyle/>
+          <a:p>
+            <a:r>
+              <a:rPr lang="en-US" altLang="ja-JP" sz="1600" b="1" dirty="0" err="1">
+                <a:solidFill>
+                  <a:srgbClr val="FF0000"/>
+                </a:solidFill>
+              </a:rPr>
+              <a:t>BP_EnemyMush</a:t>
+            </a:r>
+            <a:r>
+              <a:rPr lang="ja-JP" altLang="en-US" sz="1600" b="1" dirty="0">
+                <a:solidFill>
+                  <a:srgbClr val="FF0000"/>
+                </a:solidFill>
+              </a:rPr>
+              <a:t>を開いて</a:t>
+            </a:r>
+            <a:endParaRPr lang="en-US" altLang="ja-JP" sz="1600" b="1" dirty="0">
+              <a:solidFill>
+                <a:srgbClr val="FF0000"/>
+              </a:solidFill>
+            </a:endParaRPr>
+          </a:p>
+        </p:txBody>
+      </p:sp>
+    </p:spTree>
+    <p:extLst>
+      <p:ext uri="{BB962C8B-B14F-4D97-AF65-F5344CB8AC3E}">
+        <p14:creationId xmlns:p14="http://schemas.microsoft.com/office/powerpoint/2010/main" val="3580522964"/>
+      </p:ext>
+    </p:extLst>
+  </p:cSld>
+  <p:clrMapOvr>
+    <a:masterClrMapping/>
+  </p:clrMapOvr>
+</p:sld>
+</file>
+
+<file path=ppt/slides/slide24.xml><?xml version="1.0" encoding="utf-8"?>
+<p:sld xmlns:a="http://schemas.openxmlformats.org/drawingml/2006/main" xmlns:r="http://schemas.openxmlformats.org/officeDocument/2006/relationships" xmlns:p="http://schemas.openxmlformats.org/presentationml/2006/main">
+  <p:cSld>
+    <p:spTree>
+      <p:nvGrpSpPr>
+        <p:cNvPr id="1" name=""/>
+        <p:cNvGrpSpPr/>
+        <p:nvPr/>
+      </p:nvGrpSpPr>
+      <p:grpSpPr>
+        <a:xfrm>
+          <a:off x="0" y="0"/>
+          <a:ext cx="0" cy="0"/>
+          <a:chOff x="0" y="0"/>
+          <a:chExt cx="0" cy="0"/>
+        </a:xfrm>
+      </p:grpSpPr>
+      <p:sp>
+        <p:nvSpPr>
+          <p:cNvPr id="4" name="テキスト ボックス 3">
+            <a:extLst>
+              <a:ext uri="{FF2B5EF4-FFF2-40B4-BE49-F238E27FC236}">
+                <a16:creationId xmlns:a16="http://schemas.microsoft.com/office/drawing/2014/main" id="{5A13BF46-B8C5-48AA-8308-C9ECFF431A18}"/>
+              </a:ext>
+            </a:extLst>
+          </p:cNvPr>
+          <p:cNvSpPr txBox="1"/>
+          <p:nvPr/>
+        </p:nvSpPr>
+        <p:spPr>
+          <a:xfrm>
+            <a:off x="567542" y="491954"/>
+            <a:ext cx="5109091" cy="584775"/>
+          </a:xfrm>
+          <a:prstGeom prst="rect">
+            <a:avLst/>
+          </a:prstGeom>
+          <a:noFill/>
+        </p:spPr>
+        <p:txBody>
+          <a:bodyPr wrap="none" rtlCol="0">
+            <a:spAutoFit/>
+          </a:bodyPr>
+          <a:lstStyle/>
+          <a:p>
+            <a:r>
+              <a:rPr kumimoji="1" lang="ja-JP" altLang="en-US" sz="3200" b="1" u="sng" dirty="0"/>
+              <a:t>アクションゲーム制作体験</a:t>
+            </a:r>
+            <a:endParaRPr kumimoji="1" lang="en-US" altLang="ja-JP" sz="3200" b="1" u="sng" dirty="0"/>
+          </a:p>
+        </p:txBody>
+      </p:sp>
+      <p:sp>
+        <p:nvSpPr>
+          <p:cNvPr id="6" name="テキスト ボックス 5">
+            <a:extLst>
+              <a:ext uri="{FF2B5EF4-FFF2-40B4-BE49-F238E27FC236}">
+                <a16:creationId xmlns:a16="http://schemas.microsoft.com/office/drawing/2014/main" id="{55830AD6-028B-4C4E-80BF-B70DFC1C3A46}"/>
+              </a:ext>
+            </a:extLst>
+          </p:cNvPr>
+          <p:cNvSpPr txBox="1"/>
+          <p:nvPr/>
+        </p:nvSpPr>
+        <p:spPr>
+          <a:xfrm>
+            <a:off x="567542" y="1216429"/>
+            <a:ext cx="6340197" cy="461665"/>
+          </a:xfrm>
+          <a:prstGeom prst="rect">
+            <a:avLst/>
+          </a:prstGeom>
+          <a:noFill/>
+        </p:spPr>
+        <p:txBody>
+          <a:bodyPr wrap="none" rtlCol="0">
+            <a:spAutoFit/>
+          </a:bodyPr>
+          <a:lstStyle/>
+          <a:p>
+            <a:r>
+              <a:rPr lang="ja-JP" altLang="en-US" sz="2400" dirty="0"/>
+              <a:t>敵がやられたら</a:t>
+            </a:r>
+            <a:r>
+              <a:rPr lang="ja-JP" altLang="en-US" sz="2400" b="1" dirty="0">
+                <a:solidFill>
+                  <a:srgbClr val="FF0000"/>
+                </a:solidFill>
+              </a:rPr>
+              <a:t>吹っ飛ぶ</a:t>
+            </a:r>
+            <a:r>
+              <a:rPr lang="ja-JP" altLang="en-US" sz="2400" dirty="0"/>
+              <a:t>ようにしましょう。</a:t>
+            </a:r>
+            <a:endParaRPr lang="en-US" altLang="ja-JP" sz="2400" dirty="0"/>
+          </a:p>
+        </p:txBody>
+      </p:sp>
+      <p:sp>
+        <p:nvSpPr>
+          <p:cNvPr id="7" name="テキスト ボックス 6">
+            <a:extLst>
+              <a:ext uri="{FF2B5EF4-FFF2-40B4-BE49-F238E27FC236}">
+                <a16:creationId xmlns:a16="http://schemas.microsoft.com/office/drawing/2014/main" id="{9F53DD6C-E45D-4399-9D63-AE50E346FE78}"/>
+              </a:ext>
+            </a:extLst>
+          </p:cNvPr>
+          <p:cNvSpPr txBox="1"/>
+          <p:nvPr/>
+        </p:nvSpPr>
+        <p:spPr>
+          <a:xfrm>
+            <a:off x="567542" y="5535049"/>
+            <a:ext cx="9765815" cy="830997"/>
+          </a:xfrm>
+          <a:prstGeom prst="rect">
+            <a:avLst/>
+          </a:prstGeom>
+          <a:noFill/>
+        </p:spPr>
+        <p:txBody>
+          <a:bodyPr wrap="none" rtlCol="0">
+            <a:spAutoFit/>
+          </a:bodyPr>
+          <a:lstStyle/>
+          <a:p>
+            <a:r>
+              <a:rPr lang="ja-JP" altLang="en-US" sz="2400" dirty="0"/>
+              <a:t>書いたら動作確認をしましょう。</a:t>
+            </a:r>
+            <a:endParaRPr lang="en-US" altLang="ja-JP" sz="2400" dirty="0"/>
+          </a:p>
+          <a:p>
+            <a:r>
+              <a:rPr lang="en-US" altLang="ja-JP" sz="2400" dirty="0"/>
+              <a:t>C++</a:t>
+            </a:r>
+            <a:r>
+              <a:rPr lang="ja-JP" altLang="en-US" sz="2400" dirty="0"/>
+              <a:t>を書いたので、</a:t>
+            </a:r>
+            <a:r>
+              <a:rPr lang="ja-JP" altLang="en-US" sz="2400" b="1" dirty="0">
+                <a:solidFill>
+                  <a:srgbClr val="FF0000"/>
+                </a:solidFill>
+              </a:rPr>
+              <a:t>保存、コンパイルを忘れないように</a:t>
+            </a:r>
+            <a:r>
+              <a:rPr lang="ja-JP" altLang="en-US" sz="2400" dirty="0"/>
+              <a:t>しましょう。</a:t>
+            </a:r>
+            <a:endParaRPr lang="en-US" altLang="ja-JP" sz="2400" dirty="0"/>
+          </a:p>
+        </p:txBody>
+      </p:sp>
+      <p:pic>
+        <p:nvPicPr>
+          <p:cNvPr id="3" name="図 2">
+            <a:extLst>
+              <a:ext uri="{FF2B5EF4-FFF2-40B4-BE49-F238E27FC236}">
+                <a16:creationId xmlns:a16="http://schemas.microsoft.com/office/drawing/2014/main" id="{B6C5D076-24F0-45A8-8C2F-9AC36311B0EB}"/>
+              </a:ext>
+            </a:extLst>
+          </p:cNvPr>
+          <p:cNvPicPr>
+            <a:picLocks noChangeAspect="1"/>
+          </p:cNvPicPr>
+          <p:nvPr/>
+        </p:nvPicPr>
+        <p:blipFill>
+          <a:blip r:embed="rId2"/>
+          <a:stretch>
+            <a:fillRect/>
+          </a:stretch>
+        </p:blipFill>
+        <p:spPr>
+          <a:xfrm>
+            <a:off x="567542" y="1748009"/>
+            <a:ext cx="7907591" cy="3717125"/>
+          </a:xfrm>
+          <a:prstGeom prst="rect">
+            <a:avLst/>
+          </a:prstGeom>
+        </p:spPr>
+      </p:pic>
+      <p:sp>
+        <p:nvSpPr>
+          <p:cNvPr id="8" name="正方形/長方形 7">
+            <a:extLst>
+              <a:ext uri="{FF2B5EF4-FFF2-40B4-BE49-F238E27FC236}">
+                <a16:creationId xmlns:a16="http://schemas.microsoft.com/office/drawing/2014/main" id="{18853624-D3FF-4CBF-981D-F1F0115CA137}"/>
+              </a:ext>
+            </a:extLst>
+          </p:cNvPr>
+          <p:cNvSpPr/>
+          <p:nvPr/>
+        </p:nvSpPr>
+        <p:spPr>
+          <a:xfrm>
+            <a:off x="1524000" y="4360333"/>
+            <a:ext cx="2675468" cy="550334"/>
+          </a:xfrm>
+          <a:prstGeom prst="rect">
+            <a:avLst/>
+          </a:prstGeom>
+          <a:noFill/>
+          <a:ln w="38100">
+            <a:solidFill>
+              <a:srgbClr val="FF0000"/>
+            </a:solidFill>
+          </a:ln>
+        </p:spPr>
+        <p:style>
+          <a:lnRef idx="2">
+            <a:schemeClr val="accent1">
+              <a:shade val="50000"/>
+            </a:schemeClr>
+          </a:lnRef>
+          <a:fillRef idx="1">
+            <a:schemeClr val="accent1"/>
+          </a:fillRef>
+          <a:effectRef idx="0">
+            <a:schemeClr val="accent1"/>
+          </a:effectRef>
+          <a:fontRef idx="minor">
+            <a:schemeClr val="lt1"/>
+          </a:fontRef>
+        </p:style>
+        <p:txBody>
+          <a:bodyPr rtlCol="0" anchor="ctr"/>
+          <a:lstStyle/>
+          <a:p>
+            <a:pPr algn="ctr"/>
+            <a:endParaRPr kumimoji="1" lang="ja-JP" altLang="en-US"/>
+          </a:p>
+        </p:txBody>
+      </p:sp>
+      <p:sp>
+        <p:nvSpPr>
+          <p:cNvPr id="9" name="テキスト ボックス 8">
+            <a:extLst>
+              <a:ext uri="{FF2B5EF4-FFF2-40B4-BE49-F238E27FC236}">
+                <a16:creationId xmlns:a16="http://schemas.microsoft.com/office/drawing/2014/main" id="{A7FA4E2D-F36A-43D0-840B-E22EA7A1261E}"/>
+              </a:ext>
+            </a:extLst>
+          </p:cNvPr>
+          <p:cNvSpPr txBox="1"/>
+          <p:nvPr/>
+        </p:nvSpPr>
+        <p:spPr>
+          <a:xfrm>
+            <a:off x="5898787" y="1748009"/>
+            <a:ext cx="2576346" cy="461665"/>
+          </a:xfrm>
+          <a:prstGeom prst="rect">
+            <a:avLst/>
+          </a:prstGeom>
+          <a:noFill/>
+        </p:spPr>
+        <p:txBody>
+          <a:bodyPr wrap="none" rtlCol="0">
+            <a:spAutoFit/>
+          </a:bodyPr>
+          <a:lstStyle/>
+          <a:p>
+            <a:r>
+              <a:rPr lang="en-US" altLang="ja-JP" sz="2400" b="1" dirty="0">
+                <a:solidFill>
+                  <a:srgbClr val="FF0000"/>
+                </a:solidFill>
+              </a:rPr>
+              <a:t>EnemyBase.cpp</a:t>
+            </a:r>
+          </a:p>
+        </p:txBody>
+      </p:sp>
+    </p:spTree>
+    <p:extLst>
+      <p:ext uri="{BB962C8B-B14F-4D97-AF65-F5344CB8AC3E}">
+        <p14:creationId xmlns:p14="http://schemas.microsoft.com/office/powerpoint/2010/main" val="805065936"/>
+      </p:ext>
+    </p:extLst>
+  </p:cSld>
+  <p:clrMapOvr>
+    <a:masterClrMapping/>
+  </p:clrMapOvr>
+</p:sld>
+</file>
+
+<file path=ppt/slides/slide25.xml><?xml version="1.0" encoding="utf-8"?>
+<p:sld xmlns:a="http://schemas.openxmlformats.org/drawingml/2006/main" xmlns:r="http://schemas.openxmlformats.org/officeDocument/2006/relationships" xmlns:p="http://schemas.openxmlformats.org/presentationml/2006/main">
+  <p:cSld>
+    <p:spTree>
+      <p:nvGrpSpPr>
+        <p:cNvPr id="1" name=""/>
+        <p:cNvGrpSpPr/>
+        <p:nvPr/>
+      </p:nvGrpSpPr>
+      <p:grpSpPr>
+        <a:xfrm>
+          <a:off x="0" y="0"/>
+          <a:ext cx="0" cy="0"/>
+          <a:chOff x="0" y="0"/>
+          <a:chExt cx="0" cy="0"/>
+        </a:xfrm>
+      </p:grpSpPr>
+      <p:sp>
+        <p:nvSpPr>
+          <p:cNvPr id="4" name="テキスト ボックス 3">
+            <a:extLst>
+              <a:ext uri="{FF2B5EF4-FFF2-40B4-BE49-F238E27FC236}">
+                <a16:creationId xmlns:a16="http://schemas.microsoft.com/office/drawing/2014/main" id="{5A13BF46-B8C5-48AA-8308-C9ECFF431A18}"/>
+              </a:ext>
+            </a:extLst>
+          </p:cNvPr>
+          <p:cNvSpPr txBox="1"/>
+          <p:nvPr/>
+        </p:nvSpPr>
+        <p:spPr>
+          <a:xfrm>
+            <a:off x="567542" y="491954"/>
+            <a:ext cx="5109091" cy="584775"/>
+          </a:xfrm>
+          <a:prstGeom prst="rect">
+            <a:avLst/>
+          </a:prstGeom>
+          <a:noFill/>
+        </p:spPr>
+        <p:txBody>
+          <a:bodyPr wrap="none" rtlCol="0">
+            <a:spAutoFit/>
+          </a:bodyPr>
+          <a:lstStyle/>
+          <a:p>
+            <a:r>
+              <a:rPr kumimoji="1" lang="ja-JP" altLang="en-US" sz="3200" b="1" u="sng" dirty="0"/>
+              <a:t>アクションゲーム制作体験</a:t>
+            </a:r>
+            <a:endParaRPr kumimoji="1" lang="en-US" altLang="ja-JP" sz="3200" b="1" u="sng" dirty="0"/>
+          </a:p>
+        </p:txBody>
+      </p:sp>
+      <p:sp>
+        <p:nvSpPr>
+          <p:cNvPr id="6" name="テキスト ボックス 5">
+            <a:extLst>
+              <a:ext uri="{FF2B5EF4-FFF2-40B4-BE49-F238E27FC236}">
+                <a16:creationId xmlns:a16="http://schemas.microsoft.com/office/drawing/2014/main" id="{55830AD6-028B-4C4E-80BF-B70DFC1C3A46}"/>
+              </a:ext>
+            </a:extLst>
+          </p:cNvPr>
+          <p:cNvSpPr txBox="1"/>
+          <p:nvPr/>
+        </p:nvSpPr>
+        <p:spPr>
+          <a:xfrm>
+            <a:off x="567542" y="1216429"/>
+            <a:ext cx="6955750" cy="461665"/>
+          </a:xfrm>
+          <a:prstGeom prst="rect">
+            <a:avLst/>
+          </a:prstGeom>
+          <a:noFill/>
+        </p:spPr>
+        <p:txBody>
+          <a:bodyPr wrap="none" rtlCol="0">
+            <a:spAutoFit/>
+          </a:bodyPr>
+          <a:lstStyle/>
+          <a:p>
+            <a:r>
+              <a:rPr lang="ja-JP" altLang="en-US" sz="2400" dirty="0"/>
+              <a:t>敵が消えるときにもエフェクトを出しましょう。</a:t>
+            </a:r>
+            <a:endParaRPr lang="en-US" altLang="ja-JP" sz="2400" dirty="0"/>
+          </a:p>
+        </p:txBody>
+      </p:sp>
+      <p:sp>
+        <p:nvSpPr>
+          <p:cNvPr id="7" name="テキスト ボックス 6">
+            <a:extLst>
+              <a:ext uri="{FF2B5EF4-FFF2-40B4-BE49-F238E27FC236}">
+                <a16:creationId xmlns:a16="http://schemas.microsoft.com/office/drawing/2014/main" id="{9F53DD6C-E45D-4399-9D63-AE50E346FE78}"/>
+              </a:ext>
+            </a:extLst>
+          </p:cNvPr>
+          <p:cNvSpPr txBox="1"/>
+          <p:nvPr/>
+        </p:nvSpPr>
+        <p:spPr>
+          <a:xfrm>
+            <a:off x="567541" y="5763029"/>
+            <a:ext cx="9110186" cy="461665"/>
+          </a:xfrm>
+          <a:prstGeom prst="rect">
+            <a:avLst/>
+          </a:prstGeom>
+          <a:noFill/>
+        </p:spPr>
+        <p:txBody>
+          <a:bodyPr wrap="none" rtlCol="0">
+            <a:spAutoFit/>
+          </a:bodyPr>
+          <a:lstStyle/>
+          <a:p>
+            <a:r>
+              <a:rPr lang="ja-JP" altLang="en-US" sz="2400" b="1" dirty="0">
+                <a:solidFill>
+                  <a:srgbClr val="FF0000"/>
+                </a:solidFill>
+              </a:rPr>
+              <a:t>最初より、敵をやっつけることが楽しくなっているはずです！！</a:t>
+            </a:r>
+            <a:endParaRPr lang="en-US" altLang="ja-JP" sz="2400" b="1" dirty="0">
+              <a:solidFill>
+                <a:srgbClr val="FF0000"/>
+              </a:solidFill>
+            </a:endParaRPr>
+          </a:p>
+        </p:txBody>
+      </p:sp>
+      <p:pic>
+        <p:nvPicPr>
+          <p:cNvPr id="5" name="図 4">
+            <a:extLst>
+              <a:ext uri="{FF2B5EF4-FFF2-40B4-BE49-F238E27FC236}">
+                <a16:creationId xmlns:a16="http://schemas.microsoft.com/office/drawing/2014/main" id="{5FF55E57-2E7A-4FD5-9497-B27586702A4D}"/>
+              </a:ext>
+            </a:extLst>
+          </p:cNvPr>
+          <p:cNvPicPr>
+            <a:picLocks noChangeAspect="1"/>
+          </p:cNvPicPr>
+          <p:nvPr/>
+        </p:nvPicPr>
+        <p:blipFill>
+          <a:blip r:embed="rId2"/>
+          <a:stretch>
+            <a:fillRect/>
+          </a:stretch>
+        </p:blipFill>
+        <p:spPr>
+          <a:xfrm>
+            <a:off x="567541" y="2035996"/>
+            <a:ext cx="5496692" cy="3267531"/>
+          </a:xfrm>
+          <a:prstGeom prst="rect">
+            <a:avLst/>
+          </a:prstGeom>
+        </p:spPr>
+      </p:pic>
+      <p:pic>
+        <p:nvPicPr>
+          <p:cNvPr id="8" name="図 7">
+            <a:extLst>
+              <a:ext uri="{FF2B5EF4-FFF2-40B4-BE49-F238E27FC236}">
+                <a16:creationId xmlns:a16="http://schemas.microsoft.com/office/drawing/2014/main" id="{9E73C815-7129-444C-814B-F92BFD1D9DDE}"/>
+              </a:ext>
+            </a:extLst>
+          </p:cNvPr>
+          <p:cNvPicPr>
+            <a:picLocks noChangeAspect="1"/>
+          </p:cNvPicPr>
+          <p:nvPr/>
+        </p:nvPicPr>
+        <p:blipFill>
+          <a:blip r:embed="rId3"/>
+          <a:stretch>
+            <a:fillRect/>
+          </a:stretch>
+        </p:blipFill>
+        <p:spPr>
+          <a:xfrm>
+            <a:off x="7070874" y="2035996"/>
+            <a:ext cx="4553585" cy="2343477"/>
+          </a:xfrm>
+          <a:prstGeom prst="rect">
+            <a:avLst/>
+          </a:prstGeom>
+        </p:spPr>
+      </p:pic>
+      <p:sp>
+        <p:nvSpPr>
+          <p:cNvPr id="9" name="テキスト ボックス 8">
+            <a:extLst>
+              <a:ext uri="{FF2B5EF4-FFF2-40B4-BE49-F238E27FC236}">
+                <a16:creationId xmlns:a16="http://schemas.microsoft.com/office/drawing/2014/main" id="{81596496-C899-4A3D-8D4E-22CBB49B4613}"/>
+              </a:ext>
+            </a:extLst>
+          </p:cNvPr>
+          <p:cNvSpPr txBox="1"/>
+          <p:nvPr/>
+        </p:nvSpPr>
+        <p:spPr>
+          <a:xfrm>
+            <a:off x="4221809" y="4379473"/>
+            <a:ext cx="2630848" cy="338554"/>
+          </a:xfrm>
+          <a:prstGeom prst="rect">
+            <a:avLst/>
+          </a:prstGeom>
+          <a:solidFill>
+            <a:schemeClr val="bg1"/>
+          </a:solidFill>
+          <a:ln>
+            <a:solidFill>
+              <a:schemeClr val="tx1"/>
+            </a:solidFill>
+          </a:ln>
+        </p:spPr>
+        <p:txBody>
+          <a:bodyPr wrap="none" rtlCol="0">
+            <a:spAutoFit/>
+          </a:bodyPr>
+          <a:lstStyle/>
+          <a:p>
+            <a:r>
+              <a:rPr lang="en-US" altLang="ja-JP" sz="1600" b="1" dirty="0" err="1">
+                <a:solidFill>
+                  <a:srgbClr val="FF0000"/>
+                </a:solidFill>
+              </a:rPr>
+              <a:t>BP_EnemyMush</a:t>
+            </a:r>
+            <a:r>
+              <a:rPr lang="ja-JP" altLang="en-US" sz="1600" b="1" dirty="0">
+                <a:solidFill>
+                  <a:srgbClr val="FF0000"/>
+                </a:solidFill>
+              </a:rPr>
+              <a:t>を開いて</a:t>
+            </a:r>
+            <a:endParaRPr lang="en-US" altLang="ja-JP" sz="1600" b="1" dirty="0">
+              <a:solidFill>
+                <a:srgbClr val="FF0000"/>
+              </a:solidFill>
+            </a:endParaRPr>
+          </a:p>
+        </p:txBody>
+      </p:sp>
+      <p:sp>
+        <p:nvSpPr>
+          <p:cNvPr id="10" name="テキスト ボックス 9">
+            <a:extLst>
+              <a:ext uri="{FF2B5EF4-FFF2-40B4-BE49-F238E27FC236}">
+                <a16:creationId xmlns:a16="http://schemas.microsoft.com/office/drawing/2014/main" id="{162E0DA4-D512-4FEB-A8E6-325F8E7490EC}"/>
+              </a:ext>
+            </a:extLst>
+          </p:cNvPr>
+          <p:cNvSpPr txBox="1"/>
+          <p:nvPr/>
+        </p:nvSpPr>
+        <p:spPr>
+          <a:xfrm>
+            <a:off x="7070874" y="2723096"/>
+            <a:ext cx="2239716" cy="338554"/>
+          </a:xfrm>
+          <a:prstGeom prst="rect">
+            <a:avLst/>
+          </a:prstGeom>
+          <a:solidFill>
+            <a:schemeClr val="bg1"/>
+          </a:solidFill>
+          <a:ln>
+            <a:solidFill>
+              <a:schemeClr val="tx1"/>
+            </a:solidFill>
+          </a:ln>
+        </p:spPr>
+        <p:txBody>
+          <a:bodyPr wrap="none" rtlCol="0">
+            <a:spAutoFit/>
+          </a:bodyPr>
+          <a:lstStyle/>
+          <a:p>
+            <a:r>
+              <a:rPr lang="en-US" altLang="ja-JP" sz="1600" b="1" dirty="0">
+                <a:solidFill>
+                  <a:srgbClr val="FF0000"/>
+                </a:solidFill>
+              </a:rPr>
+              <a:t>M Dead Effect</a:t>
+            </a:r>
+            <a:r>
+              <a:rPr lang="ja-JP" altLang="en-US" sz="1600" b="1" dirty="0">
+                <a:solidFill>
+                  <a:srgbClr val="FF0000"/>
+                </a:solidFill>
+              </a:rPr>
+              <a:t>を設定</a:t>
+            </a:r>
+            <a:endParaRPr lang="en-US" altLang="ja-JP" sz="1600" b="1" dirty="0">
+              <a:solidFill>
+                <a:srgbClr val="FF0000"/>
+              </a:solidFill>
+            </a:endParaRPr>
+          </a:p>
+        </p:txBody>
+      </p:sp>
+      <p:sp>
+        <p:nvSpPr>
+          <p:cNvPr id="11" name="正方形/長方形 10">
+            <a:extLst>
+              <a:ext uri="{FF2B5EF4-FFF2-40B4-BE49-F238E27FC236}">
+                <a16:creationId xmlns:a16="http://schemas.microsoft.com/office/drawing/2014/main" id="{31DFA8E7-A630-4486-B6C0-D7420AD62D6C}"/>
+              </a:ext>
+            </a:extLst>
+          </p:cNvPr>
+          <p:cNvSpPr/>
+          <p:nvPr/>
+        </p:nvSpPr>
+        <p:spPr>
+          <a:xfrm>
+            <a:off x="8839200" y="3061650"/>
+            <a:ext cx="2675468" cy="595950"/>
+          </a:xfrm>
+          <a:prstGeom prst="rect">
+            <a:avLst/>
+          </a:prstGeom>
+          <a:noFill/>
+          <a:ln w="38100">
+            <a:solidFill>
+              <a:srgbClr val="FF0000"/>
+            </a:solidFill>
+          </a:ln>
+        </p:spPr>
+        <p:style>
+          <a:lnRef idx="2">
+            <a:schemeClr val="accent1">
+              <a:shade val="50000"/>
+            </a:schemeClr>
+          </a:lnRef>
+          <a:fillRef idx="1">
+            <a:schemeClr val="accent1"/>
+          </a:fillRef>
+          <a:effectRef idx="0">
+            <a:schemeClr val="accent1"/>
+          </a:effectRef>
+          <a:fontRef idx="minor">
+            <a:schemeClr val="lt1"/>
+          </a:fontRef>
+        </p:style>
+        <p:txBody>
+          <a:bodyPr rtlCol="0" anchor="ctr"/>
+          <a:lstStyle/>
+          <a:p>
+            <a:pPr algn="ctr"/>
+            <a:endParaRPr kumimoji="1" lang="ja-JP" altLang="en-US"/>
+          </a:p>
+        </p:txBody>
+      </p:sp>
+    </p:spTree>
+    <p:extLst>
+      <p:ext uri="{BB962C8B-B14F-4D97-AF65-F5344CB8AC3E}">
+        <p14:creationId xmlns:p14="http://schemas.microsoft.com/office/powerpoint/2010/main" val="1378075712"/>
+      </p:ext>
+    </p:extLst>
+  </p:cSld>
+  <p:clrMapOvr>
+    <a:masterClrMapping/>
+  </p:clrMapOvr>
+</p:sld>
+</file>
+
+<file path=ppt/slides/slide26.xml><?xml version="1.0" encoding="utf-8"?>
+<p:sld xmlns:a="http://schemas.openxmlformats.org/drawingml/2006/main" xmlns:r="http://schemas.openxmlformats.org/officeDocument/2006/relationships" xmlns:p="http://schemas.openxmlformats.org/presentationml/2006/main">
+  <p:cSld>
+    <p:spTree>
+      <p:nvGrpSpPr>
+        <p:cNvPr id="1" name=""/>
+        <p:cNvGrpSpPr/>
+        <p:nvPr/>
+      </p:nvGrpSpPr>
+      <p:grpSpPr>
+        <a:xfrm>
+          <a:off x="0" y="0"/>
+          <a:ext cx="0" cy="0"/>
+          <a:chOff x="0" y="0"/>
+          <a:chExt cx="0" cy="0"/>
+        </a:xfrm>
+      </p:grpSpPr>
+      <p:sp>
+        <p:nvSpPr>
+          <p:cNvPr id="4" name="テキスト ボックス 3">
+            <a:extLst>
+              <a:ext uri="{FF2B5EF4-FFF2-40B4-BE49-F238E27FC236}">
+                <a16:creationId xmlns:a16="http://schemas.microsoft.com/office/drawing/2014/main" id="{5A13BF46-B8C5-48AA-8308-C9ECFF431A18}"/>
+              </a:ext>
+            </a:extLst>
+          </p:cNvPr>
+          <p:cNvSpPr txBox="1"/>
+          <p:nvPr/>
+        </p:nvSpPr>
+        <p:spPr>
+          <a:xfrm>
+            <a:off x="567542" y="491954"/>
+            <a:ext cx="5109091" cy="584775"/>
+          </a:xfrm>
+          <a:prstGeom prst="rect">
+            <a:avLst/>
+          </a:prstGeom>
+          <a:noFill/>
+        </p:spPr>
+        <p:txBody>
+          <a:bodyPr wrap="none" rtlCol="0">
+            <a:spAutoFit/>
+          </a:bodyPr>
+          <a:lstStyle/>
+          <a:p>
+            <a:r>
+              <a:rPr kumimoji="1" lang="ja-JP" altLang="en-US" sz="3200" b="1" u="sng" dirty="0"/>
+              <a:t>アクションゲーム制作体験</a:t>
+            </a:r>
+            <a:endParaRPr kumimoji="1" lang="en-US" altLang="ja-JP" sz="3200" b="1" u="sng" dirty="0"/>
+          </a:p>
+        </p:txBody>
+      </p:sp>
+      <p:sp>
+        <p:nvSpPr>
+          <p:cNvPr id="6" name="テキスト ボックス 5">
+            <a:extLst>
+              <a:ext uri="{FF2B5EF4-FFF2-40B4-BE49-F238E27FC236}">
+                <a16:creationId xmlns:a16="http://schemas.microsoft.com/office/drawing/2014/main" id="{55830AD6-028B-4C4E-80BF-B70DFC1C3A46}"/>
+              </a:ext>
+            </a:extLst>
+          </p:cNvPr>
+          <p:cNvSpPr txBox="1"/>
+          <p:nvPr/>
+        </p:nvSpPr>
+        <p:spPr>
+          <a:xfrm>
+            <a:off x="567542" y="1216429"/>
+            <a:ext cx="6340197" cy="2677656"/>
+          </a:xfrm>
+          <a:prstGeom prst="rect">
+            <a:avLst/>
+          </a:prstGeom>
+          <a:noFill/>
+        </p:spPr>
+        <p:txBody>
+          <a:bodyPr wrap="none" rtlCol="0">
+            <a:spAutoFit/>
+          </a:bodyPr>
+          <a:lstStyle/>
+          <a:p>
+            <a:r>
+              <a:rPr lang="ja-JP" altLang="en-US" sz="2400" dirty="0"/>
+              <a:t>ステージを進めて遊んでみましょう！</a:t>
+            </a:r>
+            <a:endParaRPr lang="en-US" altLang="ja-JP" sz="2400" dirty="0"/>
+          </a:p>
+          <a:p>
+            <a:endParaRPr lang="en-US" altLang="ja-JP" sz="2400" dirty="0"/>
+          </a:p>
+          <a:p>
+            <a:r>
+              <a:rPr lang="ja-JP" altLang="en-US" sz="2400" b="1" dirty="0">
+                <a:solidFill>
+                  <a:srgbClr val="FF0000"/>
+                </a:solidFill>
+              </a:rPr>
+              <a:t>もっとこうしたら面白い！</a:t>
+            </a:r>
+            <a:endParaRPr lang="en-US" altLang="ja-JP" sz="2400" b="1" dirty="0">
+              <a:solidFill>
+                <a:srgbClr val="FF0000"/>
+              </a:solidFill>
+            </a:endParaRPr>
+          </a:p>
+          <a:p>
+            <a:r>
+              <a:rPr lang="ja-JP" altLang="en-US" sz="2400" b="1" dirty="0">
+                <a:solidFill>
+                  <a:srgbClr val="FF0000"/>
+                </a:solidFill>
+              </a:rPr>
+              <a:t>もっとこんなことがしたい！</a:t>
+            </a:r>
+            <a:endParaRPr lang="en-US" altLang="ja-JP" sz="2400" b="1" dirty="0">
+              <a:solidFill>
+                <a:srgbClr val="FF0000"/>
+              </a:solidFill>
+            </a:endParaRPr>
+          </a:p>
+          <a:p>
+            <a:r>
+              <a:rPr lang="ja-JP" altLang="en-US" sz="2400" dirty="0"/>
+              <a:t>など意見があればどんどん言ってください！</a:t>
+            </a:r>
+            <a:endParaRPr lang="en-US" altLang="ja-JP" sz="2400" dirty="0"/>
+          </a:p>
+          <a:p>
+            <a:endParaRPr lang="en-US" altLang="ja-JP" sz="2400" dirty="0"/>
+          </a:p>
+          <a:p>
+            <a:r>
+              <a:rPr lang="ja-JP" altLang="en-US" sz="2400" b="1" dirty="0">
+                <a:solidFill>
+                  <a:srgbClr val="00B050"/>
+                </a:solidFill>
+              </a:rPr>
+              <a:t>来年のオープンキャンパスに採用されるかも</a:t>
+            </a:r>
+            <a:endParaRPr lang="en-US" altLang="ja-JP" sz="2400" b="1" dirty="0">
+              <a:solidFill>
+                <a:srgbClr val="00B050"/>
+              </a:solidFill>
+            </a:endParaRPr>
+          </a:p>
+        </p:txBody>
+      </p:sp>
+    </p:spTree>
+    <p:extLst>
+      <p:ext uri="{BB962C8B-B14F-4D97-AF65-F5344CB8AC3E}">
+        <p14:creationId xmlns:p14="http://schemas.microsoft.com/office/powerpoint/2010/main" val="3705044167"/>
+      </p:ext>
+    </p:extLst>
+  </p:cSld>
+  <p:clrMapOvr>
+    <a:masterClrMapping/>
+  </p:clrMapOvr>
+</p:sld>
+</file>
+
+<file path=ppt/slides/slide27.xml><?xml version="1.0" encoding="utf-8"?>
+<p:sld xmlns:a="http://schemas.openxmlformats.org/drawingml/2006/main" xmlns:r="http://schemas.openxmlformats.org/officeDocument/2006/relationships" xmlns:p="http://schemas.openxmlformats.org/presentationml/2006/main">
+  <p:cSld>
+    <p:spTree>
+      <p:nvGrpSpPr>
+        <p:cNvPr id="1" name=""/>
+        <p:cNvGrpSpPr/>
+        <p:nvPr/>
+      </p:nvGrpSpPr>
+      <p:grpSpPr>
+        <a:xfrm>
+          <a:off x="0" y="0"/>
+          <a:ext cx="0" cy="0"/>
+          <a:chOff x="0" y="0"/>
+          <a:chExt cx="0" cy="0"/>
+        </a:xfrm>
+      </p:grpSpPr>
+      <p:sp>
+        <p:nvSpPr>
+          <p:cNvPr id="4" name="テキスト ボックス 3">
+            <a:extLst>
+              <a:ext uri="{FF2B5EF4-FFF2-40B4-BE49-F238E27FC236}">
+                <a16:creationId xmlns:a16="http://schemas.microsoft.com/office/drawing/2014/main" id="{5A13BF46-B8C5-48AA-8308-C9ECFF431A18}"/>
+              </a:ext>
+            </a:extLst>
+          </p:cNvPr>
+          <p:cNvSpPr txBox="1"/>
+          <p:nvPr/>
+        </p:nvSpPr>
+        <p:spPr>
+          <a:xfrm>
+            <a:off x="567542" y="491954"/>
+            <a:ext cx="5109091" cy="584775"/>
+          </a:xfrm>
+          <a:prstGeom prst="rect">
+            <a:avLst/>
+          </a:prstGeom>
+          <a:noFill/>
+        </p:spPr>
+        <p:txBody>
+          <a:bodyPr wrap="none" rtlCol="0">
+            <a:spAutoFit/>
+          </a:bodyPr>
+          <a:lstStyle/>
+          <a:p>
+            <a:r>
+              <a:rPr kumimoji="1" lang="ja-JP" altLang="en-US" sz="3200" b="1" u="sng" dirty="0"/>
+              <a:t>アクションゲーム制作体験</a:t>
+            </a:r>
+            <a:endParaRPr kumimoji="1" lang="en-US" altLang="ja-JP" sz="3200" b="1" u="sng" dirty="0"/>
+          </a:p>
+        </p:txBody>
+      </p:sp>
+      <p:sp>
+        <p:nvSpPr>
+          <p:cNvPr id="6" name="テキスト ボックス 5">
+            <a:extLst>
+              <a:ext uri="{FF2B5EF4-FFF2-40B4-BE49-F238E27FC236}">
+                <a16:creationId xmlns:a16="http://schemas.microsoft.com/office/drawing/2014/main" id="{55830AD6-028B-4C4E-80BF-B70DFC1C3A46}"/>
+              </a:ext>
+            </a:extLst>
+          </p:cNvPr>
+          <p:cNvSpPr txBox="1"/>
+          <p:nvPr/>
+        </p:nvSpPr>
+        <p:spPr>
+          <a:xfrm>
+            <a:off x="567542" y="1216429"/>
             <a:ext cx="8281434" cy="461665"/>
           </a:xfrm>
           <a:prstGeom prst="rect">
@@ -7820,7 +9210,7 @@
         <p:spPr>
           <a:xfrm>
             <a:off x="567542" y="5455889"/>
-            <a:ext cx="7571303" cy="830997"/>
+            <a:ext cx="6647974" cy="830997"/>
           </a:xfrm>
           <a:prstGeom prst="rect">
             <a:avLst/>
@@ -7842,7 +9232,7 @@
           <a:p>
             <a:r>
               <a:rPr lang="ja-JP" altLang="en-US" sz="2400" dirty="0"/>
-              <a:t>すぐにでも本格的なゲーム制作を体験しましょう！！</a:t>
+              <a:t>本格的なゲーム制作を体験しましょう！！</a:t>
             </a:r>
             <a:endParaRPr lang="en-US" altLang="ja-JP" sz="2400" dirty="0"/>
           </a:p>
@@ -7929,7 +9319,7 @@
         <p:spPr>
           <a:xfrm>
             <a:off x="567542" y="1216429"/>
-            <a:ext cx="9244838" cy="830997"/>
+            <a:ext cx="9395521" cy="461665"/>
           </a:xfrm>
           <a:prstGeom prst="rect">
             <a:avLst/>
@@ -7943,23 +9333,8 @@
           <a:lstStyle/>
           <a:p>
             <a:r>
-              <a:rPr kumimoji="1" lang="ja-JP" altLang="en-US" sz="2400" dirty="0"/>
-              <a:t>早速</a:t>
-            </a:r>
-            <a:r>
-              <a:rPr kumimoji="1" lang="en-US" altLang="ja-JP" sz="2400" dirty="0"/>
-              <a:t>Unreal Engine</a:t>
-            </a:r>
-            <a:r>
-              <a:rPr kumimoji="1" lang="ja-JP" altLang="en-US" sz="2400" dirty="0"/>
-              <a:t>を起動したいですが、</a:t>
-            </a:r>
-            <a:endParaRPr kumimoji="1" lang="en-US" altLang="ja-JP" sz="2400" dirty="0"/>
-          </a:p>
-          <a:p>
-            <a:r>
               <a:rPr lang="ja-JP" altLang="en-US" sz="2400" dirty="0"/>
-              <a:t>その前にプログラムを書くための</a:t>
+              <a:t>デスクトップから「</a:t>
             </a:r>
             <a:r>
               <a:rPr lang="en-US" altLang="ja-JP" sz="2400" b="1" dirty="0">
@@ -7967,106 +9342,32 @@
                   <a:srgbClr val="FF0000"/>
                 </a:solidFill>
               </a:rPr>
-              <a:t>Visual Studio</a:t>
+              <a:t>OC &gt; </a:t>
+            </a:r>
+            <a:r>
+              <a:rPr lang="en-US" altLang="ja-JP" sz="2400" b="1" dirty="0" err="1">
+                <a:solidFill>
+                  <a:srgbClr val="FF0000"/>
+                </a:solidFill>
+              </a:rPr>
+              <a:t>UnrealEngine</a:t>
+            </a:r>
+            <a:r>
+              <a:rPr lang="en-US" altLang="ja-JP" sz="2400" b="1" dirty="0">
+                <a:solidFill>
+                  <a:srgbClr val="FF0000"/>
+                </a:solidFill>
+              </a:rPr>
+              <a:t> &gt; Project</a:t>
             </a:r>
             <a:r>
               <a:rPr lang="ja-JP" altLang="en-US" sz="2400" dirty="0"/>
-              <a:t>から起動します。</a:t>
+              <a:t>」を開きます。</a:t>
             </a:r>
             <a:endParaRPr lang="en-US" altLang="ja-JP" sz="2400" dirty="0"/>
           </a:p>
         </p:txBody>
       </p:sp>
-      <p:pic>
-        <p:nvPicPr>
-          <p:cNvPr id="7" name="図 6">
-            <a:extLst>
-              <a:ext uri="{FF2B5EF4-FFF2-40B4-BE49-F238E27FC236}">
-                <a16:creationId xmlns:a16="http://schemas.microsoft.com/office/drawing/2014/main" id="{64F33BE2-9103-4B8F-A85D-19DE4DE89AA9}"/>
-              </a:ext>
-            </a:extLst>
-          </p:cNvPr>
-          <p:cNvPicPr>
-            <a:picLocks noChangeAspect="1"/>
-          </p:cNvPicPr>
-          <p:nvPr/>
-        </p:nvPicPr>
-        <p:blipFill>
-          <a:blip r:embed="rId2"/>
-          <a:stretch>
-            <a:fillRect/>
-          </a:stretch>
-        </p:blipFill>
-        <p:spPr>
-          <a:xfrm>
-            <a:off x="567542" y="2358914"/>
-            <a:ext cx="1247949" cy="1581371"/>
-          </a:xfrm>
-          <a:prstGeom prst="rect">
-            <a:avLst/>
-          </a:prstGeom>
-        </p:spPr>
-      </p:pic>
-      <p:pic>
-        <p:nvPicPr>
-          <p:cNvPr id="11" name="図 10">
-            <a:extLst>
-              <a:ext uri="{FF2B5EF4-FFF2-40B4-BE49-F238E27FC236}">
-                <a16:creationId xmlns:a16="http://schemas.microsoft.com/office/drawing/2014/main" id="{1443587E-1AC0-4958-B21B-274044360434}"/>
-              </a:ext>
-            </a:extLst>
-          </p:cNvPr>
-          <p:cNvPicPr>
-            <a:picLocks noChangeAspect="1"/>
-          </p:cNvPicPr>
-          <p:nvPr/>
-        </p:nvPicPr>
-        <p:blipFill>
-          <a:blip r:embed="rId3"/>
-          <a:stretch>
-            <a:fillRect/>
-          </a:stretch>
-        </p:blipFill>
-        <p:spPr>
-          <a:xfrm>
-            <a:off x="3579153" y="2358914"/>
-            <a:ext cx="1867161" cy="1295581"/>
-          </a:xfrm>
-          <a:prstGeom prst="rect">
-            <a:avLst/>
-          </a:prstGeom>
-        </p:spPr>
-      </p:pic>
-      <p:pic>
-        <p:nvPicPr>
-          <p:cNvPr id="13" name="図 12">
-            <a:extLst>
-              <a:ext uri="{FF2B5EF4-FFF2-40B4-BE49-F238E27FC236}">
-                <a16:creationId xmlns:a16="http://schemas.microsoft.com/office/drawing/2014/main" id="{9A374897-91F8-4717-8C5E-9E895A677FA1}"/>
-              </a:ext>
-            </a:extLst>
-          </p:cNvPr>
-          <p:cNvPicPr>
-            <a:picLocks noChangeAspect="1"/>
-          </p:cNvPicPr>
-          <p:nvPr/>
-        </p:nvPicPr>
-        <p:blipFill>
-          <a:blip r:embed="rId4"/>
-          <a:stretch>
-            <a:fillRect/>
-          </a:stretch>
-        </p:blipFill>
-        <p:spPr>
-          <a:xfrm>
-            <a:off x="7136191" y="2364514"/>
-            <a:ext cx="2010056" cy="3277057"/>
-          </a:xfrm>
-          <a:prstGeom prst="rect">
-            <a:avLst/>
-          </a:prstGeom>
-        </p:spPr>
-      </p:pic>
       <p:sp>
         <p:nvSpPr>
           <p:cNvPr id="14" name="矢印: 右 13">
@@ -8081,7 +9382,7 @@
         </p:nvSpPr>
         <p:spPr>
           <a:xfrm>
-            <a:off x="2033378" y="2734733"/>
+            <a:off x="2429657" y="2574737"/>
             <a:ext cx="1327890" cy="524934"/>
           </a:xfrm>
           <a:prstGeom prst="rightArrow">
@@ -8121,12 +9422,72 @@
           </a:p>
         </p:txBody>
       </p:sp>
-      <p:sp>
-        <p:nvSpPr>
-          <p:cNvPr id="15" name="矢印: 右 14">
-            <a:extLst>
-              <a:ext uri="{FF2B5EF4-FFF2-40B4-BE49-F238E27FC236}">
-                <a16:creationId xmlns:a16="http://schemas.microsoft.com/office/drawing/2014/main" id="{C0DD3849-656D-4893-9070-B0B9F458848E}"/>
+      <p:pic>
+        <p:nvPicPr>
+          <p:cNvPr id="3" name="図 2">
+            <a:extLst>
+              <a:ext uri="{FF2B5EF4-FFF2-40B4-BE49-F238E27FC236}">
+                <a16:creationId xmlns:a16="http://schemas.microsoft.com/office/drawing/2014/main" id="{41CAB0E2-8F5D-47C2-8D2E-7F5A7AA833EB}"/>
+              </a:ext>
+            </a:extLst>
+          </p:cNvPr>
+          <p:cNvPicPr>
+            <a:picLocks noChangeAspect="1"/>
+          </p:cNvPicPr>
+          <p:nvPr/>
+        </p:nvPicPr>
+        <p:blipFill>
+          <a:blip r:embed="rId2"/>
+          <a:stretch>
+            <a:fillRect/>
+          </a:stretch>
+        </p:blipFill>
+        <p:spPr>
+          <a:xfrm>
+            <a:off x="567542" y="1817794"/>
+            <a:ext cx="1646740" cy="2038820"/>
+          </a:xfrm>
+          <a:prstGeom prst="rect">
+            <a:avLst/>
+          </a:prstGeom>
+        </p:spPr>
+      </p:pic>
+      <p:pic>
+        <p:nvPicPr>
+          <p:cNvPr id="8" name="図 7">
+            <a:extLst>
+              <a:ext uri="{FF2B5EF4-FFF2-40B4-BE49-F238E27FC236}">
+                <a16:creationId xmlns:a16="http://schemas.microsoft.com/office/drawing/2014/main" id="{A633C0FC-CB10-49B0-A1DD-BCDB6CEDFE69}"/>
+              </a:ext>
+            </a:extLst>
+          </p:cNvPr>
+          <p:cNvPicPr>
+            <a:picLocks noChangeAspect="1"/>
+          </p:cNvPicPr>
+          <p:nvPr/>
+        </p:nvPicPr>
+        <p:blipFill>
+          <a:blip r:embed="rId3"/>
+          <a:stretch>
+            <a:fillRect/>
+          </a:stretch>
+        </p:blipFill>
+        <p:spPr>
+          <a:xfrm>
+            <a:off x="3972923" y="2272581"/>
+            <a:ext cx="2303061" cy="1262969"/>
+          </a:xfrm>
+          <a:prstGeom prst="rect">
+            <a:avLst/>
+          </a:prstGeom>
+        </p:spPr>
+      </p:pic>
+      <p:sp>
+        <p:nvSpPr>
+          <p:cNvPr id="17" name="矢印: 右 16">
+            <a:extLst>
+              <a:ext uri="{FF2B5EF4-FFF2-40B4-BE49-F238E27FC236}">
+                <a16:creationId xmlns:a16="http://schemas.microsoft.com/office/drawing/2014/main" id="{D38003D2-E36D-4BE4-A351-B770D43BDA29}"/>
               </a:ext>
             </a:extLst>
           </p:cNvPr>
@@ -8135,7 +9496,7 @@
         </p:nvSpPr>
         <p:spPr>
           <a:xfrm>
-            <a:off x="5676633" y="2744237"/>
+            <a:off x="6383092" y="2574737"/>
             <a:ext cx="1327890" cy="524934"/>
           </a:xfrm>
           <a:prstGeom prst="rightArrow">
@@ -8175,12 +9536,42 @@
           </a:p>
         </p:txBody>
       </p:sp>
-      <p:sp>
-        <p:nvSpPr>
-          <p:cNvPr id="16" name="吹き出し: 四角形 15">
-            <a:extLst>
-              <a:ext uri="{FF2B5EF4-FFF2-40B4-BE49-F238E27FC236}">
-                <a16:creationId xmlns:a16="http://schemas.microsoft.com/office/drawing/2014/main" id="{C2C699CD-3EC7-4FA4-B6B8-F809AC0EA476}"/>
+      <p:pic>
+        <p:nvPicPr>
+          <p:cNvPr id="10" name="図 9">
+            <a:extLst>
+              <a:ext uri="{FF2B5EF4-FFF2-40B4-BE49-F238E27FC236}">
+                <a16:creationId xmlns:a16="http://schemas.microsoft.com/office/drawing/2014/main" id="{5D4182D9-18F3-4F5D-AD97-5F854AE816BB}"/>
+              </a:ext>
+            </a:extLst>
+          </p:cNvPr>
+          <p:cNvPicPr>
+            <a:picLocks noChangeAspect="1"/>
+          </p:cNvPicPr>
+          <p:nvPr/>
+        </p:nvPicPr>
+        <p:blipFill>
+          <a:blip r:embed="rId4"/>
+          <a:stretch>
+            <a:fillRect/>
+          </a:stretch>
+        </p:blipFill>
+        <p:spPr>
+          <a:xfrm>
+            <a:off x="7846058" y="2266893"/>
+            <a:ext cx="2221084" cy="1262970"/>
+          </a:xfrm>
+          <a:prstGeom prst="rect">
+            <a:avLst/>
+          </a:prstGeom>
+        </p:spPr>
+      </p:pic>
+      <p:sp>
+        <p:nvSpPr>
+          <p:cNvPr id="18" name="吹き出し: 四角形 17">
+            <a:extLst>
+              <a:ext uri="{FF2B5EF4-FFF2-40B4-BE49-F238E27FC236}">
+                <a16:creationId xmlns:a16="http://schemas.microsoft.com/office/drawing/2014/main" id="{9B2922FC-BD9A-43A4-AE98-AE3C8C6E345E}"/>
               </a:ext>
             </a:extLst>
           </p:cNvPr>
@@ -8189,7 +9580,121 @@
         </p:nvSpPr>
         <p:spPr>
           <a:xfrm>
-            <a:off x="7228981" y="4487334"/>
+            <a:off x="1368395" y="1756594"/>
+            <a:ext cx="2389152" cy="431799"/>
+          </a:xfrm>
+          <a:prstGeom prst="wedgeRectCallout">
+            <a:avLst>
+              <a:gd name="adj1" fmla="val -30047"/>
+              <a:gd name="adj2" fmla="val 101716"/>
+            </a:avLst>
+          </a:prstGeom>
+          <a:ln/>
+        </p:spPr>
+        <p:style>
+          <a:lnRef idx="2">
+            <a:schemeClr val="accent5">
+              <a:shade val="50000"/>
+            </a:schemeClr>
+          </a:lnRef>
+          <a:fillRef idx="1">
+            <a:schemeClr val="accent5"/>
+          </a:fillRef>
+          <a:effectRef idx="0">
+            <a:schemeClr val="accent5"/>
+          </a:effectRef>
+          <a:fontRef idx="minor">
+            <a:schemeClr val="lt1"/>
+          </a:fontRef>
+        </p:style>
+        <p:txBody>
+          <a:bodyPr rtlCol="0" anchor="ctr"/>
+          <a:lstStyle/>
+          <a:p>
+            <a:pPr algn="ctr"/>
+            <a:r>
+              <a:rPr kumimoji="1" lang="ja-JP" altLang="en-US" b="1" dirty="0">
+                <a:solidFill>
+                  <a:schemeClr val="bg1"/>
+                </a:solidFill>
+              </a:rPr>
+              <a:t>ダブルクリック</a:t>
+            </a:r>
+          </a:p>
+        </p:txBody>
+      </p:sp>
+      <p:sp>
+        <p:nvSpPr>
+          <p:cNvPr id="19" name="吹き出し: 四角形 18">
+            <a:extLst>
+              <a:ext uri="{FF2B5EF4-FFF2-40B4-BE49-F238E27FC236}">
+                <a16:creationId xmlns:a16="http://schemas.microsoft.com/office/drawing/2014/main" id="{8AADCF41-7907-49C3-BF86-1C69967ABF9A}"/>
+              </a:ext>
+            </a:extLst>
+          </p:cNvPr>
+          <p:cNvSpPr/>
+          <p:nvPr/>
+        </p:nvSpPr>
+        <p:spPr>
+          <a:xfrm>
+            <a:off x="4820742" y="2188393"/>
+            <a:ext cx="2389152" cy="431799"/>
+          </a:xfrm>
+          <a:prstGeom prst="wedgeRectCallout">
+            <a:avLst>
+              <a:gd name="adj1" fmla="val -30047"/>
+              <a:gd name="adj2" fmla="val 101716"/>
+            </a:avLst>
+          </a:prstGeom>
+          <a:ln/>
+        </p:spPr>
+        <p:style>
+          <a:lnRef idx="2">
+            <a:schemeClr val="accent5">
+              <a:shade val="50000"/>
+            </a:schemeClr>
+          </a:lnRef>
+          <a:fillRef idx="1">
+            <a:schemeClr val="accent5"/>
+          </a:fillRef>
+          <a:effectRef idx="0">
+            <a:schemeClr val="accent5"/>
+          </a:effectRef>
+          <a:fontRef idx="minor">
+            <a:schemeClr val="lt1"/>
+          </a:fontRef>
+        </p:style>
+        <p:txBody>
+          <a:bodyPr rtlCol="0" anchor="ctr"/>
+          <a:lstStyle/>
+          <a:p>
+            <a:pPr algn="ctr"/>
+            <a:r>
+              <a:rPr kumimoji="1" lang="ja-JP" altLang="en-US" b="1" dirty="0">
+                <a:solidFill>
+                  <a:schemeClr val="bg1"/>
+                </a:solidFill>
+              </a:rPr>
+              <a:t>ダブルクリック</a:t>
+            </a:r>
+          </a:p>
+        </p:txBody>
+      </p:sp>
+      <p:sp>
+        <p:nvSpPr>
+          <p:cNvPr id="20" name="吹き出し: 四角形 19">
+            <a:extLst>
+              <a:ext uri="{FF2B5EF4-FFF2-40B4-BE49-F238E27FC236}">
+                <a16:creationId xmlns:a16="http://schemas.microsoft.com/office/drawing/2014/main" id="{95FF0D16-AC1F-44C7-92DD-6868C33E7F2F}"/>
+              </a:ext>
+            </a:extLst>
+          </p:cNvPr>
+          <p:cNvSpPr/>
+          <p:nvPr/>
+        </p:nvSpPr>
+        <p:spPr>
+          <a:xfrm>
+            <a:off x="8347146" y="2266893"/>
             <a:ext cx="2389152" cy="431799"/>
           </a:xfrm>
           <a:prstGeom prst="wedgeRectCallout">
@@ -8313,7 +9818,7 @@
         <p:spPr>
           <a:xfrm>
             <a:off x="567542" y="1216429"/>
-            <a:ext cx="7104830" cy="461665"/>
+            <a:ext cx="10224274" cy="1200329"/>
           </a:xfrm>
           <a:prstGeom prst="rect">
             <a:avLst/>
@@ -8327,24 +9832,58 @@
           <a:lstStyle/>
           <a:p>
             <a:r>
-              <a:rPr kumimoji="1" lang="ja-JP" altLang="en-US" sz="2400" b="1" dirty="0">
+              <a:rPr lang="en-US" altLang="ja-JP" sz="2400" b="1" dirty="0" err="1">
                 <a:solidFill>
-                  <a:srgbClr val="00B050"/>
+                  <a:srgbClr val="FF0000"/>
                 </a:solidFill>
               </a:rPr>
-              <a:t>実行ボタン</a:t>
-            </a:r>
-            <a:r>
-              <a:rPr kumimoji="1" lang="ja-JP" altLang="en-US" sz="2400" dirty="0"/>
-              <a:t>を押すと</a:t>
-            </a:r>
-            <a:r>
-              <a:rPr kumimoji="1" lang="en-US" altLang="ja-JP" sz="2400" dirty="0"/>
-              <a:t>Unreal Engine</a:t>
-            </a:r>
-            <a:r>
-              <a:rPr kumimoji="1" lang="ja-JP" altLang="en-US" sz="2400" dirty="0"/>
-              <a:t>が起動します。</a:t>
+              <a:t>Project.uproject</a:t>
+            </a:r>
+            <a:r>
+              <a:rPr lang="ja-JP" altLang="en-US" sz="2400" b="1" dirty="0">
+                <a:solidFill>
+                  <a:srgbClr val="FF0000"/>
+                </a:solidFill>
+              </a:rPr>
+              <a:t>を右クリック</a:t>
+            </a:r>
+            <a:r>
+              <a:rPr lang="ja-JP" altLang="en-US" sz="2400" dirty="0"/>
+              <a:t>し、</a:t>
+            </a:r>
+            <a:endParaRPr lang="en-US" altLang="ja-JP" sz="2400" dirty="0"/>
+          </a:p>
+          <a:p>
+            <a:r>
+              <a:rPr lang="ja-JP" altLang="en-US" sz="2400" dirty="0"/>
+              <a:t>「</a:t>
+            </a:r>
+            <a:r>
+              <a:rPr lang="ja-JP" altLang="en-US" sz="2400" b="1" dirty="0">
+                <a:solidFill>
+                  <a:srgbClr val="FF0000"/>
+                </a:solidFill>
+              </a:rPr>
+              <a:t>その他のオプションを確認 </a:t>
+            </a:r>
+            <a:r>
+              <a:rPr lang="en-US" altLang="ja-JP" sz="2400" b="1" dirty="0">
+                <a:solidFill>
+                  <a:srgbClr val="FF0000"/>
+                </a:solidFill>
+              </a:rPr>
+              <a:t>&gt; Generate Visual Studio project files</a:t>
+            </a:r>
+            <a:r>
+              <a:rPr lang="ja-JP" altLang="en-US" sz="2400" dirty="0"/>
+              <a:t>」</a:t>
+            </a:r>
+            <a:endParaRPr lang="en-US" altLang="ja-JP" sz="2400" dirty="0"/>
+          </a:p>
+          <a:p>
+            <a:r>
+              <a:rPr lang="ja-JP" altLang="en-US" sz="2400" dirty="0"/>
+              <a:t>をクリックします。</a:t>
             </a:r>
             <a:endParaRPr lang="en-US" altLang="ja-JP" sz="2400" dirty="0"/>
           </a:p>
@@ -8352,10 +9891,10 @@
       </p:sp>
       <p:pic>
         <p:nvPicPr>
-          <p:cNvPr id="3" name="図 2">
-            <a:extLst>
-              <a:ext uri="{FF2B5EF4-FFF2-40B4-BE49-F238E27FC236}">
-                <a16:creationId xmlns:a16="http://schemas.microsoft.com/office/drawing/2014/main" id="{F9C05B40-3254-4D9C-B8D4-93580358AC72}"/>
+          <p:cNvPr id="5" name="図 4">
+            <a:extLst>
+              <a:ext uri="{FF2B5EF4-FFF2-40B4-BE49-F238E27FC236}">
+                <a16:creationId xmlns:a16="http://schemas.microsoft.com/office/drawing/2014/main" id="{66F9F2EA-6753-4453-833E-807BF1E1CC69}"/>
               </a:ext>
             </a:extLst>
           </p:cNvPr>
@@ -8372,8 +9911,8 @@
         </p:blipFill>
         <p:spPr>
           <a:xfrm>
-            <a:off x="567542" y="1817793"/>
-            <a:ext cx="9674474" cy="2508673"/>
+            <a:off x="567542" y="2556459"/>
+            <a:ext cx="3708623" cy="4002958"/>
           </a:xfrm>
           <a:prstGeom prst="rect">
             <a:avLst/>
@@ -8382,10 +9921,10 @@
       </p:pic>
       <p:sp>
         <p:nvSpPr>
-          <p:cNvPr id="7" name="矢印: 右 6">
-            <a:extLst>
-              <a:ext uri="{FF2B5EF4-FFF2-40B4-BE49-F238E27FC236}">
-                <a16:creationId xmlns:a16="http://schemas.microsoft.com/office/drawing/2014/main" id="{2945116F-CBEE-464E-90D7-7B19CB11DB87}"/>
+          <p:cNvPr id="15" name="吹き出し: 四角形 14">
+            <a:extLst>
+              <a:ext uri="{FF2B5EF4-FFF2-40B4-BE49-F238E27FC236}">
+                <a16:creationId xmlns:a16="http://schemas.microsoft.com/office/drawing/2014/main" id="{0783918E-502E-4561-BC33-CC4F45A0CC90}"/>
               </a:ext>
             </a:extLst>
           </p:cNvPr>
@@ -8393,33 +9932,29 @@
           <p:nvPr/>
         </p:nvSpPr>
         <p:spPr>
-          <a:xfrm rot="18234661">
-            <a:off x="7495163" y="2569524"/>
-            <a:ext cx="776827" cy="524934"/>
-          </a:xfrm>
-          <a:prstGeom prst="rightArrow">
-            <a:avLst/>
-          </a:prstGeom>
-          <a:solidFill>
-            <a:srgbClr val="FF0000"/>
-          </a:solidFill>
-          <a:ln>
-            <a:solidFill>
-              <a:schemeClr val="tx1"/>
-            </a:solidFill>
-          </a:ln>
+          <a:xfrm>
+            <a:off x="567542" y="5641571"/>
+            <a:ext cx="2389152" cy="431799"/>
+          </a:xfrm>
+          <a:prstGeom prst="wedgeRectCallout">
+            <a:avLst>
+              <a:gd name="adj1" fmla="val -30047"/>
+              <a:gd name="adj2" fmla="val 101716"/>
+            </a:avLst>
+          </a:prstGeom>
+          <a:ln/>
         </p:spPr>
         <p:style>
           <a:lnRef idx="2">
-            <a:schemeClr val="accent1">
+            <a:schemeClr val="accent5">
               <a:shade val="50000"/>
             </a:schemeClr>
           </a:lnRef>
           <a:fillRef idx="1">
-            <a:schemeClr val="accent1"/>
+            <a:schemeClr val="accent5"/>
           </a:fillRef>
           <a:effectRef idx="0">
-            <a:schemeClr val="accent1"/>
+            <a:schemeClr val="accent5"/>
           </a:effectRef>
           <a:fontRef idx="minor">
             <a:schemeClr val="lt1"/>
@@ -8430,14 +9965,86 @@
           <a:lstStyle/>
           <a:p>
             <a:pPr algn="ctr"/>
-            <a:endParaRPr kumimoji="1" lang="ja-JP" altLang="en-US"/>
+            <a:r>
+              <a:rPr lang="ja-JP" altLang="en-US" b="1" dirty="0">
+                <a:solidFill>
+                  <a:schemeClr val="bg1"/>
+                </a:solidFill>
+              </a:rPr>
+              <a:t>右</a:t>
+            </a:r>
+            <a:r>
+              <a:rPr kumimoji="1" lang="ja-JP" altLang="en-US" b="1" dirty="0">
+                <a:solidFill>
+                  <a:schemeClr val="bg1"/>
+                </a:solidFill>
+              </a:rPr>
+              <a:t>クリック</a:t>
+            </a:r>
+          </a:p>
+        </p:txBody>
+      </p:sp>
+      <p:sp>
+        <p:nvSpPr>
+          <p:cNvPr id="16" name="吹き出し: 四角形 15">
+            <a:extLst>
+              <a:ext uri="{FF2B5EF4-FFF2-40B4-BE49-F238E27FC236}">
+                <a16:creationId xmlns:a16="http://schemas.microsoft.com/office/drawing/2014/main" id="{122F2306-25C2-4040-9EE2-E6B2F28A6B99}"/>
+              </a:ext>
+            </a:extLst>
+          </p:cNvPr>
+          <p:cNvSpPr/>
+          <p:nvPr/>
+        </p:nvSpPr>
+        <p:spPr>
+          <a:xfrm>
+            <a:off x="2772859" y="2340558"/>
+            <a:ext cx="2389152" cy="431799"/>
+          </a:xfrm>
+          <a:prstGeom prst="wedgeRectCallout">
+            <a:avLst>
+              <a:gd name="adj1" fmla="val -30047"/>
+              <a:gd name="adj2" fmla="val 101716"/>
+            </a:avLst>
+          </a:prstGeom>
+          <a:ln/>
+        </p:spPr>
+        <p:style>
+          <a:lnRef idx="2">
+            <a:schemeClr val="accent5">
+              <a:shade val="50000"/>
+            </a:schemeClr>
+          </a:lnRef>
+          <a:fillRef idx="1">
+            <a:schemeClr val="accent5"/>
+          </a:fillRef>
+          <a:effectRef idx="0">
+            <a:schemeClr val="accent5"/>
+          </a:effectRef>
+          <a:fontRef idx="minor">
+            <a:schemeClr val="lt1"/>
+          </a:fontRef>
+        </p:style>
+        <p:txBody>
+          <a:bodyPr rtlCol="0" anchor="ctr"/>
+          <a:lstStyle/>
+          <a:p>
+            <a:pPr algn="ctr"/>
+            <a:r>
+              <a:rPr kumimoji="1" lang="ja-JP" altLang="en-US" b="1" dirty="0">
+                <a:solidFill>
+                  <a:schemeClr val="bg1"/>
+                </a:solidFill>
+              </a:rPr>
+              <a:t>クリック</a:t>
+            </a:r>
           </a:p>
         </p:txBody>
       </p:sp>
     </p:spTree>
     <p:extLst>
       <p:ext uri="{BB962C8B-B14F-4D97-AF65-F5344CB8AC3E}">
-        <p14:creationId xmlns:p14="http://schemas.microsoft.com/office/powerpoint/2010/main" val="125078281"/>
+        <p14:creationId xmlns:p14="http://schemas.microsoft.com/office/powerpoint/2010/main" val="854581123"/>
       </p:ext>
     </p:extLst>
   </p:cSld>
@@ -8515,7 +10122,7 @@
         <p:spPr>
           <a:xfrm>
             <a:off x="567542" y="1216429"/>
-            <a:ext cx="7571303" cy="830997"/>
+            <a:ext cx="7949612" cy="461665"/>
           </a:xfrm>
           <a:prstGeom prst="rect">
             <a:avLst/>
@@ -8529,23 +10136,28 @@
           <a:lstStyle/>
           <a:p>
             <a:r>
+              <a:rPr lang="en-US" altLang="ja-JP" sz="2400" b="1" dirty="0">
+                <a:solidFill>
+                  <a:srgbClr val="FF0000"/>
+                </a:solidFill>
+              </a:rPr>
+              <a:t>Project.sln</a:t>
+            </a:r>
+            <a:r>
               <a:rPr lang="ja-JP" altLang="en-US" sz="2400" dirty="0"/>
-              <a:t>これが</a:t>
-            </a:r>
-            <a:r>
-              <a:rPr lang="en-US" altLang="ja-JP" sz="2400" dirty="0"/>
-              <a:t>Unreal Engine</a:t>
+              <a:t>が出現するので</a:t>
+            </a:r>
+            <a:r>
+              <a:rPr lang="ja-JP" altLang="en-US" sz="2400" b="1" dirty="0">
+                <a:solidFill>
+                  <a:srgbClr val="FF0000"/>
+                </a:solidFill>
+              </a:rPr>
+              <a:t>ダブルクリック</a:t>
             </a:r>
             <a:r>
               <a:rPr lang="ja-JP" altLang="en-US" sz="2400" dirty="0"/>
-              <a:t>の画面です！！</a:t>
-            </a:r>
-            <a:endParaRPr lang="en-US" altLang="ja-JP" sz="2400" dirty="0"/>
-          </a:p>
-          <a:p>
-            <a:r>
-              <a:rPr lang="ja-JP" altLang="en-US" sz="2400" dirty="0"/>
-              <a:t>真ん中の大きな画面がゲームのステージになります。</a:t>
+              <a:t>しましょう。</a:t>
             </a:r>
             <a:endParaRPr lang="en-US" altLang="ja-JP" sz="2400" dirty="0"/>
           </a:p>
@@ -8556,7 +10168,7 @@
           <p:cNvPr id="3" name="図 2">
             <a:extLst>
               <a:ext uri="{FF2B5EF4-FFF2-40B4-BE49-F238E27FC236}">
-                <a16:creationId xmlns:a16="http://schemas.microsoft.com/office/drawing/2014/main" id="{55DE3617-D32F-4115-B10A-3F2FE31152E2}"/>
+                <a16:creationId xmlns:a16="http://schemas.microsoft.com/office/drawing/2014/main" id="{FA6E1C32-65B0-46E7-85A3-0E7CB618A511}"/>
               </a:ext>
             </a:extLst>
           </p:cNvPr>
@@ -8573,18 +10185,75 @@
         </p:blipFill>
         <p:spPr>
           <a:xfrm>
-            <a:off x="567542" y="2187126"/>
-            <a:ext cx="7801828" cy="4258498"/>
+            <a:off x="567541" y="1817794"/>
+            <a:ext cx="3651565" cy="4807124"/>
           </a:xfrm>
           <a:prstGeom prst="rect">
             <a:avLst/>
           </a:prstGeom>
         </p:spPr>
       </p:pic>
+      <p:sp>
+        <p:nvSpPr>
+          <p:cNvPr id="9" name="吹き出し: 四角形 8">
+            <a:extLst>
+              <a:ext uri="{FF2B5EF4-FFF2-40B4-BE49-F238E27FC236}">
+                <a16:creationId xmlns:a16="http://schemas.microsoft.com/office/drawing/2014/main" id="{861C7003-2CC0-4FD9-86F4-0B3FBE340256}"/>
+              </a:ext>
+            </a:extLst>
+          </p:cNvPr>
+          <p:cNvSpPr/>
+          <p:nvPr/>
+        </p:nvSpPr>
+        <p:spPr>
+          <a:xfrm>
+            <a:off x="1198747" y="5102196"/>
+            <a:ext cx="2389152" cy="431799"/>
+          </a:xfrm>
+          <a:prstGeom prst="wedgeRectCallout">
+            <a:avLst>
+              <a:gd name="adj1" fmla="val -30047"/>
+              <a:gd name="adj2" fmla="val 101716"/>
+            </a:avLst>
+          </a:prstGeom>
+          <a:ln/>
+        </p:spPr>
+        <p:style>
+          <a:lnRef idx="2">
+            <a:schemeClr val="accent5">
+              <a:shade val="50000"/>
+            </a:schemeClr>
+          </a:lnRef>
+          <a:fillRef idx="1">
+            <a:schemeClr val="accent5"/>
+          </a:fillRef>
+          <a:effectRef idx="0">
+            <a:schemeClr val="accent5"/>
+          </a:effectRef>
+          <a:fontRef idx="minor">
+            <a:schemeClr val="lt1"/>
+          </a:fontRef>
+        </p:style>
+        <p:txBody>
+          <a:bodyPr rtlCol="0" anchor="ctr"/>
+          <a:lstStyle/>
+          <a:p>
+            <a:pPr algn="ctr"/>
+            <a:r>
+              <a:rPr kumimoji="1" lang="ja-JP" altLang="en-US" b="1" dirty="0">
+                <a:solidFill>
+                  <a:schemeClr val="bg1"/>
+                </a:solidFill>
+              </a:rPr>
+              <a:t>ダブルクリック</a:t>
+            </a:r>
+          </a:p>
+        </p:txBody>
+      </p:sp>
     </p:spTree>
     <p:extLst>
       <p:ext uri="{BB962C8B-B14F-4D97-AF65-F5344CB8AC3E}">
-        <p14:creationId xmlns:p14="http://schemas.microsoft.com/office/powerpoint/2010/main" val="968893246"/>
+        <p14:creationId xmlns:p14="http://schemas.microsoft.com/office/powerpoint/2010/main" val="2860801561"/>
       </p:ext>
     </p:extLst>
   </p:cSld>
@@ -8662,7 +10331,7 @@
         <p:spPr>
           <a:xfrm>
             <a:off x="567542" y="1216429"/>
-            <a:ext cx="5724644" cy="461665"/>
+            <a:ext cx="9567043" cy="830997"/>
           </a:xfrm>
           <a:prstGeom prst="rect">
             <a:avLst/>
@@ -8676,20 +10345,27 @@
           <a:lstStyle/>
           <a:p>
             <a:r>
-              <a:rPr lang="ja-JP" altLang="en-US" sz="2400" dirty="0"/>
-              <a:t>ステージに</a:t>
-            </a:r>
-            <a:r>
-              <a:rPr lang="ja-JP" altLang="en-US" sz="2400" b="1" dirty="0">
+              <a:rPr lang="en-US" altLang="ja-JP" sz="2400" b="1" dirty="0">
                 <a:solidFill>
-                  <a:srgbClr val="FF9900"/>
+                  <a:srgbClr val="7030A0"/>
                 </a:solidFill>
               </a:rPr>
-              <a:t>コイン</a:t>
+              <a:t>Visual Studio</a:t>
             </a:r>
             <a:r>
               <a:rPr lang="ja-JP" altLang="en-US" sz="2400" dirty="0"/>
-              <a:t>を置いてみましょう。</a:t>
+              <a:t>というソフトが起動します。</a:t>
+            </a:r>
+            <a:endParaRPr lang="en-US" altLang="ja-JP" sz="2400" dirty="0"/>
+          </a:p>
+          <a:p>
+            <a:r>
+              <a:rPr lang="en-US" altLang="ja-JP" sz="2400" dirty="0"/>
+              <a:t>Unreal Engine</a:t>
+            </a:r>
+            <a:r>
+              <a:rPr lang="ja-JP" altLang="en-US" sz="2400" dirty="0"/>
+              <a:t>ではありませんが、ゲーム開発に必要なソフトです。</a:t>
             </a:r>
             <a:endParaRPr lang="en-US" altLang="ja-JP" sz="2400" dirty="0"/>
           </a:p>
@@ -8697,10 +10373,10 @@
       </p:sp>
       <p:pic>
         <p:nvPicPr>
-          <p:cNvPr id="3" name="図 2">
-            <a:extLst>
-              <a:ext uri="{FF2B5EF4-FFF2-40B4-BE49-F238E27FC236}">
-                <a16:creationId xmlns:a16="http://schemas.microsoft.com/office/drawing/2014/main" id="{3B18F0A0-34F0-4CAE-B0C7-29B29C80A306}"/>
+          <p:cNvPr id="5" name="図 4">
+            <a:extLst>
+              <a:ext uri="{FF2B5EF4-FFF2-40B4-BE49-F238E27FC236}">
+                <a16:creationId xmlns:a16="http://schemas.microsoft.com/office/drawing/2014/main" id="{B97DA89D-06C8-48A0-8216-68FA0E6E5F4E}"/>
               </a:ext>
             </a:extLst>
           </p:cNvPr>
@@ -8717,203 +10393,18 @@
         </p:blipFill>
         <p:spPr>
           <a:xfrm>
-            <a:off x="567542" y="1817794"/>
-            <a:ext cx="4856207" cy="4548252"/>
+            <a:off x="567542" y="2187126"/>
+            <a:ext cx="8262693" cy="4441197"/>
           </a:xfrm>
           <a:prstGeom prst="rect">
             <a:avLst/>
           </a:prstGeom>
         </p:spPr>
       </p:pic>
-      <p:sp>
-        <p:nvSpPr>
-          <p:cNvPr id="5" name="矢印: 右 4">
-            <a:extLst>
-              <a:ext uri="{FF2B5EF4-FFF2-40B4-BE49-F238E27FC236}">
-                <a16:creationId xmlns:a16="http://schemas.microsoft.com/office/drawing/2014/main" id="{45DB3A28-B094-43B4-AE05-A9F5EAE4F66D}"/>
-              </a:ext>
-            </a:extLst>
-          </p:cNvPr>
-          <p:cNvSpPr/>
-          <p:nvPr/>
-        </p:nvSpPr>
-        <p:spPr>
-          <a:xfrm rot="17961142">
-            <a:off x="1663903" y="3633340"/>
-            <a:ext cx="2360426" cy="422904"/>
-          </a:xfrm>
-          <a:prstGeom prst="rightArrow">
-            <a:avLst/>
-          </a:prstGeom>
-          <a:solidFill>
-            <a:srgbClr val="FF0000"/>
-          </a:solidFill>
-          <a:ln>
-            <a:solidFill>
-              <a:schemeClr val="tx1"/>
-            </a:solidFill>
-          </a:ln>
-        </p:spPr>
-        <p:style>
-          <a:lnRef idx="2">
-            <a:schemeClr val="accent1">
-              <a:shade val="50000"/>
-            </a:schemeClr>
-          </a:lnRef>
-          <a:fillRef idx="1">
-            <a:schemeClr val="accent1"/>
-          </a:fillRef>
-          <a:effectRef idx="0">
-            <a:schemeClr val="accent1"/>
-          </a:effectRef>
-          <a:fontRef idx="minor">
-            <a:schemeClr val="lt1"/>
-          </a:fontRef>
-        </p:style>
-        <p:txBody>
-          <a:bodyPr rtlCol="0" anchor="ctr"/>
-          <a:lstStyle/>
-          <a:p>
-            <a:pPr algn="ctr"/>
-            <a:endParaRPr kumimoji="1" lang="ja-JP" altLang="en-US"/>
-          </a:p>
-        </p:txBody>
-      </p:sp>
-      <p:sp>
-        <p:nvSpPr>
-          <p:cNvPr id="7" name="テキスト ボックス 6">
-            <a:extLst>
-              <a:ext uri="{FF2B5EF4-FFF2-40B4-BE49-F238E27FC236}">
-                <a16:creationId xmlns:a16="http://schemas.microsoft.com/office/drawing/2014/main" id="{69E73DEE-46FF-424B-89A4-8473DFABC8ED}"/>
-              </a:ext>
-            </a:extLst>
-          </p:cNvPr>
-          <p:cNvSpPr txBox="1"/>
-          <p:nvPr/>
-        </p:nvSpPr>
-        <p:spPr>
-          <a:xfrm>
-            <a:off x="2995645" y="3630255"/>
-            <a:ext cx="5208477" cy="461665"/>
-          </a:xfrm>
-          <a:prstGeom prst="rect">
-            <a:avLst/>
-          </a:prstGeom>
-          <a:solidFill>
-            <a:schemeClr val="bg1"/>
-          </a:solidFill>
-          <a:ln>
-            <a:solidFill>
-              <a:schemeClr val="tx1"/>
-            </a:solidFill>
-          </a:ln>
-        </p:spPr>
-        <p:txBody>
-          <a:bodyPr wrap="none" rtlCol="0">
-            <a:spAutoFit/>
-          </a:bodyPr>
-          <a:lstStyle/>
-          <a:p>
-            <a:r>
-              <a:rPr lang="en-US" altLang="ja-JP" sz="2400" b="1" dirty="0" err="1">
-                <a:solidFill>
-                  <a:srgbClr val="0070C0"/>
-                </a:solidFill>
-              </a:rPr>
-              <a:t>BP_ItemCoin</a:t>
-            </a:r>
-            <a:r>
-              <a:rPr lang="ja-JP" altLang="en-US" sz="2400" dirty="0"/>
-              <a:t>を</a:t>
-            </a:r>
-            <a:r>
-              <a:rPr lang="ja-JP" altLang="en-US" sz="2400" b="1" dirty="0">
-                <a:solidFill>
-                  <a:srgbClr val="FF0000"/>
-                </a:solidFill>
-              </a:rPr>
-              <a:t>ドラッグ＆ドロップ</a:t>
-            </a:r>
-            <a:endParaRPr lang="en-US" altLang="ja-JP" sz="2400" b="1" dirty="0">
-              <a:solidFill>
-                <a:srgbClr val="FF0000"/>
-              </a:solidFill>
-            </a:endParaRPr>
-          </a:p>
-        </p:txBody>
-      </p:sp>
-      <p:sp>
-        <p:nvSpPr>
-          <p:cNvPr id="8" name="テキスト ボックス 7">
-            <a:extLst>
-              <a:ext uri="{FF2B5EF4-FFF2-40B4-BE49-F238E27FC236}">
-                <a16:creationId xmlns:a16="http://schemas.microsoft.com/office/drawing/2014/main" id="{5F6934B8-5230-46E7-8E07-2DC09AC7D6E8}"/>
-              </a:ext>
-            </a:extLst>
-          </p:cNvPr>
-          <p:cNvSpPr txBox="1"/>
-          <p:nvPr/>
-        </p:nvSpPr>
-        <p:spPr>
-          <a:xfrm>
-            <a:off x="5676633" y="4427054"/>
-            <a:ext cx="5724644" cy="1938992"/>
-          </a:xfrm>
-          <a:prstGeom prst="rect">
-            <a:avLst/>
-          </a:prstGeom>
-          <a:noFill/>
-        </p:spPr>
-        <p:txBody>
-          <a:bodyPr wrap="none" rtlCol="0">
-            <a:spAutoFit/>
-          </a:bodyPr>
-          <a:lstStyle/>
-          <a:p>
-            <a:r>
-              <a:rPr lang="ja-JP" altLang="en-US" sz="2400" b="1" dirty="0">
-                <a:solidFill>
-                  <a:srgbClr val="FF0000"/>
-                </a:solidFill>
-              </a:rPr>
-              <a:t>操作方法</a:t>
-            </a:r>
-            <a:endParaRPr lang="en-US" altLang="ja-JP" sz="2400" b="1" dirty="0">
-              <a:solidFill>
-                <a:srgbClr val="FF0000"/>
-              </a:solidFill>
-            </a:endParaRPr>
-          </a:p>
-          <a:p>
-            <a:r>
-              <a:rPr lang="ja-JP" altLang="en-US" sz="2400" dirty="0"/>
-              <a:t>マウスホイール回転：前進、後退</a:t>
-            </a:r>
-            <a:endParaRPr lang="en-US" altLang="ja-JP" sz="2400" dirty="0"/>
-          </a:p>
-          <a:p>
-            <a:endParaRPr lang="en-US" altLang="ja-JP" sz="2400" dirty="0"/>
-          </a:p>
-          <a:p>
-            <a:r>
-              <a:rPr lang="ja-JP" altLang="en-US" sz="2400" dirty="0"/>
-              <a:t>マウスホイールドラッグアンドドロップ</a:t>
-            </a:r>
-            <a:endParaRPr lang="en-US" altLang="ja-JP" sz="2400" dirty="0"/>
-          </a:p>
-          <a:p>
-            <a:r>
-              <a:rPr lang="ja-JP" altLang="en-US" sz="2400" dirty="0"/>
-              <a:t>上下左右移動</a:t>
-            </a:r>
-            <a:endParaRPr lang="en-US" altLang="ja-JP" sz="2400" dirty="0"/>
-          </a:p>
-        </p:txBody>
-      </p:sp>
     </p:spTree>
     <p:extLst>
       <p:ext uri="{BB962C8B-B14F-4D97-AF65-F5344CB8AC3E}">
-        <p14:creationId xmlns:p14="http://schemas.microsoft.com/office/powerpoint/2010/main" val="2582325579"/>
+        <p14:creationId xmlns:p14="http://schemas.microsoft.com/office/powerpoint/2010/main" val="1137652462"/>
       </p:ext>
     </p:extLst>
   </p:cSld>
@@ -8991,7 +10482,7 @@
         <p:spPr>
           <a:xfrm>
             <a:off x="567542" y="1216429"/>
-            <a:ext cx="6340197" cy="830997"/>
+            <a:ext cx="7879080" cy="830997"/>
           </a:xfrm>
           <a:prstGeom prst="rect">
             <a:avLst/>
@@ -9005,67 +10496,43 @@
           <a:lstStyle/>
           <a:p>
             <a:r>
-              <a:rPr lang="ja-JP" altLang="en-US" sz="2400" b="1" dirty="0"/>
-              <a:t>実行ボタン</a:t>
-            </a:r>
-            <a:r>
               <a:rPr lang="ja-JP" altLang="en-US" sz="2400" dirty="0"/>
-              <a:t>を押すとゲームが始まります。</a:t>
-            </a:r>
-            <a:endParaRPr lang="en-US" altLang="ja-JP" sz="2400" dirty="0"/>
-          </a:p>
-          <a:p>
-            <a:r>
-              <a:rPr lang="ja-JP" altLang="en-US" sz="2400" dirty="0"/>
-              <a:t>さきほど置いた</a:t>
+              <a:t>左側にある</a:t>
+            </a:r>
+            <a:r>
+              <a:rPr lang="en-US" altLang="ja-JP" sz="2400" b="1" dirty="0">
+                <a:solidFill>
+                  <a:srgbClr val="FF0000"/>
+                </a:solidFill>
+              </a:rPr>
+              <a:t>Project</a:t>
             </a:r>
             <a:r>
               <a:rPr lang="ja-JP" altLang="en-US" sz="2400" b="1" dirty="0">
                 <a:solidFill>
-                  <a:srgbClr val="FF9900"/>
+                  <a:srgbClr val="FF0000"/>
                 </a:solidFill>
               </a:rPr>
-              <a:t>コイン</a:t>
+              <a:t>を右クリック</a:t>
             </a:r>
             <a:r>
               <a:rPr lang="ja-JP" altLang="en-US" sz="2400" dirty="0"/>
-              <a:t>を触ってみましょう。</a:t>
+              <a:t>し、</a:t>
             </a:r>
             <a:endParaRPr lang="en-US" altLang="ja-JP" sz="2400" dirty="0"/>
           </a:p>
-        </p:txBody>
-      </p:sp>
-      <p:sp>
-        <p:nvSpPr>
-          <p:cNvPr id="5" name="テキスト ボックス 4">
-            <a:extLst>
-              <a:ext uri="{FF2B5EF4-FFF2-40B4-BE49-F238E27FC236}">
-                <a16:creationId xmlns:a16="http://schemas.microsoft.com/office/drawing/2014/main" id="{7A866068-CB18-4145-BEBA-A61ED3505C5C}"/>
-              </a:ext>
-            </a:extLst>
-          </p:cNvPr>
-          <p:cNvSpPr txBox="1"/>
-          <p:nvPr/>
-        </p:nvSpPr>
-        <p:spPr>
-          <a:xfrm>
-            <a:off x="567541" y="5535049"/>
-            <a:ext cx="5109091" cy="461665"/>
-          </a:xfrm>
-          <a:prstGeom prst="rect">
-            <a:avLst/>
-          </a:prstGeom>
-          <a:noFill/>
-        </p:spPr>
-        <p:txBody>
-          <a:bodyPr wrap="none" rtlCol="0">
-            <a:spAutoFit/>
-          </a:bodyPr>
-          <a:lstStyle/>
-          <a:p>
+          <a:p>
+            <a:r>
+              <a:rPr lang="ja-JP" altLang="en-US" sz="2400" b="1" dirty="0">
+                <a:solidFill>
+                  <a:srgbClr val="FF0000"/>
+                </a:solidFill>
+              </a:rPr>
+              <a:t>スタートアッププロジェクトに設定</a:t>
+            </a:r>
             <a:r>
               <a:rPr lang="ja-JP" altLang="en-US" sz="2400" dirty="0"/>
-              <a:t>触っても何も起きないですね。。。</a:t>
+              <a:t>をクリックします。</a:t>
             </a:r>
             <a:endParaRPr lang="en-US" altLang="ja-JP" sz="2400" dirty="0"/>
           </a:p>
@@ -9076,7 +10543,7 @@
           <p:cNvPr id="3" name="図 2">
             <a:extLst>
               <a:ext uri="{FF2B5EF4-FFF2-40B4-BE49-F238E27FC236}">
-                <a16:creationId xmlns:a16="http://schemas.microsoft.com/office/drawing/2014/main" id="{F146D193-5E51-4010-A423-F132E21D39FF}"/>
+                <a16:creationId xmlns:a16="http://schemas.microsoft.com/office/drawing/2014/main" id="{6621ED56-9751-4D50-8C8C-AE23661025B9}"/>
               </a:ext>
             </a:extLst>
           </p:cNvPr>
@@ -9093,18 +10560,132 @@
         </p:blipFill>
         <p:spPr>
           <a:xfrm>
-            <a:off x="567541" y="2187125"/>
-            <a:ext cx="3320502" cy="2976545"/>
+            <a:off x="567542" y="2187126"/>
+            <a:ext cx="4120999" cy="4379839"/>
           </a:xfrm>
           <a:prstGeom prst="rect">
             <a:avLst/>
           </a:prstGeom>
         </p:spPr>
       </p:pic>
+      <p:sp>
+        <p:nvSpPr>
+          <p:cNvPr id="7" name="吹き出し: 四角形 6">
+            <a:extLst>
+              <a:ext uri="{FF2B5EF4-FFF2-40B4-BE49-F238E27FC236}">
+                <a16:creationId xmlns:a16="http://schemas.microsoft.com/office/drawing/2014/main" id="{B0AF2A59-E387-4F5E-88F1-10FC59CE92FB}"/>
+              </a:ext>
+            </a:extLst>
+          </p:cNvPr>
+          <p:cNvSpPr/>
+          <p:nvPr/>
+        </p:nvSpPr>
+        <p:spPr>
+          <a:xfrm>
+            <a:off x="947736" y="2798266"/>
+            <a:ext cx="2389152" cy="431799"/>
+          </a:xfrm>
+          <a:prstGeom prst="wedgeRectCallout">
+            <a:avLst>
+              <a:gd name="adj1" fmla="val -30047"/>
+              <a:gd name="adj2" fmla="val 101716"/>
+            </a:avLst>
+          </a:prstGeom>
+          <a:ln/>
+        </p:spPr>
+        <p:style>
+          <a:lnRef idx="2">
+            <a:schemeClr val="accent5">
+              <a:shade val="50000"/>
+            </a:schemeClr>
+          </a:lnRef>
+          <a:fillRef idx="1">
+            <a:schemeClr val="accent5"/>
+          </a:fillRef>
+          <a:effectRef idx="0">
+            <a:schemeClr val="accent5"/>
+          </a:effectRef>
+          <a:fontRef idx="minor">
+            <a:schemeClr val="lt1"/>
+          </a:fontRef>
+        </p:style>
+        <p:txBody>
+          <a:bodyPr rtlCol="0" anchor="ctr"/>
+          <a:lstStyle/>
+          <a:p>
+            <a:pPr algn="ctr"/>
+            <a:r>
+              <a:rPr kumimoji="1" lang="ja-JP" altLang="en-US" b="1" dirty="0">
+                <a:solidFill>
+                  <a:schemeClr val="bg1"/>
+                </a:solidFill>
+              </a:rPr>
+              <a:t>右クリック</a:t>
+            </a:r>
+          </a:p>
+        </p:txBody>
+      </p:sp>
+      <p:sp>
+        <p:nvSpPr>
+          <p:cNvPr id="8" name="吹き出し: 四角形 7">
+            <a:extLst>
+              <a:ext uri="{FF2B5EF4-FFF2-40B4-BE49-F238E27FC236}">
+                <a16:creationId xmlns:a16="http://schemas.microsoft.com/office/drawing/2014/main" id="{92FC96C4-7C42-4DAD-81E4-A67CC563CCCC}"/>
+              </a:ext>
+            </a:extLst>
+          </p:cNvPr>
+          <p:cNvSpPr/>
+          <p:nvPr/>
+        </p:nvSpPr>
+        <p:spPr>
+          <a:xfrm>
+            <a:off x="2704818" y="5577325"/>
+            <a:ext cx="2389152" cy="431799"/>
+          </a:xfrm>
+          <a:prstGeom prst="wedgeRectCallout">
+            <a:avLst>
+              <a:gd name="adj1" fmla="val -30047"/>
+              <a:gd name="adj2" fmla="val 101716"/>
+            </a:avLst>
+          </a:prstGeom>
+          <a:ln/>
+        </p:spPr>
+        <p:style>
+          <a:lnRef idx="2">
+            <a:schemeClr val="accent5">
+              <a:shade val="50000"/>
+            </a:schemeClr>
+          </a:lnRef>
+          <a:fillRef idx="1">
+            <a:schemeClr val="accent5"/>
+          </a:fillRef>
+          <a:effectRef idx="0">
+            <a:schemeClr val="accent5"/>
+          </a:effectRef>
+          <a:fontRef idx="minor">
+            <a:schemeClr val="lt1"/>
+          </a:fontRef>
+        </p:style>
+        <p:txBody>
+          <a:bodyPr rtlCol="0" anchor="ctr"/>
+          <a:lstStyle/>
+          <a:p>
+            <a:pPr algn="ctr"/>
+            <a:r>
+              <a:rPr kumimoji="1" lang="ja-JP" altLang="en-US" b="1" dirty="0">
+                <a:solidFill>
+                  <a:schemeClr val="bg1"/>
+                </a:solidFill>
+              </a:rPr>
+              <a:t>クリック</a:t>
+            </a:r>
+          </a:p>
+        </p:txBody>
+      </p:sp>
     </p:spTree>
     <p:extLst>
       <p:ext uri="{BB962C8B-B14F-4D97-AF65-F5344CB8AC3E}">
-        <p14:creationId xmlns:p14="http://schemas.microsoft.com/office/powerpoint/2010/main" val="2675442058"/>
+        <p14:creationId xmlns:p14="http://schemas.microsoft.com/office/powerpoint/2010/main" val="179325118"/>
       </p:ext>
     </p:extLst>
   </p:cSld>
@@ -9182,7 +10763,7 @@
         <p:spPr>
           <a:xfrm>
             <a:off x="567542" y="1216429"/>
-            <a:ext cx="10341293" cy="830997"/>
+            <a:ext cx="7104830" cy="461665"/>
           </a:xfrm>
           <a:prstGeom prst="rect">
             <a:avLst/>
@@ -9196,35 +10777,24 @@
           <a:lstStyle/>
           <a:p>
             <a:r>
-              <a:rPr lang="ja-JP" altLang="en-US" sz="2400" dirty="0"/>
-              <a:t>ステージのものに触りたい場合は、</a:t>
-            </a:r>
-            <a:r>
-              <a:rPr lang="ja-JP" altLang="en-US" sz="2400" b="1" dirty="0">
+              <a:rPr kumimoji="1" lang="ja-JP" altLang="en-US" sz="2400" b="1" dirty="0">
                 <a:solidFill>
-                  <a:srgbClr val="FF0000"/>
+                  <a:srgbClr val="00B050"/>
                 </a:solidFill>
               </a:rPr>
-              <a:t>当たり判定</a:t>
-            </a:r>
-            <a:r>
-              <a:rPr lang="ja-JP" altLang="en-US" sz="2400" dirty="0"/>
-              <a:t>のプログラムを作ります。</a:t>
-            </a:r>
-            <a:endParaRPr lang="en-US" altLang="ja-JP" sz="2400" dirty="0"/>
-          </a:p>
-          <a:p>
-            <a:r>
-              <a:rPr lang="en-US" altLang="ja-JP" sz="2400" b="1" dirty="0" err="1">
-                <a:solidFill>
-                  <a:srgbClr val="0070C0"/>
-                </a:solidFill>
-              </a:rPr>
-              <a:t>BP_ItemCoin</a:t>
-            </a:r>
-            <a:r>
-              <a:rPr lang="ja-JP" altLang="en-US" sz="2400" dirty="0"/>
-              <a:t>をダブルクリックしましょう。</a:t>
+              <a:t>実行ボタン</a:t>
+            </a:r>
+            <a:r>
+              <a:rPr kumimoji="1" lang="ja-JP" altLang="en-US" sz="2400" dirty="0"/>
+              <a:t>を押すと</a:t>
+            </a:r>
+            <a:r>
+              <a:rPr kumimoji="1" lang="en-US" altLang="ja-JP" sz="2400" dirty="0"/>
+              <a:t>Unreal Engine</a:t>
+            </a:r>
+            <a:r>
+              <a:rPr kumimoji="1" lang="ja-JP" altLang="en-US" sz="2400" dirty="0"/>
+              <a:t>が起動します。</a:t>
             </a:r>
             <a:endParaRPr lang="en-US" altLang="ja-JP" sz="2400" dirty="0"/>
           </a:p>
@@ -9232,10 +10802,10 @@
       </p:sp>
       <p:pic>
         <p:nvPicPr>
-          <p:cNvPr id="5" name="図 4">
-            <a:extLst>
-              <a:ext uri="{FF2B5EF4-FFF2-40B4-BE49-F238E27FC236}">
-                <a16:creationId xmlns:a16="http://schemas.microsoft.com/office/drawing/2014/main" id="{1D56BB74-ED49-4F07-84E8-2BEF90E5C815}"/>
+          <p:cNvPr id="3" name="図 2">
+            <a:extLst>
+              <a:ext uri="{FF2B5EF4-FFF2-40B4-BE49-F238E27FC236}">
+                <a16:creationId xmlns:a16="http://schemas.microsoft.com/office/drawing/2014/main" id="{F9C05B40-3254-4D9C-B8D4-93580358AC72}"/>
               </a:ext>
             </a:extLst>
           </p:cNvPr>
@@ -9252,8 +10822,8 @@
         </p:blipFill>
         <p:spPr>
           <a:xfrm>
-            <a:off x="567542" y="2187126"/>
-            <a:ext cx="4987744" cy="4178920"/>
+            <a:off x="567542" y="1817793"/>
+            <a:ext cx="9674474" cy="2508673"/>
           </a:xfrm>
           <a:prstGeom prst="rect">
             <a:avLst/>
@@ -9262,56 +10832,62 @@
       </p:pic>
       <p:sp>
         <p:nvSpPr>
-          <p:cNvPr id="7" name="テキスト ボックス 6">
-            <a:extLst>
-              <a:ext uri="{FF2B5EF4-FFF2-40B4-BE49-F238E27FC236}">
-                <a16:creationId xmlns:a16="http://schemas.microsoft.com/office/drawing/2014/main" id="{B57F5FA0-D20C-493D-9581-973743D1BA76}"/>
-              </a:ext>
-            </a:extLst>
-          </p:cNvPr>
-          <p:cNvSpPr txBox="1"/>
-          <p:nvPr/>
-        </p:nvSpPr>
-        <p:spPr>
-          <a:xfrm>
-            <a:off x="5676633" y="6005981"/>
-            <a:ext cx="3570208" cy="461665"/>
-          </a:xfrm>
-          <a:prstGeom prst="rect">
-            <a:avLst/>
-          </a:prstGeom>
-          <a:noFill/>
-        </p:spPr>
-        <p:txBody>
-          <a:bodyPr wrap="none" rtlCol="0">
-            <a:spAutoFit/>
-          </a:bodyPr>
-          <a:lstStyle/>
-          <a:p>
-            <a:r>
-              <a:rPr lang="ja-JP" altLang="en-US" sz="2400" dirty="0"/>
-              <a:t>ゲームは</a:t>
-            </a:r>
-            <a:r>
-              <a:rPr lang="ja-JP" altLang="en-US" sz="2400" b="1" dirty="0">
-                <a:solidFill>
-                  <a:srgbClr val="FF0000"/>
-                </a:solidFill>
-              </a:rPr>
-              <a:t>停止</a:t>
-            </a:r>
-            <a:r>
-              <a:rPr lang="ja-JP" altLang="en-US" sz="2400" dirty="0"/>
-              <a:t>しましょう</a:t>
-            </a:r>
-            <a:endParaRPr lang="en-US" altLang="ja-JP" sz="2400" dirty="0"/>
+          <p:cNvPr id="7" name="矢印: 右 6">
+            <a:extLst>
+              <a:ext uri="{FF2B5EF4-FFF2-40B4-BE49-F238E27FC236}">
+                <a16:creationId xmlns:a16="http://schemas.microsoft.com/office/drawing/2014/main" id="{2945116F-CBEE-464E-90D7-7B19CB11DB87}"/>
+              </a:ext>
+            </a:extLst>
+          </p:cNvPr>
+          <p:cNvSpPr/>
+          <p:nvPr/>
+        </p:nvSpPr>
+        <p:spPr>
+          <a:xfrm rot="18234661">
+            <a:off x="7495163" y="2569524"/>
+            <a:ext cx="776827" cy="524934"/>
+          </a:xfrm>
+          <a:prstGeom prst="rightArrow">
+            <a:avLst/>
+          </a:prstGeom>
+          <a:solidFill>
+            <a:srgbClr val="FF0000"/>
+          </a:solidFill>
+          <a:ln>
+            <a:solidFill>
+              <a:schemeClr val="tx1"/>
+            </a:solidFill>
+          </a:ln>
+        </p:spPr>
+        <p:style>
+          <a:lnRef idx="2">
+            <a:schemeClr val="accent1">
+              <a:shade val="50000"/>
+            </a:schemeClr>
+          </a:lnRef>
+          <a:fillRef idx="1">
+            <a:schemeClr val="accent1"/>
+          </a:fillRef>
+          <a:effectRef idx="0">
+            <a:schemeClr val="accent1"/>
+          </a:effectRef>
+          <a:fontRef idx="minor">
+            <a:schemeClr val="lt1"/>
+          </a:fontRef>
+        </p:style>
+        <p:txBody>
+          <a:bodyPr rtlCol="0" anchor="ctr"/>
+          <a:lstStyle/>
+          <a:p>
+            <a:pPr algn="ctr"/>
+            <a:endParaRPr kumimoji="1" lang="ja-JP" altLang="en-US"/>
           </a:p>
         </p:txBody>
       </p:sp>
     </p:spTree>
     <p:extLst>
       <p:ext uri="{BB962C8B-B14F-4D97-AF65-F5344CB8AC3E}">
-        <p14:creationId xmlns:p14="http://schemas.microsoft.com/office/powerpoint/2010/main" val="2914600962"/>
+        <p14:creationId xmlns:p14="http://schemas.microsoft.com/office/powerpoint/2010/main" val="125078281"/>
       </p:ext>
     </p:extLst>
   </p:cSld>
@@ -9389,7 +10965,7 @@
         <p:spPr>
           <a:xfrm>
             <a:off x="567542" y="1216429"/>
-            <a:ext cx="11413702" cy="1200329"/>
+            <a:ext cx="7571303" cy="830997"/>
           </a:xfrm>
           <a:prstGeom prst="rect">
             <a:avLst/>
@@ -9404,61 +10980,22 @@
           <a:p>
             <a:r>
               <a:rPr lang="ja-JP" altLang="en-US" sz="2400" dirty="0"/>
-              <a:t>開いたものは</a:t>
-            </a:r>
-            <a:r>
-              <a:rPr lang="ja-JP" altLang="en-US" sz="2400" b="1" dirty="0">
-                <a:solidFill>
-                  <a:srgbClr val="0070C0"/>
-                </a:solidFill>
-              </a:rPr>
-              <a:t>ブループリント</a:t>
-            </a:r>
-            <a:r>
-              <a:rPr lang="ja-JP" altLang="en-US" sz="2400" dirty="0"/>
-              <a:t>と呼ばれる</a:t>
-            </a:r>
-            <a:r>
-              <a:rPr lang="ja-JP" altLang="en-US" sz="2400" b="1" dirty="0">
-                <a:solidFill>
-                  <a:srgbClr val="0070C0"/>
-                </a:solidFill>
-              </a:rPr>
-              <a:t>コインの設計書</a:t>
-            </a:r>
-            <a:r>
-              <a:rPr lang="ja-JP" altLang="en-US" sz="2400" dirty="0"/>
-              <a:t>になります。</a:t>
-            </a:r>
-            <a:endParaRPr lang="en-US" altLang="ja-JP" sz="2400" dirty="0"/>
-          </a:p>
-          <a:p>
-            <a:r>
-              <a:rPr lang="ja-JP" altLang="en-US" sz="2400" dirty="0"/>
-              <a:t>ブループリントでは</a:t>
-            </a:r>
-            <a:r>
-              <a:rPr lang="ja-JP" altLang="en-US" sz="2400" b="1" dirty="0">
-                <a:solidFill>
-                  <a:srgbClr val="FF0000"/>
-                </a:solidFill>
-              </a:rPr>
-              <a:t>プログラムを書いたり、細かい設定ができたりします。</a:t>
-            </a:r>
-            <a:endParaRPr lang="en-US" altLang="ja-JP" sz="2400" b="1" dirty="0">
-              <a:solidFill>
-                <a:srgbClr val="FF0000"/>
-              </a:solidFill>
-            </a:endParaRPr>
-          </a:p>
-          <a:p>
+              <a:t>これが</a:t>
+            </a:r>
             <a:r>
               <a:rPr lang="en-US" altLang="ja-JP" sz="2400" dirty="0"/>
               <a:t>Unreal Engine</a:t>
             </a:r>
             <a:r>
               <a:rPr lang="ja-JP" altLang="en-US" sz="2400" dirty="0"/>
-              <a:t>での開発ではとても大事な要素で、このあともたくさん使います。</a:t>
+              <a:t>の画面です！！</a:t>
+            </a:r>
+            <a:endParaRPr lang="en-US" altLang="ja-JP" sz="2400" dirty="0"/>
+          </a:p>
+          <a:p>
+            <a:r>
+              <a:rPr lang="ja-JP" altLang="en-US" sz="2400" dirty="0"/>
+              <a:t>真ん中の大きな画面がゲームのステージになります。</a:t>
             </a:r>
             <a:endParaRPr lang="en-US" altLang="ja-JP" sz="2400" dirty="0"/>
           </a:p>
@@ -9466,10 +11003,10 @@
       </p:sp>
       <p:pic>
         <p:nvPicPr>
-          <p:cNvPr id="7" name="図 6">
-            <a:extLst>
-              <a:ext uri="{FF2B5EF4-FFF2-40B4-BE49-F238E27FC236}">
-                <a16:creationId xmlns:a16="http://schemas.microsoft.com/office/drawing/2014/main" id="{00DDFA51-5B28-4286-8E37-E053F7F96745}"/>
+          <p:cNvPr id="3" name="図 2">
+            <a:extLst>
+              <a:ext uri="{FF2B5EF4-FFF2-40B4-BE49-F238E27FC236}">
+                <a16:creationId xmlns:a16="http://schemas.microsoft.com/office/drawing/2014/main" id="{55DE3617-D32F-4115-B10A-3F2FE31152E2}"/>
               </a:ext>
             </a:extLst>
           </p:cNvPr>
@@ -9486,8 +11023,8 @@
         </p:blipFill>
         <p:spPr>
           <a:xfrm>
-            <a:off x="567542" y="2556458"/>
-            <a:ext cx="7382658" cy="3998940"/>
+            <a:off x="567542" y="2187126"/>
+            <a:ext cx="7801828" cy="4258498"/>
           </a:xfrm>
           <a:prstGeom prst="rect">
             <a:avLst/>
@@ -9497,7 +11034,7 @@
     </p:spTree>
     <p:extLst>
       <p:ext uri="{BB962C8B-B14F-4D97-AF65-F5344CB8AC3E}">
-        <p14:creationId xmlns:p14="http://schemas.microsoft.com/office/powerpoint/2010/main" val="2164466022"/>
+        <p14:creationId xmlns:p14="http://schemas.microsoft.com/office/powerpoint/2010/main" val="968893246"/>
       </p:ext>
     </p:extLst>
   </p:cSld>
